--- a/newpaper/presentation/itis_presentation.pptx
+++ b/newpaper/presentation/itis_presentation.pptx
@@ -25,9 +25,10 @@
     <p:sldId id="273" r:id="rId19"/>
     <p:sldId id="274" r:id="rId20"/>
     <p:sldId id="275" r:id="rId21"/>
+    <p:sldId id="276" r:id="rId22"/>
   </p:sldIdLst>
   <p:notesMasterIdLst>
-    <p:notesMasterId r:id="rId22"/>
+    <p:notesMasterId r:id="rId23"/>
   </p:notesMasterIdLst>
   <p:sldSz cx="9144000" cy="5143500"/>
   <p:notesSz cx="5143500" cy="9144000"/>
@@ -2222,6 +2223,94 @@
             <a:fld id="{F7021451-1387-4CA6-816F-3879F97B5CBC}" type="slidenum">
               <a:rPr lang="en-US"/>
               <a:t>20</a:t>
+            </a:fld>
+            <a:endParaRPr lang="en-US"/>
+          </a:p>
+        </p:txBody>
+      </p:sp>
+    </p:spTree>
+    <p:extLst>
+      <p:ext uri="{BB962C8B-B14F-4D97-AF65-F5344CB8AC3E}">
+        <p14:creationId xmlns:p14="http://schemas.microsoft.com/office/powerpoint/2010/main" val="1024086991"/>
+      </p:ext>
+    </p:extLst>
+  </p:cSld>
+  <p:clrMapOvr>
+    <a:masterClrMapping/>
+  </p:clrMapOvr>
+</p:notes>
+</file>
+
+<file path=ppt/notesSlides/notesSlide21.xml><?xml version="1.0" encoding="utf-8"?>
+<p:notes xmlns:a="http://schemas.openxmlformats.org/drawingml/2006/main" xmlns:r="http://schemas.openxmlformats.org/officeDocument/2006/relationships" xmlns:p="http://schemas.openxmlformats.org/presentationml/2006/main">
+  <p:cSld>
+    <p:spTree>
+      <p:nvGrpSpPr>
+        <p:cNvPr id="1" name=""/>
+        <p:cNvGrpSpPr/>
+        <p:nvPr/>
+      </p:nvGrpSpPr>
+      <p:grpSpPr>
+        <a:xfrm>
+          <a:off x="0" y="0"/>
+          <a:ext cx="0" cy="0"/>
+          <a:chOff x="0" y="0"/>
+          <a:chExt cx="0" cy="0"/>
+        </a:xfrm>
+      </p:grpSpPr>
+      <p:sp>
+        <p:nvSpPr>
+          <p:cNvPr id="2" name="Slide Image Placeholder 1"/>
+          <p:cNvSpPr>
+            <a:spLocks noGrp="1" noRot="1" noChangeAspect="1"/>
+          </p:cNvSpPr>
+          <p:nvPr>
+            <p:ph type="sldImg"/>
+          </p:nvPr>
+        </p:nvSpPr>
+        <p:spPr/>
+      </p:sp>
+      <p:sp>
+        <p:nvSpPr>
+          <p:cNvPr id="3" name="Notes Placeholder 2"/>
+          <p:cNvSpPr>
+            <a:spLocks noGrp="1"/>
+          </p:cNvSpPr>
+          <p:nvPr>
+            <p:ph type="body" idx="1"/>
+          </p:nvPr>
+        </p:nvSpPr>
+        <p:spPr/>
+        <p:txBody>
+          <a:bodyPr/>
+          <a:lstStyle/>
+          <a:p>
+            <a:r>
+              <a:rPr lang="en-US" dirty="0"/>
+              <a:t/>
+            </a:r>
+            <a:endParaRPr lang="en-US" dirty="0"/>
+          </a:p>
+        </p:txBody>
+      </p:sp>
+      <p:sp>
+        <p:nvSpPr>
+          <p:cNvPr id="4" name="Slide Number Placeholder 3"/>
+          <p:cNvSpPr>
+            <a:spLocks noGrp="1"/>
+          </p:cNvSpPr>
+          <p:nvPr>
+            <p:ph type="sldNum" sz="quarter" idx="10"/>
+          </p:nvPr>
+        </p:nvSpPr>
+        <p:spPr/>
+        <p:txBody>
+          <a:bodyPr/>
+          <a:lstStyle/>
+          <a:p>
+            <a:fld id="{F7021451-1387-4CA6-816F-3879F97B5CBC}" type="slidenum">
+              <a:rPr lang="en-US"/>
+              <a:t>21</a:t>
             </a:fld>
             <a:endParaRPr lang="en-US"/>
           </a:p>
@@ -3333,7 +3422,7 @@
         <p:spPr>
           <a:xfrm>
             <a:off x="640080" y="3611880"/>
-            <a:ext cx="7863840" cy="457200"/>
+            <a:ext cx="7863840" cy="365760"/>
           </a:xfrm>
           <a:prstGeom prst="rect">
             <a:avLst/>
@@ -3357,9 +3446,48 @@
                 <a:ea typeface="Arial" pitchFamily="34" charset="-122"/>
                 <a:cs typeface="Arial" pitchFamily="34" charset="-120"/>
               </a:rPr>
-              <a:t>M. Hamdani Ilham Latjoro</a:t>
+              <a:t>M. Hamdani Ilham Latjoro, Adnan</a:t>
             </a:r>
             <a:endParaRPr lang="en-US" sz="1700" dirty="0"/>
+          </a:p>
+        </p:txBody>
+      </p:sp>
+      <p:sp>
+        <p:nvSpPr>
+          <p:cNvPr id="7" name="Text 5"/>
+          <p:cNvSpPr/>
+          <p:nvPr/>
+        </p:nvSpPr>
+        <p:spPr>
+          <a:xfrm>
+            <a:off x="640080" y="3977640"/>
+            <a:ext cx="7863840" cy="365760"/>
+          </a:xfrm>
+          <a:prstGeom prst="rect">
+            <a:avLst/>
+          </a:prstGeom>
+          <a:noFill/>
+          <a:ln/>
+        </p:spPr>
+        <p:txBody>
+          <a:bodyPr wrap="square" rtlCol="0" anchor="ctr"/>
+          <a:lstStyle/>
+          <a:p>
+            <a:pPr indent="0" marL="0">
+              <a:buNone/>
+            </a:pPr>
+            <a:r>
+              <a:rPr lang="en-US" sz="1300" i="1" dirty="0">
+                <a:solidFill>
+                  <a:srgbClr val="CADCFC"/>
+                </a:solidFill>
+                <a:latin typeface="Arial" pitchFamily="34" charset="0"/>
+                <a:ea typeface="Arial" pitchFamily="34" charset="-122"/>
+                <a:cs typeface="Arial" pitchFamily="34" charset="-120"/>
+              </a:rPr>
+              <a:t>Dept. of Informatics Engineering, Hasanuddin University, Makassar, Indonesia</a:t>
+            </a:r>
+            <a:endParaRPr lang="en-US" sz="1300" dirty="0"/>
           </a:p>
         </p:txBody>
       </p:sp>
@@ -4027,7 +4155,7 @@
                 <a:ea typeface="Arial" pitchFamily="34" charset="-122"/>
                 <a:cs typeface="Arial" pitchFamily="34" charset="-120"/>
               </a:rPr>
-              <a:t>Why: an L2-cache boundary</a:t>
+              <a:t>Why: a memory-bandwidth boundary</a:t>
             </a:r>
             <a:endParaRPr lang="en-US" sz="2000" dirty="0"/>
           </a:p>
@@ -4070,7 +4198,7 @@
                 <a:ea typeface="Arial" pitchFamily="34" charset="-122"/>
                 <a:cs typeface="Arial" pitchFamily="34" charset="-120"/>
               </a:rPr>
-              <a:t>RTX 4090's 72 MB L2 holds the 43.3 MiB private buffer → reduction served from cache.</a:t>
+              <a:t>GB10 streams the 43.3 MiB private buffer from unified DRAM at 95% of peak bandwidth.</a:t>
             </a:r>
             <a:endParaRPr lang="en-US" sz="1300" dirty="0"/>
           </a:p>
@@ -4090,7 +4218,7 @@
                 <a:ea typeface="Arial" pitchFamily="34" charset="-122"/>
                 <a:cs typeface="Arial" pitchFamily="34" charset="-120"/>
               </a:rPr>
-              <a:t>GB10 streams the buffer from unified DRAM at 95% of peak bandwidth → 10× costlier.</a:t>
+              <a:t>RTX 4090's reduction is 10× faster — but measured hardware counters rule out L2 caching as the reason (next slide).</a:t>
             </a:r>
             <a:endParaRPr lang="en-US" sz="1300" dirty="0"/>
           </a:p>
@@ -4110,7 +4238,7 @@
                 <a:ea typeface="Arial" pitchFamily="34" charset="-122"/>
                 <a:cs typeface="Arial" pitchFamily="34" charset="-120"/>
               </a:rPr>
-              <a:t>This L2 story is currently inferred from bandwidth arithmetic, not measured directly (see Open Questions).</a:t>
+              <a:t>Both platforms are bandwidth-bound; the gap tracks raw memory throughput, not cache residency.</a:t>
             </a:r>
             <a:endParaRPr lang="en-US" sz="1300" dirty="0"/>
           </a:p>
@@ -4149,7 +4277,7 @@
                 <a:ea typeface="Arial" pitchFamily="34" charset="-122"/>
                 <a:cs typeface="Arial" pitchFamily="34" charset="-120"/>
               </a:rPr>
-              <a:t>Section VI-D, Table III</a:t>
+              <a:t>Section IV-D, Table III</a:t>
             </a:r>
             <a:endParaRPr lang="en-US" sz="1300" dirty="0"/>
           </a:p>
@@ -4189,7 +4317,7 @@
         <p:spPr>
           <a:xfrm>
             <a:off x="457200" y="182880"/>
-            <a:ext cx="8229600" cy="822960"/>
+            <a:ext cx="8229600" cy="914400"/>
           </a:xfrm>
           <a:prstGeom prst="rect">
             <a:avLst/>
@@ -4213,7 +4341,7 @@
                 <a:ea typeface="Arial" pitchFamily="34" charset="-122"/>
                 <a:cs typeface="Arial" pitchFamily="34" charset="-120"/>
               </a:rPr>
-              <a:t>GPU output is bit-identical across two host ISAs and two GPU generations</a:t>
+              <a:t>Measured L2 hit rate rules out cache residency as the reduction speedup's cause</a:t>
             </a:r>
             <a:endParaRPr lang="en-US" sz="2600" dirty="0"/>
           </a:p>
@@ -4227,7 +4355,7 @@
         </p:nvSpPr>
         <p:spPr>
           <a:xfrm>
-            <a:off x="457200" y="960120"/>
+            <a:off x="457200" y="1051560"/>
             <a:ext cx="8229600" cy="22860"/>
           </a:xfrm>
           <a:prstGeom prst="rect">
@@ -4239,43 +4367,844 @@
           <a:ln/>
         </p:spPr>
       </p:sp>
-      <p:sp>
-        <p:nvSpPr>
-          <p:cNvPr id="4" name="Shape 2"/>
+      <p:graphicFrame>
+        <p:nvGraphicFramePr>
+          <p:cNvPr id="14" name="Table 0"/>
+          <p:cNvGraphicFramePr>
+            <a:graphicFrameLocks noGrp="1"/>
+          </p:cNvGraphicFramePr>
+          <p:nvPr>
+            <p:extLst>
+              <p:ext uri="{D42A27DB-BD31-4B8C-83A1-F6EECF244321}">
+                <p14:modId xmlns:p14="http://schemas.microsoft.com/office/powerpoint/2010/main" val="1579011935"/>
+              </p:ext>
+            </p:extLst>
+          </p:nvPr>
+        </p:nvGraphicFramePr>
+        <p:xfrm>
+          <a:off x="457200" y="1188720"/>
+          <a:ext cx="8229600" cy="1645920"/>
+        </p:xfrm>
+        <a:graphic>
+          <a:graphicData uri="http://schemas.openxmlformats.org/drawingml/2006/table">
+            <a:tbl>
+              <a:tblPr/>
+              <a:tblGrid>
+                <a:gridCol w="2743200"/>
+                <a:gridCol w="2743200"/>
+                <a:gridCol w="2743200"/>
+              </a:tblGrid>
+              <a:tr h="411480">
+                <a:tc>
+                  <a:txBody>
+                    <a:bodyPr/>
+                    <a:lstStyle/>
+                    <a:p>
+                      <a:pPr indent="0" marL="0">
+                        <a:buNone/>
+                      </a:pPr>
+                      <a:r>
+                        <a:rPr lang="en-US" sz="1500" b="1" dirty="0">
+                          <a:solidFill>
+                            <a:srgbClr val="FFFFFF"/>
+                          </a:solidFill>
+                          <a:latin typeface="Arial" pitchFamily="34" charset="0"/>
+                          <a:ea typeface="Arial" pitchFamily="34" charset="-122"/>
+                          <a:cs typeface="Arial" pitchFamily="34" charset="-120"/>
+                        </a:rPr>
+                        <a:t>Metric (spatial_reduction_kernel)</a:t>
+                      </a:r>
+                      <a:endParaRPr lang="en-US" sz="1500" dirty="0">
+                        <a:latin typeface="Arial" charset="0"/>
+                        <a:ea typeface="Arial" charset="0"/>
+                        <a:cs typeface="Arial" charset="0"/>
+                      </a:endParaRPr>
+                    </a:p>
+                  </a:txBody>
+                  <a:tcPr marL="91440" marR="91440" marT="45720" marB="45720" anchor="ctr">
+                    <a:lnL w="6350" cap="flat" cmpd="sng" algn="ctr">
+                      <a:solidFill>
+                        <a:srgbClr val="CCCCCC"/>
+                      </a:solidFill>
+                      <a:prstDash val="solid"/>
+                      <a:round/>
+                      <a:headEnd type="none" w="med" len="med"/>
+                      <a:tailEnd type="none" w="med" len="med"/>
+                    </a:lnL>
+                    <a:lnR w="6350" cap="flat" cmpd="sng" algn="ctr">
+                      <a:solidFill>
+                        <a:srgbClr val="CCCCCC"/>
+                      </a:solidFill>
+                      <a:prstDash val="solid"/>
+                      <a:round/>
+                      <a:headEnd type="none" w="med" len="med"/>
+                      <a:tailEnd type="none" w="med" len="med"/>
+                    </a:lnR>
+                    <a:lnT w="6350" cap="flat" cmpd="sng" algn="ctr">
+                      <a:solidFill>
+                        <a:srgbClr val="CCCCCC"/>
+                      </a:solidFill>
+                      <a:prstDash val="solid"/>
+                      <a:round/>
+                      <a:headEnd type="none" w="med" len="med"/>
+                      <a:tailEnd type="none" w="med" len="med"/>
+                    </a:lnT>
+                    <a:lnB w="6350" cap="flat" cmpd="sng" algn="ctr">
+                      <a:solidFill>
+                        <a:srgbClr val="CCCCCC"/>
+                      </a:solidFill>
+                      <a:prstDash val="solid"/>
+                      <a:round/>
+                      <a:headEnd type="none" w="med" len="med"/>
+                      <a:tailEnd type="none" w="med" len="med"/>
+                    </a:lnB>
+                    <a:solidFill>
+                      <a:srgbClr val="1F4E79"/>
+                    </a:solidFill>
+                  </a:tcPr>
+                </a:tc>
+                <a:tc>
+                  <a:txBody>
+                    <a:bodyPr/>
+                    <a:lstStyle/>
+                    <a:p>
+                      <a:pPr indent="0" marL="0">
+                        <a:buNone/>
+                      </a:pPr>
+                      <a:r>
+                        <a:rPr lang="en-US" sz="1500" b="1" dirty="0">
+                          <a:solidFill>
+                            <a:srgbClr val="FFFFFF"/>
+                          </a:solidFill>
+                          <a:latin typeface="Arial" pitchFamily="34" charset="0"/>
+                          <a:ea typeface="Arial" pitchFamily="34" charset="-122"/>
+                          <a:cs typeface="Arial" pitchFamily="34" charset="-120"/>
+                        </a:rPr>
+                        <a:t>GB10</a:t>
+                      </a:r>
+                      <a:endParaRPr lang="en-US" sz="1500" dirty="0">
+                        <a:latin typeface="Arial" charset="0"/>
+                        <a:ea typeface="Arial" charset="0"/>
+                        <a:cs typeface="Arial" charset="0"/>
+                      </a:endParaRPr>
+                    </a:p>
+                  </a:txBody>
+                  <a:tcPr marL="91440" marR="91440" marT="45720" marB="45720" anchor="ctr">
+                    <a:lnL w="6350" cap="flat" cmpd="sng" algn="ctr">
+                      <a:solidFill>
+                        <a:srgbClr val="CCCCCC"/>
+                      </a:solidFill>
+                      <a:prstDash val="solid"/>
+                      <a:round/>
+                      <a:headEnd type="none" w="med" len="med"/>
+                      <a:tailEnd type="none" w="med" len="med"/>
+                    </a:lnL>
+                    <a:lnR w="6350" cap="flat" cmpd="sng" algn="ctr">
+                      <a:solidFill>
+                        <a:srgbClr val="CCCCCC"/>
+                      </a:solidFill>
+                      <a:prstDash val="solid"/>
+                      <a:round/>
+                      <a:headEnd type="none" w="med" len="med"/>
+                      <a:tailEnd type="none" w="med" len="med"/>
+                    </a:lnR>
+                    <a:lnT w="6350" cap="flat" cmpd="sng" algn="ctr">
+                      <a:solidFill>
+                        <a:srgbClr val="CCCCCC"/>
+                      </a:solidFill>
+                      <a:prstDash val="solid"/>
+                      <a:round/>
+                      <a:headEnd type="none" w="med" len="med"/>
+                      <a:tailEnd type="none" w="med" len="med"/>
+                    </a:lnT>
+                    <a:lnB w="6350" cap="flat" cmpd="sng" algn="ctr">
+                      <a:solidFill>
+                        <a:srgbClr val="CCCCCC"/>
+                      </a:solidFill>
+                      <a:prstDash val="solid"/>
+                      <a:round/>
+                      <a:headEnd type="none" w="med" len="med"/>
+                      <a:tailEnd type="none" w="med" len="med"/>
+                    </a:lnB>
+                    <a:solidFill>
+                      <a:srgbClr val="1F4E79"/>
+                    </a:solidFill>
+                  </a:tcPr>
+                </a:tc>
+                <a:tc>
+                  <a:txBody>
+                    <a:bodyPr/>
+                    <a:lstStyle/>
+                    <a:p>
+                      <a:pPr indent="0" marL="0">
+                        <a:buNone/>
+                      </a:pPr>
+                      <a:r>
+                        <a:rPr lang="en-US" sz="1500" b="1" dirty="0">
+                          <a:solidFill>
+                            <a:srgbClr val="FFFFFF"/>
+                          </a:solidFill>
+                          <a:latin typeface="Arial" pitchFamily="34" charset="0"/>
+                          <a:ea typeface="Arial" pitchFamily="34" charset="-122"/>
+                          <a:cs typeface="Arial" pitchFamily="34" charset="-120"/>
+                        </a:rPr>
+                        <a:t>RTX 4090</a:t>
+                      </a:r>
+                      <a:endParaRPr lang="en-US" sz="1500" dirty="0">
+                        <a:latin typeface="Arial" charset="0"/>
+                        <a:ea typeface="Arial" charset="0"/>
+                        <a:cs typeface="Arial" charset="0"/>
+                      </a:endParaRPr>
+                    </a:p>
+                  </a:txBody>
+                  <a:tcPr marL="91440" marR="91440" marT="45720" marB="45720" anchor="ctr">
+                    <a:lnL w="6350" cap="flat" cmpd="sng" algn="ctr">
+                      <a:solidFill>
+                        <a:srgbClr val="CCCCCC"/>
+                      </a:solidFill>
+                      <a:prstDash val="solid"/>
+                      <a:round/>
+                      <a:headEnd type="none" w="med" len="med"/>
+                      <a:tailEnd type="none" w="med" len="med"/>
+                    </a:lnL>
+                    <a:lnR w="6350" cap="flat" cmpd="sng" algn="ctr">
+                      <a:solidFill>
+                        <a:srgbClr val="CCCCCC"/>
+                      </a:solidFill>
+                      <a:prstDash val="solid"/>
+                      <a:round/>
+                      <a:headEnd type="none" w="med" len="med"/>
+                      <a:tailEnd type="none" w="med" len="med"/>
+                    </a:lnR>
+                    <a:lnT w="6350" cap="flat" cmpd="sng" algn="ctr">
+                      <a:solidFill>
+                        <a:srgbClr val="CCCCCC"/>
+                      </a:solidFill>
+                      <a:prstDash val="solid"/>
+                      <a:round/>
+                      <a:headEnd type="none" w="med" len="med"/>
+                      <a:tailEnd type="none" w="med" len="med"/>
+                    </a:lnT>
+                    <a:lnB w="6350" cap="flat" cmpd="sng" algn="ctr">
+                      <a:solidFill>
+                        <a:srgbClr val="CCCCCC"/>
+                      </a:solidFill>
+                      <a:prstDash val="solid"/>
+                      <a:round/>
+                      <a:headEnd type="none" w="med" len="med"/>
+                      <a:tailEnd type="none" w="med" len="med"/>
+                    </a:lnB>
+                    <a:solidFill>
+                      <a:srgbClr val="1F4E79"/>
+                    </a:solidFill>
+                  </a:tcPr>
+                </a:tc>
+              </a:tr>
+              <a:tr h="411480">
+                <a:tc>
+                  <a:txBody>
+                    <a:bodyPr/>
+                    <a:lstStyle/>
+                    <a:p>
+                      <a:pPr indent="0" marL="0">
+                        <a:buNone/>
+                      </a:pPr>
+                      <a:r>
+                        <a:rPr lang="en-US" sz="1500" dirty="0">
+                          <a:solidFill>
+                            <a:srgbClr val="2D2D2D"/>
+                          </a:solidFill>
+                          <a:latin typeface="Arial" pitchFamily="34" charset="0"/>
+                          <a:ea typeface="Arial" pitchFamily="34" charset="-122"/>
+                          <a:cs typeface="Arial" pitchFamily="34" charset="-120"/>
+                        </a:rPr>
+                        <a:t>L2 hit rate</a:t>
+                      </a:r>
+                      <a:endParaRPr lang="en-US" sz="1500" dirty="0">
+                        <a:latin typeface="Arial" charset="0"/>
+                        <a:ea typeface="Arial" charset="0"/>
+                        <a:cs typeface="Arial" charset="0"/>
+                      </a:endParaRPr>
+                    </a:p>
+                  </a:txBody>
+                  <a:tcPr marL="91440" marR="91440" marT="45720" marB="45720" anchor="ctr">
+                    <a:lnL w="6350" cap="flat" cmpd="sng" algn="ctr">
+                      <a:solidFill>
+                        <a:srgbClr val="CCCCCC"/>
+                      </a:solidFill>
+                      <a:prstDash val="solid"/>
+                      <a:round/>
+                      <a:headEnd type="none" w="med" len="med"/>
+                      <a:tailEnd type="none" w="med" len="med"/>
+                    </a:lnL>
+                    <a:lnR w="6350" cap="flat" cmpd="sng" algn="ctr">
+                      <a:solidFill>
+                        <a:srgbClr val="CCCCCC"/>
+                      </a:solidFill>
+                      <a:prstDash val="solid"/>
+                      <a:round/>
+                      <a:headEnd type="none" w="med" len="med"/>
+                      <a:tailEnd type="none" w="med" len="med"/>
+                    </a:lnR>
+                    <a:lnT w="6350" cap="flat" cmpd="sng" algn="ctr">
+                      <a:solidFill>
+                        <a:srgbClr val="CCCCCC"/>
+                      </a:solidFill>
+                      <a:prstDash val="solid"/>
+                      <a:round/>
+                      <a:headEnd type="none" w="med" len="med"/>
+                      <a:tailEnd type="none" w="med" len="med"/>
+                    </a:lnT>
+                    <a:lnB w="6350" cap="flat" cmpd="sng" algn="ctr">
+                      <a:solidFill>
+                        <a:srgbClr val="CCCCCC"/>
+                      </a:solidFill>
+                      <a:prstDash val="solid"/>
+                      <a:round/>
+                      <a:headEnd type="none" w="med" len="med"/>
+                      <a:tailEnd type="none" w="med" len="med"/>
+                    </a:lnB>
+                  </a:tcPr>
+                </a:tc>
+                <a:tc>
+                  <a:txBody>
+                    <a:bodyPr/>
+                    <a:lstStyle/>
+                    <a:p>
+                      <a:pPr indent="0" marL="0">
+                        <a:buNone/>
+                      </a:pPr>
+                      <a:r>
+                        <a:rPr lang="en-US" sz="1500" dirty="0">
+                          <a:solidFill>
+                            <a:srgbClr val="2D2D2D"/>
+                          </a:solidFill>
+                          <a:latin typeface="Arial" pitchFamily="34" charset="0"/>
+                          <a:ea typeface="Arial" pitchFamily="34" charset="-122"/>
+                          <a:cs typeface="Arial" pitchFamily="34" charset="-120"/>
+                        </a:rPr>
+                        <a:t>0.07%</a:t>
+                      </a:r>
+                      <a:endParaRPr lang="en-US" sz="1500" dirty="0">
+                        <a:latin typeface="Arial" charset="0"/>
+                        <a:ea typeface="Arial" charset="0"/>
+                        <a:cs typeface="Arial" charset="0"/>
+                      </a:endParaRPr>
+                    </a:p>
+                  </a:txBody>
+                  <a:tcPr marL="91440" marR="91440" marT="45720" marB="45720" anchor="ctr">
+                    <a:lnL w="6350" cap="flat" cmpd="sng" algn="ctr">
+                      <a:solidFill>
+                        <a:srgbClr val="CCCCCC"/>
+                      </a:solidFill>
+                      <a:prstDash val="solid"/>
+                      <a:round/>
+                      <a:headEnd type="none" w="med" len="med"/>
+                      <a:tailEnd type="none" w="med" len="med"/>
+                    </a:lnL>
+                    <a:lnR w="6350" cap="flat" cmpd="sng" algn="ctr">
+                      <a:solidFill>
+                        <a:srgbClr val="CCCCCC"/>
+                      </a:solidFill>
+                      <a:prstDash val="solid"/>
+                      <a:round/>
+                      <a:headEnd type="none" w="med" len="med"/>
+                      <a:tailEnd type="none" w="med" len="med"/>
+                    </a:lnR>
+                    <a:lnT w="6350" cap="flat" cmpd="sng" algn="ctr">
+                      <a:solidFill>
+                        <a:srgbClr val="CCCCCC"/>
+                      </a:solidFill>
+                      <a:prstDash val="solid"/>
+                      <a:round/>
+                      <a:headEnd type="none" w="med" len="med"/>
+                      <a:tailEnd type="none" w="med" len="med"/>
+                    </a:lnT>
+                    <a:lnB w="6350" cap="flat" cmpd="sng" algn="ctr">
+                      <a:solidFill>
+                        <a:srgbClr val="CCCCCC"/>
+                      </a:solidFill>
+                      <a:prstDash val="solid"/>
+                      <a:round/>
+                      <a:headEnd type="none" w="med" len="med"/>
+                      <a:tailEnd type="none" w="med" len="med"/>
+                    </a:lnB>
+                  </a:tcPr>
+                </a:tc>
+                <a:tc>
+                  <a:txBody>
+                    <a:bodyPr/>
+                    <a:lstStyle/>
+                    <a:p>
+                      <a:pPr indent="0" marL="0">
+                        <a:buNone/>
+                      </a:pPr>
+                      <a:r>
+                        <a:rPr lang="en-US" sz="1500" dirty="0">
+                          <a:solidFill>
+                            <a:srgbClr val="2D2D2D"/>
+                          </a:solidFill>
+                          <a:latin typeface="Arial" pitchFamily="34" charset="0"/>
+                          <a:ea typeface="Arial" pitchFamily="34" charset="-122"/>
+                          <a:cs typeface="Arial" pitchFamily="34" charset="-120"/>
+                        </a:rPr>
+                        <a:t>2.1%</a:t>
+                      </a:r>
+                      <a:endParaRPr lang="en-US" sz="1500" dirty="0">
+                        <a:latin typeface="Arial" charset="0"/>
+                        <a:ea typeface="Arial" charset="0"/>
+                        <a:cs typeface="Arial" charset="0"/>
+                      </a:endParaRPr>
+                    </a:p>
+                  </a:txBody>
+                  <a:tcPr marL="91440" marR="91440" marT="45720" marB="45720" anchor="ctr">
+                    <a:lnL w="6350" cap="flat" cmpd="sng" algn="ctr">
+                      <a:solidFill>
+                        <a:srgbClr val="CCCCCC"/>
+                      </a:solidFill>
+                      <a:prstDash val="solid"/>
+                      <a:round/>
+                      <a:headEnd type="none" w="med" len="med"/>
+                      <a:tailEnd type="none" w="med" len="med"/>
+                    </a:lnL>
+                    <a:lnR w="6350" cap="flat" cmpd="sng" algn="ctr">
+                      <a:solidFill>
+                        <a:srgbClr val="CCCCCC"/>
+                      </a:solidFill>
+                      <a:prstDash val="solid"/>
+                      <a:round/>
+                      <a:headEnd type="none" w="med" len="med"/>
+                      <a:tailEnd type="none" w="med" len="med"/>
+                    </a:lnR>
+                    <a:lnT w="6350" cap="flat" cmpd="sng" algn="ctr">
+                      <a:solidFill>
+                        <a:srgbClr val="CCCCCC"/>
+                      </a:solidFill>
+                      <a:prstDash val="solid"/>
+                      <a:round/>
+                      <a:headEnd type="none" w="med" len="med"/>
+                      <a:tailEnd type="none" w="med" len="med"/>
+                    </a:lnT>
+                    <a:lnB w="6350" cap="flat" cmpd="sng" algn="ctr">
+                      <a:solidFill>
+                        <a:srgbClr val="CCCCCC"/>
+                      </a:solidFill>
+                      <a:prstDash val="solid"/>
+                      <a:round/>
+                      <a:headEnd type="none" w="med" len="med"/>
+                      <a:tailEnd type="none" w="med" len="med"/>
+                    </a:lnB>
+                  </a:tcPr>
+                </a:tc>
+              </a:tr>
+              <a:tr h="411480">
+                <a:tc>
+                  <a:txBody>
+                    <a:bodyPr/>
+                    <a:lstStyle/>
+                    <a:p>
+                      <a:pPr indent="0" marL="0">
+                        <a:buNone/>
+                      </a:pPr>
+                      <a:r>
+                        <a:rPr lang="en-US" sz="1500" dirty="0">
+                          <a:solidFill>
+                            <a:srgbClr val="2D2D2D"/>
+                          </a:solidFill>
+                          <a:latin typeface="Arial" pitchFamily="34" charset="0"/>
+                          <a:ea typeface="Arial" pitchFamily="34" charset="-122"/>
+                          <a:cs typeface="Arial" pitchFamily="34" charset="-120"/>
+                        </a:rPr>
+                        <a:t>Memory-pipeline throughput</a:t>
+                      </a:r>
+                      <a:endParaRPr lang="en-US" sz="1500" dirty="0">
+                        <a:latin typeface="Arial" charset="0"/>
+                        <a:ea typeface="Arial" charset="0"/>
+                        <a:cs typeface="Arial" charset="0"/>
+                      </a:endParaRPr>
+                    </a:p>
+                  </a:txBody>
+                  <a:tcPr marL="91440" marR="91440" marT="45720" marB="45720" anchor="ctr">
+                    <a:lnL w="6350" cap="flat" cmpd="sng" algn="ctr">
+                      <a:solidFill>
+                        <a:srgbClr val="CCCCCC"/>
+                      </a:solidFill>
+                      <a:prstDash val="solid"/>
+                      <a:round/>
+                      <a:headEnd type="none" w="med" len="med"/>
+                      <a:tailEnd type="none" w="med" len="med"/>
+                    </a:lnL>
+                    <a:lnR w="6350" cap="flat" cmpd="sng" algn="ctr">
+                      <a:solidFill>
+                        <a:srgbClr val="CCCCCC"/>
+                      </a:solidFill>
+                      <a:prstDash val="solid"/>
+                      <a:round/>
+                      <a:headEnd type="none" w="med" len="med"/>
+                      <a:tailEnd type="none" w="med" len="med"/>
+                    </a:lnR>
+                    <a:lnT w="6350" cap="flat" cmpd="sng" algn="ctr">
+                      <a:solidFill>
+                        <a:srgbClr val="CCCCCC"/>
+                      </a:solidFill>
+                      <a:prstDash val="solid"/>
+                      <a:round/>
+                      <a:headEnd type="none" w="med" len="med"/>
+                      <a:tailEnd type="none" w="med" len="med"/>
+                    </a:lnT>
+                    <a:lnB w="6350" cap="flat" cmpd="sng" algn="ctr">
+                      <a:solidFill>
+                        <a:srgbClr val="CCCCCC"/>
+                      </a:solidFill>
+                      <a:prstDash val="solid"/>
+                      <a:round/>
+                      <a:headEnd type="none" w="med" len="med"/>
+                      <a:tailEnd type="none" w="med" len="med"/>
+                    </a:lnB>
+                  </a:tcPr>
+                </a:tc>
+                <a:tc>
+                  <a:txBody>
+                    <a:bodyPr/>
+                    <a:lstStyle/>
+                    <a:p>
+                      <a:pPr indent="0" marL="0">
+                        <a:buNone/>
+                      </a:pPr>
+                      <a:r>
+                        <a:rPr lang="en-US" sz="1500" dirty="0">
+                          <a:solidFill>
+                            <a:srgbClr val="2D2D2D"/>
+                          </a:solidFill>
+                          <a:latin typeface="Arial" pitchFamily="34" charset="0"/>
+                          <a:ea typeface="Arial" pitchFamily="34" charset="-122"/>
+                          <a:cs typeface="Arial" pitchFamily="34" charset="-120"/>
+                        </a:rPr>
+                        <a:t>11.4% of peak</a:t>
+                      </a:r>
+                      <a:endParaRPr lang="en-US" sz="1500" dirty="0">
+                        <a:latin typeface="Arial" charset="0"/>
+                        <a:ea typeface="Arial" charset="0"/>
+                        <a:cs typeface="Arial" charset="0"/>
+                      </a:endParaRPr>
+                    </a:p>
+                  </a:txBody>
+                  <a:tcPr marL="91440" marR="91440" marT="45720" marB="45720" anchor="ctr">
+                    <a:lnL w="6350" cap="flat" cmpd="sng" algn="ctr">
+                      <a:solidFill>
+                        <a:srgbClr val="CCCCCC"/>
+                      </a:solidFill>
+                      <a:prstDash val="solid"/>
+                      <a:round/>
+                      <a:headEnd type="none" w="med" len="med"/>
+                      <a:tailEnd type="none" w="med" len="med"/>
+                    </a:lnL>
+                    <a:lnR w="6350" cap="flat" cmpd="sng" algn="ctr">
+                      <a:solidFill>
+                        <a:srgbClr val="CCCCCC"/>
+                      </a:solidFill>
+                      <a:prstDash val="solid"/>
+                      <a:round/>
+                      <a:headEnd type="none" w="med" len="med"/>
+                      <a:tailEnd type="none" w="med" len="med"/>
+                    </a:lnR>
+                    <a:lnT w="6350" cap="flat" cmpd="sng" algn="ctr">
+                      <a:solidFill>
+                        <a:srgbClr val="CCCCCC"/>
+                      </a:solidFill>
+                      <a:prstDash val="solid"/>
+                      <a:round/>
+                      <a:headEnd type="none" w="med" len="med"/>
+                      <a:tailEnd type="none" w="med" len="med"/>
+                    </a:lnT>
+                    <a:lnB w="6350" cap="flat" cmpd="sng" algn="ctr">
+                      <a:solidFill>
+                        <a:srgbClr val="CCCCCC"/>
+                      </a:solidFill>
+                      <a:prstDash val="solid"/>
+                      <a:round/>
+                      <a:headEnd type="none" w="med" len="med"/>
+                      <a:tailEnd type="none" w="med" len="med"/>
+                    </a:lnB>
+                  </a:tcPr>
+                </a:tc>
+                <a:tc>
+                  <a:txBody>
+                    <a:bodyPr/>
+                    <a:lstStyle/>
+                    <a:p>
+                      <a:pPr indent="0" marL="0">
+                        <a:buNone/>
+                      </a:pPr>
+                      <a:r>
+                        <a:rPr lang="en-US" sz="1500" dirty="0">
+                          <a:solidFill>
+                            <a:srgbClr val="2D2D2D"/>
+                          </a:solidFill>
+                          <a:latin typeface="Arial" pitchFamily="34" charset="0"/>
+                          <a:ea typeface="Arial" pitchFamily="34" charset="-122"/>
+                          <a:cs typeface="Arial" pitchFamily="34" charset="-120"/>
+                        </a:rPr>
+                        <a:t>90.5% of peak (DRAM)</a:t>
+                      </a:r>
+                      <a:endParaRPr lang="en-US" sz="1500" dirty="0">
+                        <a:latin typeface="Arial" charset="0"/>
+                        <a:ea typeface="Arial" charset="0"/>
+                        <a:cs typeface="Arial" charset="0"/>
+                      </a:endParaRPr>
+                    </a:p>
+                  </a:txBody>
+                  <a:tcPr marL="91440" marR="91440" marT="45720" marB="45720" anchor="ctr">
+                    <a:lnL w="6350" cap="flat" cmpd="sng" algn="ctr">
+                      <a:solidFill>
+                        <a:srgbClr val="CCCCCC"/>
+                      </a:solidFill>
+                      <a:prstDash val="solid"/>
+                      <a:round/>
+                      <a:headEnd type="none" w="med" len="med"/>
+                      <a:tailEnd type="none" w="med" len="med"/>
+                    </a:lnL>
+                    <a:lnR w="6350" cap="flat" cmpd="sng" algn="ctr">
+                      <a:solidFill>
+                        <a:srgbClr val="CCCCCC"/>
+                      </a:solidFill>
+                      <a:prstDash val="solid"/>
+                      <a:round/>
+                      <a:headEnd type="none" w="med" len="med"/>
+                      <a:tailEnd type="none" w="med" len="med"/>
+                    </a:lnR>
+                    <a:lnT w="6350" cap="flat" cmpd="sng" algn="ctr">
+                      <a:solidFill>
+                        <a:srgbClr val="CCCCCC"/>
+                      </a:solidFill>
+                      <a:prstDash val="solid"/>
+                      <a:round/>
+                      <a:headEnd type="none" w="med" len="med"/>
+                      <a:tailEnd type="none" w="med" len="med"/>
+                    </a:lnT>
+                    <a:lnB w="6350" cap="flat" cmpd="sng" algn="ctr">
+                      <a:solidFill>
+                        <a:srgbClr val="CCCCCC"/>
+                      </a:solidFill>
+                      <a:prstDash val="solid"/>
+                      <a:round/>
+                      <a:headEnd type="none" w="med" len="med"/>
+                      <a:tailEnd type="none" w="med" len="med"/>
+                    </a:lnB>
+                  </a:tcPr>
+                </a:tc>
+              </a:tr>
+              <a:tr h="411480">
+                <a:tc>
+                  <a:txBody>
+                    <a:bodyPr/>
+                    <a:lstStyle/>
+                    <a:p>
+                      <a:pPr indent="0" marL="0">
+                        <a:buNone/>
+                      </a:pPr>
+                      <a:r>
+                        <a:rPr lang="en-US" sz="1500" dirty="0">
+                          <a:solidFill>
+                            <a:srgbClr val="2D2D2D"/>
+                          </a:solidFill>
+                          <a:latin typeface="Arial" pitchFamily="34" charset="0"/>
+                          <a:ea typeface="Arial" pitchFamily="34" charset="-122"/>
+                          <a:cs typeface="Arial" pitchFamily="34" charset="-120"/>
+                        </a:rPr>
+                        <a:t>Achieved occupancy</a:t>
+                      </a:r>
+                      <a:endParaRPr lang="en-US" sz="1500" dirty="0">
+                        <a:latin typeface="Arial" charset="0"/>
+                        <a:ea typeface="Arial" charset="0"/>
+                        <a:cs typeface="Arial" charset="0"/>
+                      </a:endParaRPr>
+                    </a:p>
+                  </a:txBody>
+                  <a:tcPr marL="91440" marR="91440" marT="45720" marB="45720" anchor="ctr">
+                    <a:lnL w="6350" cap="flat" cmpd="sng" algn="ctr">
+                      <a:solidFill>
+                        <a:srgbClr val="CCCCCC"/>
+                      </a:solidFill>
+                      <a:prstDash val="solid"/>
+                      <a:round/>
+                      <a:headEnd type="none" w="med" len="med"/>
+                      <a:tailEnd type="none" w="med" len="med"/>
+                    </a:lnL>
+                    <a:lnR w="6350" cap="flat" cmpd="sng" algn="ctr">
+                      <a:solidFill>
+                        <a:srgbClr val="CCCCCC"/>
+                      </a:solidFill>
+                      <a:prstDash val="solid"/>
+                      <a:round/>
+                      <a:headEnd type="none" w="med" len="med"/>
+                      <a:tailEnd type="none" w="med" len="med"/>
+                    </a:lnR>
+                    <a:lnT w="6350" cap="flat" cmpd="sng" algn="ctr">
+                      <a:solidFill>
+                        <a:srgbClr val="CCCCCC"/>
+                      </a:solidFill>
+                      <a:prstDash val="solid"/>
+                      <a:round/>
+                      <a:headEnd type="none" w="med" len="med"/>
+                      <a:tailEnd type="none" w="med" len="med"/>
+                    </a:lnT>
+                    <a:lnB w="6350" cap="flat" cmpd="sng" algn="ctr">
+                      <a:solidFill>
+                        <a:srgbClr val="CCCCCC"/>
+                      </a:solidFill>
+                      <a:prstDash val="solid"/>
+                      <a:round/>
+                      <a:headEnd type="none" w="med" len="med"/>
+                      <a:tailEnd type="none" w="med" len="med"/>
+                    </a:lnB>
+                  </a:tcPr>
+                </a:tc>
+                <a:tc>
+                  <a:txBody>
+                    <a:bodyPr/>
+                    <a:lstStyle/>
+                    <a:p>
+                      <a:pPr indent="0" marL="0">
+                        <a:buNone/>
+                      </a:pPr>
+                      <a:r>
+                        <a:rPr lang="en-US" sz="1500" dirty="0">
+                          <a:solidFill>
+                            <a:srgbClr val="2D2D2D"/>
+                          </a:solidFill>
+                          <a:latin typeface="Arial" pitchFamily="34" charset="0"/>
+                          <a:ea typeface="Arial" pitchFamily="34" charset="-122"/>
+                          <a:cs typeface="Arial" pitchFamily="34" charset="-120"/>
+                        </a:rPr>
+                        <a:t>84.5%</a:t>
+                      </a:r>
+                      <a:endParaRPr lang="en-US" sz="1500" dirty="0">
+                        <a:latin typeface="Arial" charset="0"/>
+                        <a:ea typeface="Arial" charset="0"/>
+                        <a:cs typeface="Arial" charset="0"/>
+                      </a:endParaRPr>
+                    </a:p>
+                  </a:txBody>
+                  <a:tcPr marL="91440" marR="91440" marT="45720" marB="45720" anchor="ctr">
+                    <a:lnL w="6350" cap="flat" cmpd="sng" algn="ctr">
+                      <a:solidFill>
+                        <a:srgbClr val="CCCCCC"/>
+                      </a:solidFill>
+                      <a:prstDash val="solid"/>
+                      <a:round/>
+                      <a:headEnd type="none" w="med" len="med"/>
+                      <a:tailEnd type="none" w="med" len="med"/>
+                    </a:lnL>
+                    <a:lnR w="6350" cap="flat" cmpd="sng" algn="ctr">
+                      <a:solidFill>
+                        <a:srgbClr val="CCCCCC"/>
+                      </a:solidFill>
+                      <a:prstDash val="solid"/>
+                      <a:round/>
+                      <a:headEnd type="none" w="med" len="med"/>
+                      <a:tailEnd type="none" w="med" len="med"/>
+                    </a:lnR>
+                    <a:lnT w="6350" cap="flat" cmpd="sng" algn="ctr">
+                      <a:solidFill>
+                        <a:srgbClr val="CCCCCC"/>
+                      </a:solidFill>
+                      <a:prstDash val="solid"/>
+                      <a:round/>
+                      <a:headEnd type="none" w="med" len="med"/>
+                      <a:tailEnd type="none" w="med" len="med"/>
+                    </a:lnT>
+                    <a:lnB w="6350" cap="flat" cmpd="sng" algn="ctr">
+                      <a:solidFill>
+                        <a:srgbClr val="CCCCCC"/>
+                      </a:solidFill>
+                      <a:prstDash val="solid"/>
+                      <a:round/>
+                      <a:headEnd type="none" w="med" len="med"/>
+                      <a:tailEnd type="none" w="med" len="med"/>
+                    </a:lnB>
+                  </a:tcPr>
+                </a:tc>
+                <a:tc>
+                  <a:txBody>
+                    <a:bodyPr/>
+                    <a:lstStyle/>
+                    <a:p>
+                      <a:pPr indent="0" marL="0">
+                        <a:buNone/>
+                      </a:pPr>
+                      <a:r>
+                        <a:rPr lang="en-US" sz="1500" dirty="0">
+                          <a:solidFill>
+                            <a:srgbClr val="2D2D2D"/>
+                          </a:solidFill>
+                          <a:latin typeface="Arial" pitchFamily="34" charset="0"/>
+                          <a:ea typeface="Arial" pitchFamily="34" charset="-122"/>
+                          <a:cs typeface="Arial" pitchFamily="34" charset="-120"/>
+                        </a:rPr>
+                        <a:t>49.0%</a:t>
+                      </a:r>
+                      <a:endParaRPr lang="en-US" sz="1500" dirty="0">
+                        <a:latin typeface="Arial" charset="0"/>
+                        <a:ea typeface="Arial" charset="0"/>
+                        <a:cs typeface="Arial" charset="0"/>
+                      </a:endParaRPr>
+                    </a:p>
+                  </a:txBody>
+                  <a:tcPr marL="91440" marR="91440" marT="45720" marB="45720" anchor="ctr">
+                    <a:lnL w="6350" cap="flat" cmpd="sng" algn="ctr">
+                      <a:solidFill>
+                        <a:srgbClr val="CCCCCC"/>
+                      </a:solidFill>
+                      <a:prstDash val="solid"/>
+                      <a:round/>
+                      <a:headEnd type="none" w="med" len="med"/>
+                      <a:tailEnd type="none" w="med" len="med"/>
+                    </a:lnL>
+                    <a:lnR w="6350" cap="flat" cmpd="sng" algn="ctr">
+                      <a:solidFill>
+                        <a:srgbClr val="CCCCCC"/>
+                      </a:solidFill>
+                      <a:prstDash val="solid"/>
+                      <a:round/>
+                      <a:headEnd type="none" w="med" len="med"/>
+                      <a:tailEnd type="none" w="med" len="med"/>
+                    </a:lnR>
+                    <a:lnT w="6350" cap="flat" cmpd="sng" algn="ctr">
+                      <a:solidFill>
+                        <a:srgbClr val="CCCCCC"/>
+                      </a:solidFill>
+                      <a:prstDash val="solid"/>
+                      <a:round/>
+                      <a:headEnd type="none" w="med" len="med"/>
+                      <a:tailEnd type="none" w="med" len="med"/>
+                    </a:lnT>
+                    <a:lnB w="6350" cap="flat" cmpd="sng" algn="ctr">
+                      <a:solidFill>
+                        <a:srgbClr val="CCCCCC"/>
+                      </a:solidFill>
+                      <a:prstDash val="solid"/>
+                      <a:round/>
+                      <a:headEnd type="none" w="med" len="med"/>
+                      <a:tailEnd type="none" w="med" len="med"/>
+                    </a:lnB>
+                  </a:tcPr>
+                </a:tc>
+              </a:tr>
+            </a:tbl>
+          </a:graphicData>
+        </a:graphic>
+      </p:graphicFrame>
+      <p:sp>
+        <p:nvSpPr>
+          <p:cNvPr id="5" name="Text 2"/>
           <p:cNvSpPr/>
           <p:nvPr/>
         </p:nvSpPr>
         <p:spPr>
           <a:xfrm>
-            <a:off x="914400" y="1280160"/>
-            <a:ext cx="7315200" cy="1554480"/>
-          </a:xfrm>
-          <a:prstGeom prst="roundRect">
-            <a:avLst>
-              <a:gd name="adj" fmla="val 5882"/>
-            </a:avLst>
-          </a:prstGeom>
-          <a:solidFill>
-            <a:srgbClr val="EBF3FA"/>
-          </a:solidFill>
-          <a:ln w="12700">
-            <a:solidFill>
-              <a:srgbClr val="2E75B6"/>
-            </a:solidFill>
-            <a:prstDash val="solid"/>
-          </a:ln>
-        </p:spPr>
-      </p:sp>
-      <p:sp>
-        <p:nvSpPr>
-          <p:cNvPr id="5" name="Text 3"/>
-          <p:cNvSpPr/>
-          <p:nvPr/>
-        </p:nvSpPr>
-        <p:spPr>
-          <a:xfrm>
-            <a:off x="1097280" y="1417320"/>
-            <a:ext cx="6949440" cy="1280160"/>
+            <a:off x="457200" y="3017520"/>
+            <a:ext cx="8229600" cy="1188720"/>
           </a:xfrm>
           <a:prstGeom prst="rect">
             <a:avLst/>
@@ -4287,84 +5216,15 @@
           <a:bodyPr wrap="square" rtlCol="0" anchor="ctr"/>
           <a:lstStyle/>
           <a:p>
-            <a:pPr algn="ctr" indent="0" marL="0">
-              <a:buNone/>
-            </a:pPr>
-            <a:r>
-              <a:rPr lang="en-US" sz="1800" dirty="0">
-                <a:solidFill>
-                  <a:srgbClr val="1F4E79"/>
-                </a:solidFill>
-                <a:latin typeface="Arial" pitchFamily="34" charset="0"/>
-                <a:ea typeface="Arial" pitchFamily="34" charset="-122"/>
-                <a:cs typeface="Arial" pitchFamily="34" charset="-120"/>
-              </a:rPr>
-              <a:t>cmp -l: 0 differing bytes.</a:t>
-            </a:r>
-            <a:endParaRPr lang="en-US" sz="1800" dirty="0"/>
-          </a:p>
-          <a:p>
-            <a:pPr algn="ctr" indent="0" marL="0">
-              <a:buNone/>
-            </a:pPr>
-            <a:r>
-              <a:rPr lang="en-US" sz="1800" dirty="0">
-                <a:solidFill>
-                  <a:srgbClr val="1F4E79"/>
-                </a:solidFill>
-                <a:latin typeface="Arial" pitchFamily="34" charset="0"/>
-                <a:ea typeface="Arial" pitchFamily="34" charset="-122"/>
-                <a:cs typeface="Arial" pitchFamily="34" charset="-120"/>
-              </a:rPr>
-              <a:t>SHA-256 digests match bit-for-bit across the ARM host / Blackwell GPU</a:t>
-            </a:r>
-            <a:endParaRPr lang="en-US" sz="1800" dirty="0"/>
-          </a:p>
-          <a:p>
-            <a:pPr algn="ctr" indent="0" marL="0">
-              <a:buNone/>
-            </a:pPr>
-            <a:r>
-              <a:rPr lang="en-US" sz="1800" dirty="0">
-                <a:solidFill>
-                  <a:srgbClr val="1F4E79"/>
-                </a:solidFill>
-                <a:latin typeface="Arial" pitchFamily="34" charset="0"/>
-                <a:ea typeface="Arial" pitchFamily="34" charset="-122"/>
-                <a:cs typeface="Arial" pitchFamily="34" charset="-120"/>
-              </a:rPr>
-              <a:t>and x86 host / Ada Lovelace GPU runs.</a:t>
-            </a:r>
-            <a:endParaRPr lang="en-US" sz="1800" dirty="0"/>
-          </a:p>
-        </p:txBody>
-      </p:sp>
-      <p:sp>
-        <p:nvSpPr>
-          <p:cNvPr id="6" name="Text 4"/>
-          <p:cNvSpPr/>
-          <p:nvPr/>
-        </p:nvSpPr>
-        <p:spPr>
-          <a:xfrm>
-            <a:off x="457200" y="3108960"/>
-            <a:ext cx="8229600" cy="822960"/>
-          </a:xfrm>
-          <a:prstGeom prst="rect">
-            <a:avLst/>
-          </a:prstGeom>
-          <a:noFill/>
-          <a:ln/>
-        </p:spPr>
-        <p:txBody>
-          <a:bodyPr wrap="square" rtlCol="0" anchor="ctr"/>
-          <a:lstStyle/>
-          <a:p>
-            <a:pPr indent="0" marL="0">
-              <a:buNone/>
-            </a:pPr>
-            <a:r>
-              <a:rPr lang="en-US" sz="2000" dirty="0">
+            <a:pPr marL="342900" indent="-342900">
+              <a:spcAft>
+                <a:spcPts val="1000"/>
+              </a:spcAft>
+              <a:buSzPct val="100000"/>
+              <a:buChar char="•"/>
+            </a:pPr>
+            <a:r>
+              <a:rPr lang="en-US" sz="1900" b="1" dirty="0">
                 <a:solidFill>
                   <a:srgbClr val="2D2D2D"/>
                 </a:solidFill>
@@ -4372,15 +5232,69 @@
                 <a:ea typeface="Arial" pitchFamily="34" charset="-122"/>
                 <a:cs typeface="Arial" pitchFamily="34" charset="-120"/>
               </a:rPr>
-              <a:t>This is the strongest determinism test in the paper: different host instruction set, different GPU microarchitecture, same output.</a:t>
-            </a:r>
-            <a:endParaRPr lang="en-US" sz="2000" dirty="0"/>
+              <a:t>Both platforms score under 3% L2 hit rate: </a:t>
+            </a:r>
+            <a:pPr indent="0" marL="0">
+              <a:spcAft>
+                <a:spcPts val="1000"/>
+              </a:spcAft>
+              <a:buNone/>
+            </a:pPr>
+            <a:r>
+              <a:rPr lang="en-US" sz="1900" dirty="0">
+                <a:solidFill>
+                  <a:srgbClr val="2D2D2D"/>
+                </a:solidFill>
+                <a:latin typeface="Arial" pitchFamily="34" charset="0"/>
+                <a:ea typeface="Arial" pitchFamily="34" charset="-122"/>
+                <a:cs typeface="Arial" pitchFamily="34" charset="-120"/>
+              </a:rPr>
+              <a:t>the private buffer is not cache-resident on either GPU, contradicting our initial bandwidth-arithmetic inference.</a:t>
+            </a:r>
+            <a:endParaRPr lang="en-US" sz="1900" dirty="0"/>
+          </a:p>
+          <a:p>
+            <a:pPr indent="0" marL="0">
+              <a:spcAft>
+                <a:spcPts val="1000"/>
+              </a:spcAft>
+              <a:buNone/>
+            </a:pPr>
+            <a:r>
+              <a:rPr lang="en-US" sz="1900" b="1" dirty="0">
+                <a:solidFill>
+                  <a:srgbClr val="2D2D2D"/>
+                </a:solidFill>
+                <a:latin typeface="Arial" pitchFamily="34" charset="0"/>
+                <a:ea typeface="Arial" pitchFamily="34" charset="-122"/>
+                <a:cs typeface="Arial" pitchFamily="34" charset="-120"/>
+              </a:rPr>
+              <a:t>Open question: </a:t>
+            </a:r>
+            <a:pPr indent="0" marL="0">
+              <a:spcAft>
+                <a:spcPts val="1000"/>
+              </a:spcAft>
+              <a:buNone/>
+            </a:pPr>
+            <a:r>
+              <a:rPr lang="en-US" sz="1900" dirty="0">
+                <a:solidFill>
+                  <a:srgbClr val="2D2D2D"/>
+                </a:solidFill>
+                <a:latin typeface="Arial" pitchFamily="34" charset="0"/>
+                <a:ea typeface="Arial" pitchFamily="34" charset="-122"/>
+                <a:cs typeface="Arial" pitchFamily="34" charset="-120"/>
+              </a:rPr>
+              <a:t>the RTX 4090's reduction still runs at 2.5× its own GDDR6X peak bandwidth. We measure this; we do not yet explain it.</a:t>
+            </a:r>
+            <a:endParaRPr lang="en-US" sz="1900" dirty="0"/>
           </a:p>
         </p:txBody>
       </p:sp>
       <p:sp>
         <p:nvSpPr>
-          <p:cNvPr id="7" name="Text 5"/>
+          <p:cNvPr id="6" name="Text 3"/>
           <p:cNvSpPr/>
           <p:nvPr/>
         </p:nvSpPr>
@@ -4411,7 +5325,7 @@
                 <a:ea typeface="Arial" pitchFamily="34" charset="-122"/>
                 <a:cs typeface="Arial" pitchFamily="34" charset="-120"/>
               </a:rPr>
-              <a:t>Section VI-B</a:t>
+              <a:t>Nsight Compute (ncu), lts__t_sector_hit_rate.pct — Section IV-E, Section VII</a:t>
             </a:r>
             <a:endParaRPr lang="en-US" sz="1300" dirty="0"/>
           </a:p>
@@ -4451,6 +5365,268 @@
         <p:spPr>
           <a:xfrm>
             <a:off x="457200" y="182880"/>
+            <a:ext cx="8229600" cy="822960"/>
+          </a:xfrm>
+          <a:prstGeom prst="rect">
+            <a:avLst/>
+          </a:prstGeom>
+          <a:noFill/>
+          <a:ln/>
+        </p:spPr>
+        <p:txBody>
+          <a:bodyPr wrap="square" rtlCol="0" anchor="t"/>
+          <a:lstStyle/>
+          <a:p>
+            <a:pPr indent="0" marL="0">
+              <a:buNone/>
+            </a:pPr>
+            <a:r>
+              <a:rPr lang="en-US" sz="2600" b="1" dirty="0">
+                <a:solidFill>
+                  <a:srgbClr val="1F4E79"/>
+                </a:solidFill>
+                <a:latin typeface="Arial" pitchFamily="34" charset="0"/>
+                <a:ea typeface="Arial" pitchFamily="34" charset="-122"/>
+                <a:cs typeface="Arial" pitchFamily="34" charset="-120"/>
+              </a:rPr>
+              <a:t>GPU output is bit-identical across two host ISAs and two GPU generations</a:t>
+            </a:r>
+            <a:endParaRPr lang="en-US" sz="2600" dirty="0"/>
+          </a:p>
+        </p:txBody>
+      </p:sp>
+      <p:sp>
+        <p:nvSpPr>
+          <p:cNvPr id="3" name="Shape 1"/>
+          <p:cNvSpPr/>
+          <p:nvPr/>
+        </p:nvSpPr>
+        <p:spPr>
+          <a:xfrm>
+            <a:off x="457200" y="960120"/>
+            <a:ext cx="8229600" cy="22860"/>
+          </a:xfrm>
+          <a:prstGeom prst="rect">
+            <a:avLst/>
+          </a:prstGeom>
+          <a:solidFill>
+            <a:srgbClr val="CCCCCC"/>
+          </a:solidFill>
+          <a:ln/>
+        </p:spPr>
+      </p:sp>
+      <p:sp>
+        <p:nvSpPr>
+          <p:cNvPr id="4" name="Shape 2"/>
+          <p:cNvSpPr/>
+          <p:nvPr/>
+        </p:nvSpPr>
+        <p:spPr>
+          <a:xfrm>
+            <a:off x="914400" y="1280160"/>
+            <a:ext cx="7315200" cy="1554480"/>
+          </a:xfrm>
+          <a:prstGeom prst="roundRect">
+            <a:avLst>
+              <a:gd name="adj" fmla="val 5882"/>
+            </a:avLst>
+          </a:prstGeom>
+          <a:solidFill>
+            <a:srgbClr val="EBF3FA"/>
+          </a:solidFill>
+          <a:ln w="12700">
+            <a:solidFill>
+              <a:srgbClr val="2E75B6"/>
+            </a:solidFill>
+            <a:prstDash val="solid"/>
+          </a:ln>
+        </p:spPr>
+      </p:sp>
+      <p:sp>
+        <p:nvSpPr>
+          <p:cNvPr id="5" name="Text 3"/>
+          <p:cNvSpPr/>
+          <p:nvPr/>
+        </p:nvSpPr>
+        <p:spPr>
+          <a:xfrm>
+            <a:off x="1097280" y="1417320"/>
+            <a:ext cx="6949440" cy="1280160"/>
+          </a:xfrm>
+          <a:prstGeom prst="rect">
+            <a:avLst/>
+          </a:prstGeom>
+          <a:noFill/>
+          <a:ln/>
+        </p:spPr>
+        <p:txBody>
+          <a:bodyPr wrap="square" rtlCol="0" anchor="ctr"/>
+          <a:lstStyle/>
+          <a:p>
+            <a:pPr algn="ctr" indent="0" marL="0">
+              <a:buNone/>
+            </a:pPr>
+            <a:r>
+              <a:rPr lang="en-US" sz="1800" dirty="0">
+                <a:solidFill>
+                  <a:srgbClr val="1F4E79"/>
+                </a:solidFill>
+                <a:latin typeface="Arial" pitchFamily="34" charset="0"/>
+                <a:ea typeface="Arial" pitchFamily="34" charset="-122"/>
+                <a:cs typeface="Arial" pitchFamily="34" charset="-120"/>
+              </a:rPr>
+              <a:t>cmp -l: 0 differing bytes.</a:t>
+            </a:r>
+            <a:endParaRPr lang="en-US" sz="1800" dirty="0"/>
+          </a:p>
+          <a:p>
+            <a:pPr algn="ctr" indent="0" marL="0">
+              <a:buNone/>
+            </a:pPr>
+            <a:r>
+              <a:rPr lang="en-US" sz="1800" dirty="0">
+                <a:solidFill>
+                  <a:srgbClr val="1F4E79"/>
+                </a:solidFill>
+                <a:latin typeface="Arial" pitchFamily="34" charset="0"/>
+                <a:ea typeface="Arial" pitchFamily="34" charset="-122"/>
+                <a:cs typeface="Arial" pitchFamily="34" charset="-120"/>
+              </a:rPr>
+              <a:t>SHA-256 digests match bit-for-bit across the ARM host / Blackwell GPU</a:t>
+            </a:r>
+            <a:endParaRPr lang="en-US" sz="1800" dirty="0"/>
+          </a:p>
+          <a:p>
+            <a:pPr algn="ctr" indent="0" marL="0">
+              <a:buNone/>
+            </a:pPr>
+            <a:r>
+              <a:rPr lang="en-US" sz="1800" dirty="0">
+                <a:solidFill>
+                  <a:srgbClr val="1F4E79"/>
+                </a:solidFill>
+                <a:latin typeface="Arial" pitchFamily="34" charset="0"/>
+                <a:ea typeface="Arial" pitchFamily="34" charset="-122"/>
+                <a:cs typeface="Arial" pitchFamily="34" charset="-120"/>
+              </a:rPr>
+              <a:t>and x86 host / Ada Lovelace GPU runs.</a:t>
+            </a:r>
+            <a:endParaRPr lang="en-US" sz="1800" dirty="0"/>
+          </a:p>
+        </p:txBody>
+      </p:sp>
+      <p:sp>
+        <p:nvSpPr>
+          <p:cNvPr id="6" name="Text 4"/>
+          <p:cNvSpPr/>
+          <p:nvPr/>
+        </p:nvSpPr>
+        <p:spPr>
+          <a:xfrm>
+            <a:off x="457200" y="3108960"/>
+            <a:ext cx="8229600" cy="822960"/>
+          </a:xfrm>
+          <a:prstGeom prst="rect">
+            <a:avLst/>
+          </a:prstGeom>
+          <a:noFill/>
+          <a:ln/>
+        </p:spPr>
+        <p:txBody>
+          <a:bodyPr wrap="square" rtlCol="0" anchor="ctr"/>
+          <a:lstStyle/>
+          <a:p>
+            <a:pPr indent="0" marL="0">
+              <a:buNone/>
+            </a:pPr>
+            <a:r>
+              <a:rPr lang="en-US" sz="2000" dirty="0">
+                <a:solidFill>
+                  <a:srgbClr val="2D2D2D"/>
+                </a:solidFill>
+                <a:latin typeface="Arial" pitchFamily="34" charset="0"/>
+                <a:ea typeface="Arial" pitchFamily="34" charset="-122"/>
+                <a:cs typeface="Arial" pitchFamily="34" charset="-120"/>
+              </a:rPr>
+              <a:t>This is the strongest determinism test in the paper: different host instruction set, different GPU microarchitecture, same output.</a:t>
+            </a:r>
+            <a:endParaRPr lang="en-US" sz="2000" dirty="0"/>
+          </a:p>
+        </p:txBody>
+      </p:sp>
+      <p:sp>
+        <p:nvSpPr>
+          <p:cNvPr id="7" name="Text 5"/>
+          <p:cNvSpPr/>
+          <p:nvPr/>
+        </p:nvSpPr>
+        <p:spPr>
+          <a:xfrm>
+            <a:off x="457200" y="4709160"/>
+            <a:ext cx="8229600" cy="292608"/>
+          </a:xfrm>
+          <a:prstGeom prst="rect">
+            <a:avLst/>
+          </a:prstGeom>
+          <a:noFill/>
+          <a:ln/>
+        </p:spPr>
+        <p:txBody>
+          <a:bodyPr wrap="square" rtlCol="0" anchor="ctr"/>
+          <a:lstStyle/>
+          <a:p>
+            <a:pPr indent="0" marL="0">
+              <a:buNone/>
+            </a:pPr>
+            <a:r>
+              <a:rPr lang="en-US" sz="1300" dirty="0">
+                <a:solidFill>
+                  <a:srgbClr val="777777"/>
+                </a:solidFill>
+                <a:latin typeface="Arial" pitchFamily="34" charset="0"/>
+                <a:ea typeface="Arial" pitchFamily="34" charset="-122"/>
+                <a:cs typeface="Arial" pitchFamily="34" charset="-120"/>
+              </a:rPr>
+              <a:t>Section VI-B</a:t>
+            </a:r>
+            <a:endParaRPr lang="en-US" sz="1300" dirty="0"/>
+          </a:p>
+        </p:txBody>
+      </p:sp>
+    </p:spTree>
+  </p:cSld>
+  <p:clrMapOvr>
+    <a:masterClrMapping/>
+  </p:clrMapOvr>
+</p:sld>
+</file>
+
+<file path=ppt/slides/slide15.xml><?xml version="1.0" encoding="utf-8"?>
+<p:sld xmlns:a="http://schemas.openxmlformats.org/drawingml/2006/main" xmlns:r="http://schemas.openxmlformats.org/officeDocument/2006/relationships" xmlns:p="http://schemas.openxmlformats.org/presentationml/2006/main">
+  <p:cSld name="Slide 15">
+    <p:spTree>
+      <p:nvGrpSpPr>
+        <p:cNvPr id="1" name=""/>
+        <p:cNvGrpSpPr/>
+        <p:nvPr/>
+      </p:nvGrpSpPr>
+      <p:grpSpPr>
+        <a:xfrm>
+          <a:off x="0" y="0"/>
+          <a:ext cx="0" cy="0"/>
+          <a:chOff x="0" y="0"/>
+          <a:chExt cx="0" cy="0"/>
+        </a:xfrm>
+      </p:grpSpPr>
+      <p:sp>
+        <p:nvSpPr>
+          <p:cNvPr id="2" name="Text 0"/>
+          <p:cNvSpPr/>
+          <p:nvPr/>
+        </p:nvSpPr>
+        <p:spPr>
+          <a:xfrm>
+            <a:off x="457200" y="182880"/>
             <a:ext cx="8229600" cy="914400"/>
           </a:xfrm>
           <a:prstGeom prst="rect">
@@ -4503,7 +5679,7 @@
       </p:sp>
       <p:graphicFrame>
         <p:nvGraphicFramePr>
-          <p:cNvPr id="15" name="Table 0"/>
+          <p:cNvPr id="16" name="Table 0"/>
           <p:cNvGraphicFramePr>
             <a:graphicFrameLocks noGrp="1"/>
           </p:cNvGraphicFramePr>
@@ -5364,7 +6540,7 @@
                 <a:ea typeface="Arial" pitchFamily="34" charset="-122"/>
                 <a:cs typeface="Arial" pitchFamily="34" charset="-120"/>
               </a:rPr>
-              <a:t>No single architecture wins every stage: which memory model helps depends on whether the stage is transfer-bound or bandwidth-bound-and-cacheable.</a:t>
+              <a:t>No single architecture wins every stage: which memory model helps depends on whether the stage is transfer-bound or streaming-bandwidth-bound.</a:t>
             </a:r>
             <a:endParaRPr lang="en-US" sz="2000" dirty="0"/>
           </a:p>
@@ -5403,7 +6579,7 @@
                 <a:ea typeface="Arial" pitchFamily="34" charset="-122"/>
                 <a:cs typeface="Arial" pitchFamily="34" charset="-120"/>
               </a:rPr>
-              <a:t>Section VI-D, Table III</a:t>
+              <a:t>Section IV-D, Table III</a:t>
             </a:r>
             <a:endParaRPr lang="en-US" sz="1300" dirty="0"/>
           </a:p>
@@ -5417,9 +6593,9 @@
 </p:sld>
 </file>
 
-<file path=ppt/slides/slide15.xml><?xml version="1.0" encoding="utf-8"?>
+<file path=ppt/slides/slide16.xml><?xml version="1.0" encoding="utf-8"?>
 <p:sld xmlns:a="http://schemas.openxmlformats.org/drawingml/2006/main" xmlns:r="http://schemas.openxmlformats.org/officeDocument/2006/relationships" xmlns:p="http://schemas.openxmlformats.org/presentationml/2006/main">
-  <p:cSld name="Slide 15">
+  <p:cSld name="Slide 16">
     <p:spTree>
       <p:nvGrpSpPr>
         <p:cNvPr id="1" name=""/>
@@ -5443,7 +6619,7 @@
         <p:spPr>
           <a:xfrm>
             <a:off x="457200" y="182880"/>
-            <a:ext cx="8229600" cy="777240"/>
+            <a:ext cx="8229600" cy="914400"/>
           </a:xfrm>
           <a:prstGeom prst="rect">
             <a:avLst/>
@@ -5467,7 +6643,7 @@
                 <a:ea typeface="Arial" pitchFamily="34" charset="-122"/>
                 <a:cs typeface="Arial" pitchFamily="34" charset="-120"/>
               </a:rPr>
-              <a:t>Three open questions the paper names as future work</a:t>
+              <a:t>Two open questions remain after measurement; one baseline was reasoned, not run</a:t>
             </a:r>
             <a:endParaRPr lang="en-US" sz="2600" dirty="0"/>
           </a:p>
@@ -5481,7 +6657,7 @@
         </p:nvSpPr>
         <p:spPr>
           <a:xfrm>
-            <a:off x="457200" y="914400"/>
+            <a:off x="457200" y="1051560"/>
             <a:ext cx="8229600" cy="22860"/>
           </a:xfrm>
           <a:prstGeom prst="rect">
@@ -5501,7 +6677,7 @@
         </p:nvSpPr>
         <p:spPr>
           <a:xfrm>
-            <a:off x="457200" y="1051560"/>
+            <a:off x="457200" y="1188720"/>
             <a:ext cx="8229600" cy="365760"/>
           </a:xfrm>
           <a:prstGeom prst="rect">
@@ -5540,7 +6716,7 @@
         </p:nvSpPr>
         <p:spPr>
           <a:xfrm>
-            <a:off x="457200" y="1417320"/>
+            <a:off x="457200" y="1554480"/>
             <a:ext cx="8229600" cy="548640"/>
           </a:xfrm>
           <a:prstGeom prst="rect">
@@ -5579,7 +6755,7 @@
         </p:nvSpPr>
         <p:spPr>
           <a:xfrm>
-            <a:off x="457200" y="2103120"/>
+            <a:off x="457200" y="2240280"/>
             <a:ext cx="6492240" cy="365760"/>
           </a:xfrm>
           <a:prstGeom prst="rect">
@@ -5604,7 +6780,7 @@
                 <a:ea typeface="Arial" pitchFamily="34" charset="-122"/>
                 <a:cs typeface="Arial" pitchFamily="34" charset="-120"/>
               </a:rPr>
-              <a:t>L2 residency model is inferred, not measured</a:t>
+              <a:t>Why does RTX 4090 exceed its own GDDR6X peak by 2.5×?</a:t>
             </a:r>
             <a:endParaRPr lang="en-US" sz="2000" dirty="0"/>
           </a:p>
@@ -5618,7 +6794,7 @@
         </p:nvSpPr>
         <p:spPr>
           <a:xfrm>
-            <a:off x="7315200" y="2121408"/>
+            <a:off x="7315200" y="2258568"/>
             <a:ext cx="1463040" cy="292608"/>
           </a:xfrm>
           <a:prstGeom prst="roundRect">
@@ -5645,7 +6821,7 @@
         </p:nvSpPr>
         <p:spPr>
           <a:xfrm>
-            <a:off x="7315200" y="2121408"/>
+            <a:off x="7315200" y="2258568"/>
             <a:ext cx="1463040" cy="292608"/>
           </a:xfrm>
           <a:prstGeom prst="rect">
@@ -5670,7 +6846,7 @@
                 <a:ea typeface="Arial" pitchFamily="34" charset="-122"/>
                 <a:cs typeface="Arial" pitchFamily="34" charset="-120"/>
               </a:rPr>
-              <a:t>DATA PENDING</a:t>
+              <a:t>OPEN</a:t>
             </a:r>
             <a:endParaRPr lang="en-US" sz="1200" dirty="0"/>
           </a:p>
@@ -5684,7 +6860,7 @@
         </p:nvSpPr>
         <p:spPr>
           <a:xfrm>
-            <a:off x="457200" y="2468880"/>
+            <a:off x="457200" y="2606040"/>
             <a:ext cx="8229600" cy="548640"/>
           </a:xfrm>
           <a:prstGeom prst="rect">
@@ -5709,7 +6885,7 @@
                 <a:ea typeface="Arial" pitchFamily="34" charset="-122"/>
                 <a:cs typeface="Arial" pitchFamily="34" charset="-120"/>
               </a:rPr>
-              <a:t>Nsight Compute profiling (L2 hit rate, throughput, occupancy) on both GPUs.</a:t>
+              <a:t>L2 hit rate measured at 2.1% (Nsight Compute) — rules out caching, mechanism still open.</a:t>
             </a:r>
             <a:endParaRPr lang="en-US" sz="1500" dirty="0"/>
           </a:p>
@@ -5723,7 +6899,7 @@
         </p:nvSpPr>
         <p:spPr>
           <a:xfrm>
-            <a:off x="457200" y="3154680"/>
+            <a:off x="457200" y="3291840"/>
             <a:ext cx="6492240" cy="365760"/>
           </a:xfrm>
           <a:prstGeom prst="rect">
@@ -5748,7 +6924,7 @@
                 <a:ea typeface="Arial" pitchFamily="34" charset="-122"/>
                 <a:cs typeface="Arial" pitchFamily="34" charset="-120"/>
               </a:rPr>
-              <a:t>FP32 / FP16 / BF16 trade-off is unmeasured</a:t>
+              <a:t>FP32 / FP16 / BF16 trade-off is partially measured</a:t>
             </a:r>
             <a:endParaRPr lang="en-US" sz="2000" dirty="0"/>
           </a:p>
@@ -5762,7 +6938,7 @@
         </p:nvSpPr>
         <p:spPr>
           <a:xfrm>
-            <a:off x="7315200" y="3172968"/>
+            <a:off x="7315200" y="3310128"/>
             <a:ext cx="1463040" cy="292608"/>
           </a:xfrm>
           <a:prstGeom prst="roundRect">
@@ -5789,7 +6965,7 @@
         </p:nvSpPr>
         <p:spPr>
           <a:xfrm>
-            <a:off x="7315200" y="3172968"/>
+            <a:off x="7315200" y="3310128"/>
             <a:ext cx="1463040" cy="292608"/>
           </a:xfrm>
           <a:prstGeom prst="rect">
@@ -5814,7 +6990,7 @@
                 <a:ea typeface="Arial" pitchFamily="34" charset="-122"/>
                 <a:cs typeface="Arial" pitchFamily="34" charset="-120"/>
               </a:rPr>
-              <a:t>DATA PENDING</a:t>
+              <a:t>PARTIAL</a:t>
             </a:r>
             <a:endParaRPr lang="en-US" sz="1200" dirty="0"/>
           </a:p>
@@ -5828,7 +7004,7 @@
         </p:nvSpPr>
         <p:spPr>
           <a:xfrm>
-            <a:off x="457200" y="3520440"/>
+            <a:off x="457200" y="3657600"/>
             <a:ext cx="8229600" cy="548640"/>
           </a:xfrm>
           <a:prstGeom prst="rect">
@@ -5853,7 +7029,7 @@
                 <a:ea typeface="Arial" pitchFamily="34" charset="-122"/>
                 <a:cs typeface="Arial" pitchFamily="34" charset="-120"/>
               </a:rPr>
-              <a:t>Reduced-precision Layer 8 variant built; throughput vs. PSNR-Y/SSIM trade-off to be measured.</a:t>
+              <a:t>Accuracy measured (PSNR-Y, SSIM); throughput comparison inconclusive — see Appendix C.</a:t>
             </a:r>
             <a:endParaRPr lang="en-US" sz="1500" dirty="0"/>
           </a:p>
@@ -5892,7 +7068,7 @@
                 <a:ea typeface="Arial" pitchFamily="34" charset="-122"/>
                 <a:cs typeface="Arial" pitchFamily="34" charset="-120"/>
               </a:rPr>
-              <a:t>Section VII — collect_ncu_profile.sh / collect_fp16_comparison.sh will supply the two pending numbers</a:t>
+              <a:t>Sections IV-E and VII — collect_ncu_profile.sh / collect_fp16_comparison.sh</a:t>
             </a:r>
             <a:endParaRPr lang="en-US" sz="1300" dirty="0"/>
           </a:p>
@@ -5906,9 +7082,9 @@
 </p:sld>
 </file>
 
-<file path=ppt/slides/slide16.xml><?xml version="1.0" encoding="utf-8"?>
+<file path=ppt/slides/slide17.xml><?xml version="1.0" encoding="utf-8"?>
 <p:sld xmlns:a="http://schemas.openxmlformats.org/drawingml/2006/main" xmlns:r="http://schemas.openxmlformats.org/officeDocument/2006/relationships" xmlns:p="http://schemas.openxmlformats.org/presentationml/2006/main">
-  <p:cSld name="Slide 16">
+  <p:cSld name="Slide 17">
     <p:bg>
       <p:bgPr>
         <a:solidFill>
@@ -6116,7 +7292,7 @@
                 <a:ea typeface="Arial" pitchFamily="34" charset="-122"/>
                 <a:cs typeface="Arial" pitchFamily="34" charset="-120"/>
               </a:rPr>
-              <a:t>memory architecture picks the winner per stage — unified wins transfer, discrete wins the cacheable reduction.</a:t>
+              <a:t>memory architecture picks the winner per stage — unified wins transfer, discrete wins the bandwidth-bound reduction by raw throughput, not caching.</a:t>
             </a:r>
             <a:endParaRPr lang="en-US" sz="2000" dirty="0"/>
           </a:p>
@@ -6131,7 +7307,7 @@
         <p:spPr>
           <a:xfrm>
             <a:off x="457200" y="4480560"/>
-            <a:ext cx="7315200" cy="365760"/>
+            <a:ext cx="8229600" cy="365760"/>
           </a:xfrm>
           <a:prstGeom prst="rect">
             <a:avLst/>
@@ -6155,278 +7331,7 @@
                 <a:ea typeface="Arial" pitchFamily="34" charset="-122"/>
                 <a:cs typeface="Arial" pitchFamily="34" charset="-120"/>
               </a:rPr>
-              <a:t>M. Hamdani Ilham Latjoro  |  IEEE ITIS 2026</a:t>
-            </a:r>
-            <a:endParaRPr lang="en-US" sz="1400" dirty="0"/>
-          </a:p>
-        </p:txBody>
-      </p:sp>
-    </p:spTree>
-  </p:cSld>
-  <p:clrMapOvr>
-    <a:masterClrMapping/>
-  </p:clrMapOvr>
-</p:sld>
-</file>
-
-<file path=ppt/slides/slide17.xml><?xml version="1.0" encoding="utf-8"?>
-<p:sld xmlns:a="http://schemas.openxmlformats.org/drawingml/2006/main" xmlns:r="http://schemas.openxmlformats.org/officeDocument/2006/relationships" xmlns:p="http://schemas.openxmlformats.org/presentationml/2006/main">
-  <p:cSld name="Slide 17">
-    <p:spTree>
-      <p:nvGrpSpPr>
-        <p:cNvPr id="1" name=""/>
-        <p:cNvGrpSpPr/>
-        <p:nvPr/>
-      </p:nvGrpSpPr>
-      <p:grpSpPr>
-        <a:xfrm>
-          <a:off x="0" y="0"/>
-          <a:ext cx="0" cy="0"/>
-          <a:chOff x="0" y="0"/>
-          <a:chExt cx="0" cy="0"/>
-        </a:xfrm>
-      </p:grpSpPr>
-      <p:sp>
-        <p:nvSpPr>
-          <p:cNvPr id="2" name="Text 0"/>
-          <p:cNvSpPr/>
-          <p:nvPr/>
-        </p:nvSpPr>
-        <p:spPr>
-          <a:xfrm>
-            <a:off x="457200" y="182880"/>
-            <a:ext cx="8229600" cy="457200"/>
-          </a:xfrm>
-          <a:prstGeom prst="rect">
-            <a:avLst/>
-          </a:prstGeom>
-          <a:noFill/>
-          <a:ln/>
-        </p:spPr>
-        <p:txBody>
-          <a:bodyPr wrap="square" rtlCol="0" anchor="ctr"/>
-          <a:lstStyle/>
-          <a:p>
-            <a:pPr indent="0" marL="0">
-              <a:buNone/>
-            </a:pPr>
-            <a:r>
-              <a:rPr lang="en-US" sz="2400" b="1" dirty="0">
-                <a:solidFill>
-                  <a:srgbClr val="1F4E79"/>
-                </a:solidFill>
-                <a:latin typeface="Arial" pitchFamily="34" charset="0"/>
-                <a:ea typeface="Arial" pitchFamily="34" charset="-122"/>
-                <a:cs typeface="Arial" pitchFamily="34" charset="-120"/>
-              </a:rPr>
-              <a:t>References</a:t>
-            </a:r>
-            <a:endParaRPr lang="en-US" sz="2400" dirty="0"/>
-          </a:p>
-        </p:txBody>
-      </p:sp>
-      <p:sp>
-        <p:nvSpPr>
-          <p:cNvPr id="3" name="Shape 1"/>
-          <p:cNvSpPr/>
-          <p:nvPr/>
-        </p:nvSpPr>
-        <p:spPr>
-          <a:xfrm>
-            <a:off x="457200" y="658368"/>
-            <a:ext cx="8229600" cy="22860"/>
-          </a:xfrm>
-          <a:prstGeom prst="rect">
-            <a:avLst/>
-          </a:prstGeom>
-          <a:solidFill>
-            <a:srgbClr val="CCCCCC"/>
-          </a:solidFill>
-          <a:ln/>
-        </p:spPr>
-      </p:sp>
-      <p:sp>
-        <p:nvSpPr>
-          <p:cNvPr id="4" name="Text 2"/>
-          <p:cNvSpPr/>
-          <p:nvPr/>
-        </p:nvSpPr>
-        <p:spPr>
-          <a:xfrm>
-            <a:off x="457200" y="777240"/>
-            <a:ext cx="8229600" cy="4023360"/>
-          </a:xfrm>
-          <a:prstGeom prst="rect">
-            <a:avLst/>
-          </a:prstGeom>
-          <a:noFill/>
-          <a:ln/>
-        </p:spPr>
-        <p:txBody>
-          <a:bodyPr wrap="square" rtlCol="0" anchor="ctr"/>
-          <a:lstStyle/>
-          <a:p>
-            <a:pPr indent="0" marL="0">
-              <a:spcAft>
-                <a:spcPts val="600"/>
-              </a:spcAft>
-              <a:buNone/>
-            </a:pPr>
-            <a:r>
-              <a:rPr lang="en-US" sz="1400" dirty="0">
-                <a:solidFill>
-                  <a:srgbClr val="2D2D2D"/>
-                </a:solidFill>
-                <a:latin typeface="Arial" pitchFamily="34" charset="0"/>
-                <a:ea typeface="Arial" pitchFamily="34" charset="-122"/>
-                <a:cs typeface="Arial" pitchFamily="34" charset="-120"/>
-              </a:rPr>
-              <a:t>Dong, C., Loy, C.C., Tang, X. (2016). Accelerating the Super-Resolution CNN. ECCV.</a:t>
-            </a:r>
-            <a:endParaRPr lang="en-US" sz="1400" dirty="0"/>
-          </a:p>
-          <a:p>
-            <a:pPr indent="0" marL="0">
-              <a:spcAft>
-                <a:spcPts val="600"/>
-              </a:spcAft>
-              <a:buNone/>
-            </a:pPr>
-            <a:endParaRPr lang="en-US" sz="1400" dirty="0"/>
-          </a:p>
-          <a:p>
-            <a:pPr indent="0" marL="0">
-              <a:spcAft>
-                <a:spcPts val="600"/>
-              </a:spcAft>
-              <a:buNone/>
-            </a:pPr>
-            <a:r>
-              <a:rPr lang="en-US" sz="1400" dirty="0">
-                <a:solidFill>
-                  <a:srgbClr val="2D2D2D"/>
-                </a:solidFill>
-                <a:latin typeface="Arial" pitchFamily="34" charset="0"/>
-                <a:ea typeface="Arial" pitchFamily="34" charset="-122"/>
-                <a:cs typeface="Arial" pitchFamily="34" charset="-120"/>
-              </a:rPr>
-              <a:t>Annisa, A., Adnan, A., Zainuddin, Z. (2025). Enhancing Computational Efficiency... FSRCNN on AMP Architecture. IEEE AIMS.</a:t>
-            </a:r>
-            <a:endParaRPr lang="en-US" sz="1400" dirty="0"/>
-          </a:p>
-          <a:p>
-            <a:pPr indent="0" marL="0">
-              <a:spcAft>
-                <a:spcPts val="600"/>
-              </a:spcAft>
-              <a:buNone/>
-            </a:pPr>
-            <a:endParaRPr lang="en-US" sz="1400" dirty="0"/>
-          </a:p>
-          <a:p>
-            <a:pPr indent="0" marL="0">
-              <a:spcAft>
-                <a:spcPts val="600"/>
-              </a:spcAft>
-              <a:buNone/>
-            </a:pPr>
-            <a:r>
-              <a:rPr lang="en-US" sz="1400" dirty="0">
-                <a:solidFill>
-                  <a:srgbClr val="2D2D2D"/>
-                </a:solidFill>
-                <a:latin typeface="Arial" pitchFamily="34" charset="0"/>
-                <a:ea typeface="Arial" pitchFamily="34" charset="-122"/>
-                <a:cs typeface="Arial" pitchFamily="34" charset="-120"/>
-              </a:rPr>
-              <a:t>Wang, S. et al. (2020). High-Throughput CNN Inference on Embedded ARM big.LITTLE. IEEE TCAD.</a:t>
-            </a:r>
-            <a:endParaRPr lang="en-US" sz="1400" dirty="0"/>
-          </a:p>
-          <a:p>
-            <a:pPr indent="0" marL="0">
-              <a:spcAft>
-                <a:spcPts val="600"/>
-              </a:spcAft>
-              <a:buNone/>
-            </a:pPr>
-            <a:endParaRPr lang="en-US" sz="1400" dirty="0"/>
-          </a:p>
-          <a:p>
-            <a:pPr indent="0" marL="0">
-              <a:spcAft>
-                <a:spcPts val="600"/>
-              </a:spcAft>
-              <a:buNone/>
-            </a:pPr>
-            <a:r>
-              <a:rPr lang="en-US" sz="1400" dirty="0">
-                <a:solidFill>
-                  <a:srgbClr val="2D2D2D"/>
-                </a:solidFill>
-                <a:latin typeface="Arial" pitchFamily="34" charset="0"/>
-                <a:ea typeface="Arial" pitchFamily="34" charset="-122"/>
-                <a:cs typeface="Arial" pitchFamily="34" charset="-120"/>
-              </a:rPr>
-              <a:t>Chetlur, S. et al. (2014). cuDNN: Efficient Primitives for Deep Learning. arXiv:1410.0759.</a:t>
-            </a:r>
-            <a:endParaRPr lang="en-US" sz="1400" dirty="0"/>
-          </a:p>
-          <a:p>
-            <a:pPr indent="0" marL="0">
-              <a:spcAft>
-                <a:spcPts val="600"/>
-              </a:spcAft>
-              <a:buNone/>
-            </a:pPr>
-            <a:endParaRPr lang="en-US" sz="1400" dirty="0"/>
-          </a:p>
-          <a:p>
-            <a:pPr indent="0" marL="0">
-              <a:spcAft>
-                <a:spcPts val="600"/>
-              </a:spcAft>
-              <a:buNone/>
-            </a:pPr>
-            <a:r>
-              <a:rPr lang="en-US" sz="1400" dirty="0">
-                <a:solidFill>
-                  <a:srgbClr val="2D2D2D"/>
-                </a:solidFill>
-                <a:latin typeface="Arial" pitchFamily="34" charset="0"/>
-                <a:ea typeface="Arial" pitchFamily="34" charset="-122"/>
-                <a:cs typeface="Arial" pitchFamily="34" charset="-120"/>
-              </a:rPr>
-              <a:t>Chen, T. et al. (2018). TVM: An Automated End-to-End Optimizing Compiler for Deep Learning. USENIX OSDI.</a:t>
-            </a:r>
-            <a:endParaRPr lang="en-US" sz="1400" dirty="0"/>
-          </a:p>
-          <a:p>
-            <a:pPr indent="0" marL="0">
-              <a:spcAft>
-                <a:spcPts val="600"/>
-              </a:spcAft>
-              <a:buNone/>
-            </a:pPr>
-            <a:endParaRPr lang="en-US" sz="1400" dirty="0"/>
-          </a:p>
-          <a:p>
-            <a:pPr indent="0" marL="0">
-              <a:spcAft>
-                <a:spcPts val="600"/>
-              </a:spcAft>
-              <a:buNone/>
-            </a:pPr>
-            <a:r>
-              <a:rPr lang="en-US" sz="1400" dirty="0">
-                <a:solidFill>
-                  <a:srgbClr val="2D2D2D"/>
-                </a:solidFill>
-                <a:latin typeface="Arial" pitchFamily="34" charset="0"/>
-                <a:ea typeface="Arial" pitchFamily="34" charset="-122"/>
-                <a:cs typeface="Arial" pitchFamily="34" charset="-120"/>
-              </a:rPr>
-              <a:t>NVIDIA Corp. CUDA C++ Programming Guide; Ada GPU Architecture Whitepaper; TensorRT Architecture Overview.</a:t>
+              <a:t>M. Hamdani Ilham Latjoro, Adnan  |  Hasanuddin University  |  IEEE ITIS 2026</a:t>
             </a:r>
             <a:endParaRPr lang="en-US" sz="1400" dirty="0"/>
           </a:p>
@@ -6465,8 +7370,8 @@
         </p:nvSpPr>
         <p:spPr>
           <a:xfrm>
-            <a:off x="457200" y="137160"/>
-            <a:ext cx="8229600" cy="365760"/>
+            <a:off x="457200" y="182880"/>
+            <a:ext cx="8229600" cy="457200"/>
           </a:xfrm>
           <a:prstGeom prst="rect">
             <a:avLst/>
@@ -6482,30 +7387,50 @@
               <a:buNone/>
             </a:pPr>
             <a:r>
-              <a:rPr lang="en-US" sz="1400" i="1" dirty="0">
+              <a:rPr lang="en-US" sz="2400" b="1" dirty="0">
                 <a:solidFill>
-                  <a:srgbClr val="777777"/>
+                  <a:srgbClr val="1F4E79"/>
                 </a:solidFill>
                 <a:latin typeface="Arial" pitchFamily="34" charset="0"/>
                 <a:ea typeface="Arial" pitchFamily="34" charset="-122"/>
                 <a:cs typeface="Arial" pitchFamily="34" charset="-120"/>
               </a:rPr>
-              <a:t>Appendix A — Anticipated Question</a:t>
-            </a:r>
-            <a:endParaRPr lang="en-US" sz="1400" dirty="0"/>
+              <a:t>References</a:t>
+            </a:r>
+            <a:endParaRPr lang="en-US" sz="2400" dirty="0"/>
           </a:p>
         </p:txBody>
       </p:sp>
       <p:sp>
         <p:nvSpPr>
-          <p:cNvPr id="3" name="Text 1"/>
+          <p:cNvPr id="3" name="Shape 1"/>
           <p:cNvSpPr/>
           <p:nvPr/>
         </p:nvSpPr>
         <p:spPr>
           <a:xfrm>
-            <a:off x="457200" y="548640"/>
-            <a:ext cx="8229600" cy="685800"/>
+            <a:off x="457200" y="658368"/>
+            <a:ext cx="8229600" cy="22860"/>
+          </a:xfrm>
+          <a:prstGeom prst="rect">
+            <a:avLst/>
+          </a:prstGeom>
+          <a:solidFill>
+            <a:srgbClr val="CCCCCC"/>
+          </a:solidFill>
+          <a:ln/>
+        </p:spPr>
+      </p:sp>
+      <p:sp>
+        <p:nvSpPr>
+          <p:cNvPr id="4" name="Text 2"/>
+          <p:cNvSpPr/>
+          <p:nvPr/>
+        </p:nvSpPr>
+        <p:spPr>
+          <a:xfrm>
+            <a:off x="457200" y="777240"/>
+            <a:ext cx="8229600" cy="4023360"/>
           </a:xfrm>
           <a:prstGeom prst="rect">
             <a:avLst/>
@@ -6518,53 +7443,13 @@
           <a:lstStyle/>
           <a:p>
             <a:pPr indent="0" marL="0">
+              <a:spcAft>
+                <a:spcPts val="600"/>
+              </a:spcAft>
               <a:buNone/>
             </a:pPr>
             <a:r>
-              <a:rPr lang="en-US" sz="2400" b="1" dirty="0">
-                <a:solidFill>
-                  <a:srgbClr val="1F4E79"/>
-                </a:solidFill>
-                <a:latin typeface="Arial" pitchFamily="34" charset="0"/>
-                <a:ea typeface="Arial" pitchFamily="34" charset="-122"/>
-                <a:cs typeface="Arial" pitchFamily="34" charset="-120"/>
-              </a:rPr>
-              <a:t>Why not compare against atomicAdd or cuDNN?</a:t>
-            </a:r>
-            <a:endParaRPr lang="en-US" sz="2400" dirty="0"/>
-          </a:p>
-        </p:txBody>
-      </p:sp>
-      <p:sp>
-        <p:nvSpPr>
-          <p:cNvPr id="4" name="Text 2"/>
-          <p:cNvSpPr/>
-          <p:nvPr/>
-        </p:nvSpPr>
-        <p:spPr>
-          <a:xfrm>
-            <a:off x="457200" y="1371600"/>
-            <a:ext cx="8229600" cy="2743200"/>
-          </a:xfrm>
-          <a:prstGeom prst="rect">
-            <a:avLst/>
-          </a:prstGeom>
-          <a:noFill/>
-          <a:ln/>
-        </p:spPr>
-        <p:txBody>
-          <a:bodyPr wrap="square" rtlCol="0" anchor="ctr"/>
-          <a:lstStyle/>
-          <a:p>
-            <a:pPr marL="342900" indent="-342900">
-              <a:spcAft>
-                <a:spcPts val="1200"/>
-              </a:spcAft>
-              <a:buSzPct val="100000"/>
-              <a:buChar char="•"/>
-            </a:pPr>
-            <a:r>
-              <a:rPr lang="en-US" sz="1900" b="1" dirty="0">
+              <a:rPr lang="en-US" sz="1400" dirty="0">
                 <a:solidFill>
                   <a:srgbClr val="2D2D2D"/>
                 </a:solidFill>
@@ -6572,16 +7457,28 @@
                 <a:ea typeface="Arial" pitchFamily="34" charset="-122"/>
                 <a:cs typeface="Arial" pitchFamily="34" charset="-120"/>
               </a:rPr>
-              <a:t>atomicAdd: </a:t>
-            </a:r>
+              <a:t>Dong, C., Loy, C.C., Tang, X. (2016). Accelerating the Super-Resolution CNN. ECCV.</a:t>
+            </a:r>
+            <a:endParaRPr lang="en-US" sz="1400" dirty="0"/>
+          </a:p>
+          <a:p>
             <a:pPr indent="0" marL="0">
               <a:spcAft>
-                <a:spcPts val="1200"/>
+                <a:spcPts val="600"/>
               </a:spcAft>
               <a:buNone/>
             </a:pPr>
-            <a:r>
-              <a:rPr lang="en-US" sz="1900" dirty="0">
+            <a:endParaRPr lang="en-US" sz="1400" dirty="0"/>
+          </a:p>
+          <a:p>
+            <a:pPr indent="0" marL="0">
+              <a:spcAft>
+                <a:spcPts val="600"/>
+              </a:spcAft>
+              <a:buNone/>
+            </a:pPr>
+            <a:r>
+              <a:rPr lang="en-US" sz="1400" dirty="0">
                 <a:solidFill>
                   <a:srgbClr val="2D2D2D"/>
                 </a:solidFill>
@@ -6589,19 +7486,28 @@
                 <a:ea typeface="Arial" pitchFamily="34" charset="-122"/>
                 <a:cs typeface="Arial" pitchFamily="34" charset="-120"/>
               </a:rPr>
-              <a:t>floating-point addition is non-associative; asynchronous warps race to accumulate in different orders, so results vary run to run — the opposite of what this paper needs.</a:t>
-            </a:r>
-            <a:endParaRPr lang="en-US" sz="1900" dirty="0"/>
+              <a:t>Annisa, A., Adnan, A., Zainuddin, Z. (2025). Enhancing Computational Efficiency... FSRCNN on AMP Architecture. IEEE AIMS.</a:t>
+            </a:r>
+            <a:endParaRPr lang="en-US" sz="1400" dirty="0"/>
           </a:p>
           <a:p>
             <a:pPr indent="0" marL="0">
               <a:spcAft>
-                <a:spcPts val="1200"/>
+                <a:spcPts val="600"/>
               </a:spcAft>
               <a:buNone/>
             </a:pPr>
-            <a:r>
-              <a:rPr lang="en-US" sz="1900" b="1" dirty="0">
+            <a:endParaRPr lang="en-US" sz="1400" dirty="0"/>
+          </a:p>
+          <a:p>
+            <a:pPr indent="0" marL="0">
+              <a:spcAft>
+                <a:spcPts val="600"/>
+              </a:spcAft>
+              <a:buNone/>
+            </a:pPr>
+            <a:r>
+              <a:rPr lang="en-US" sz="1400" dirty="0">
                 <a:solidFill>
                   <a:srgbClr val="2D2D2D"/>
                 </a:solidFill>
@@ -6609,16 +7515,28 @@
                 <a:ea typeface="Arial" pitchFamily="34" charset="-122"/>
                 <a:cs typeface="Arial" pitchFamily="34" charset="-120"/>
               </a:rPr>
-              <a:t>cuDNN: </a:t>
-            </a:r>
+              <a:t>Wang, S. et al. (2020). High-Throughput CNN Inference on Embedded ARM big.LITTLE. IEEE TCAD.</a:t>
+            </a:r>
+            <a:endParaRPr lang="en-US" sz="1400" dirty="0"/>
+          </a:p>
+          <a:p>
             <a:pPr indent="0" marL="0">
               <a:spcAft>
-                <a:spcPts val="1200"/>
+                <a:spcPts val="600"/>
               </a:spcAft>
               <a:buNone/>
             </a:pPr>
-            <a:r>
-              <a:rPr lang="en-US" sz="1900" dirty="0">
+            <a:endParaRPr lang="en-US" sz="1400" dirty="0"/>
+          </a:p>
+          <a:p>
+            <a:pPr indent="0" marL="0">
+              <a:spcAft>
+                <a:spcPts val="600"/>
+              </a:spcAft>
+              <a:buNone/>
+            </a:pPr>
+            <a:r>
+              <a:rPr lang="en-US" sz="1400" dirty="0">
                 <a:solidFill>
                   <a:srgbClr val="2D2D2D"/>
                 </a:solidFill>
@@ -6626,19 +7544,28 @@
                 <a:ea typeface="Arial" pitchFamily="34" charset="-122"/>
                 <a:cs typeface="Arial" pitchFamily="34" charset="-120"/>
               </a:rPr>
-              <a:t>optimizes for batched matmul; does not expose the isolated per-channel buffers our zero-race verification contract depends on.</a:t>
-            </a:r>
-            <a:endParaRPr lang="en-US" sz="1900" dirty="0"/>
+              <a:t>Chetlur, S. et al. (2014). cuDNN: Efficient Primitives for Deep Learning. arXiv:1410.0759.</a:t>
+            </a:r>
+            <a:endParaRPr lang="en-US" sz="1400" dirty="0"/>
           </a:p>
           <a:p>
             <a:pPr indent="0" marL="0">
               <a:spcAft>
-                <a:spcPts val="1200"/>
+                <a:spcPts val="600"/>
               </a:spcAft>
               <a:buNone/>
             </a:pPr>
-            <a:r>
-              <a:rPr lang="en-US" sz="1900" b="1" dirty="0">
+            <a:endParaRPr lang="en-US" sz="1400" dirty="0"/>
+          </a:p>
+          <a:p>
+            <a:pPr indent="0" marL="0">
+              <a:spcAft>
+                <a:spcPts val="600"/>
+              </a:spcAft>
+              <a:buNone/>
+            </a:pPr>
+            <a:r>
+              <a:rPr lang="en-US" sz="1400" dirty="0">
                 <a:solidFill>
                   <a:srgbClr val="2D2D2D"/>
                 </a:solidFill>
@@ -6646,16 +7573,28 @@
                 <a:ea typeface="Arial" pitchFamily="34" charset="-122"/>
                 <a:cs typeface="Arial" pitchFamily="34" charset="-120"/>
               </a:rPr>
-              <a:t>Future work: </a:t>
-            </a:r>
+              <a:t>Chen, T. et al. (2018). TVM: An Automated End-to-End Optimizing Compiler for Deep Learning. USENIX OSDI.</a:t>
+            </a:r>
+            <a:endParaRPr lang="en-US" sz="1400" dirty="0"/>
+          </a:p>
+          <a:p>
             <a:pPr indent="0" marL="0">
               <a:spcAft>
-                <a:spcPts val="1200"/>
+                <a:spcPts val="600"/>
               </a:spcAft>
               <a:buNone/>
             </a:pPr>
-            <a:r>
-              <a:rPr lang="en-US" sz="1900" dirty="0">
+            <a:endParaRPr lang="en-US" sz="1400" dirty="0"/>
+          </a:p>
+          <a:p>
+            <a:pPr indent="0" marL="0">
+              <a:spcAft>
+                <a:spcPts val="600"/>
+              </a:spcAft>
+              <a:buNone/>
+            </a:pPr>
+            <a:r>
+              <a:rPr lang="en-US" sz="1400" dirty="0">
                 <a:solidFill>
                   <a:srgbClr val="2D2D2D"/>
                 </a:solidFill>
@@ -6663,9 +7602,9 @@
                 <a:ea typeface="Arial" pitchFamily="34" charset="-122"/>
                 <a:cs typeface="Arial" pitchFamily="34" charset="-120"/>
               </a:rPr>
-              <a:t>a throughput-only (not correctness) comparison against both remains useful to price determinism against an unconstrained baseline.</a:t>
-            </a:r>
-            <a:endParaRPr lang="en-US" sz="1900" dirty="0"/>
+              <a:t>NVIDIA Corp. CUDA C++ Programming Guide; Ada GPU Architecture Whitepaper; TensorRT Architecture Overview.</a:t>
+            </a:r>
+            <a:endParaRPr lang="en-US" sz="1400" dirty="0"/>
           </a:p>
         </p:txBody>
       </p:sp>
@@ -6727,7 +7666,7 @@
                 <a:ea typeface="Arial" pitchFamily="34" charset="-122"/>
                 <a:cs typeface="Arial" pitchFamily="34" charset="-120"/>
               </a:rPr>
-              <a:t>Appendix B — In Progress</a:t>
+              <a:t>Appendix A — Anticipated Question</a:t>
             </a:r>
             <a:endParaRPr lang="en-US" sz="1400" dirty="0"/>
           </a:p>
@@ -6758,7 +7697,7 @@
               <a:buNone/>
             </a:pPr>
             <a:r>
-              <a:rPr lang="en-US" sz="2200" b="1" dirty="0">
+              <a:rPr lang="en-US" sz="2400" b="1" dirty="0">
                 <a:solidFill>
                   <a:srgbClr val="1F4E79"/>
                 </a:solidFill>
@@ -6766,49 +7705,22 @@
                 <a:ea typeface="Arial" pitchFamily="34" charset="-122"/>
                 <a:cs typeface="Arial" pitchFamily="34" charset="-120"/>
               </a:rPr>
-              <a:t>Nsight Compute counters for deconv_kernel / spatial_reduction_kernel</a:t>
-            </a:r>
-            <a:endParaRPr lang="en-US" sz="2200" dirty="0"/>
+              <a:t>Why not compare against atomicAdd or cuDNN?</a:t>
+            </a:r>
+            <a:endParaRPr lang="en-US" sz="2400" dirty="0"/>
           </a:p>
         </p:txBody>
       </p:sp>
       <p:sp>
         <p:nvSpPr>
-          <p:cNvPr id="4" name="Shape 2"/>
+          <p:cNvPr id="4" name="Text 2"/>
           <p:cNvSpPr/>
           <p:nvPr/>
         </p:nvSpPr>
         <p:spPr>
           <a:xfrm>
-            <a:off x="457200" y="1234440"/>
-            <a:ext cx="1463040" cy="292608"/>
-          </a:xfrm>
-          <a:prstGeom prst="roundRect">
-            <a:avLst>
-              <a:gd name="adj" fmla="val 15625"/>
-            </a:avLst>
-          </a:prstGeom>
-          <a:solidFill>
-            <a:srgbClr val="FDEDEC"/>
-          </a:solidFill>
-          <a:ln w="12700">
-            <a:solidFill>
-              <a:srgbClr val="C0392B"/>
-            </a:solidFill>
-            <a:prstDash val="solid"/>
-          </a:ln>
-        </p:spPr>
-      </p:sp>
-      <p:sp>
-        <p:nvSpPr>
-          <p:cNvPr id="5" name="Text 3"/>
-          <p:cNvSpPr/>
-          <p:nvPr/>
-        </p:nvSpPr>
-        <p:spPr>
-          <a:xfrm>
-            <a:off x="457200" y="1234440"/>
-            <a:ext cx="1463040" cy="292608"/>
+            <a:off x="457200" y="1371600"/>
+            <a:ext cx="8229600" cy="2743200"/>
           </a:xfrm>
           <a:prstGeom prst="rect">
             <a:avLst/>
@@ -6820,1085 +7732,116 @@
           <a:bodyPr wrap="square" rtlCol="0" anchor="ctr"/>
           <a:lstStyle/>
           <a:p>
-            <a:pPr algn="ctr" indent="0" marL="0">
-              <a:buNone/>
-            </a:pPr>
-            <a:r>
-              <a:rPr lang="en-US" sz="1200" b="1" dirty="0">
+            <a:pPr marL="342900" indent="-342900">
+              <a:spcAft>
+                <a:spcPts val="1200"/>
+              </a:spcAft>
+              <a:buSzPct val="100000"/>
+              <a:buChar char="•"/>
+            </a:pPr>
+            <a:r>
+              <a:rPr lang="en-US" sz="1900" b="1" dirty="0">
                 <a:solidFill>
-                  <a:srgbClr val="C0392B"/>
+                  <a:srgbClr val="2D2D2D"/>
                 </a:solidFill>
                 <a:latin typeface="Arial" pitchFamily="34" charset="0"/>
                 <a:ea typeface="Arial" pitchFamily="34" charset="-122"/>
                 <a:cs typeface="Arial" pitchFamily="34" charset="-120"/>
               </a:rPr>
-              <a:t>DATA PENDING</a:t>
-            </a:r>
-            <a:endParaRPr lang="en-US" sz="1200" dirty="0"/>
-          </a:p>
-        </p:txBody>
-      </p:sp>
-      <p:graphicFrame>
-        <p:nvGraphicFramePr>
-          <p:cNvPr id="20" name="Table 0"/>
-          <p:cNvGraphicFramePr>
-            <a:graphicFrameLocks noGrp="1"/>
-          </p:cNvGraphicFramePr>
-          <p:nvPr>
-            <p:extLst>
-              <p:ext uri="{D42A27DB-BD31-4B8C-83A1-F6EECF244321}">
-                <p14:modId xmlns:p14="http://schemas.microsoft.com/office/powerpoint/2010/main" val="1579011935"/>
-              </p:ext>
-            </p:extLst>
-          </p:nvPr>
-        </p:nvGraphicFramePr>
-        <p:xfrm>
-          <a:off x="457200" y="1737360"/>
-          <a:ext cx="8229600" cy="2194560"/>
-        </p:xfrm>
-        <a:graphic>
-          <a:graphicData uri="http://schemas.openxmlformats.org/drawingml/2006/table">
-            <a:tbl>
-              <a:tblPr/>
-              <a:tblGrid>
-                <a:gridCol w="2743200"/>
-                <a:gridCol w="2743200"/>
-                <a:gridCol w="2743200"/>
-              </a:tblGrid>
-              <a:tr h="438912">
-                <a:tc>
-                  <a:txBody>
-                    <a:bodyPr/>
-                    <a:lstStyle/>
-                    <a:p>
-                      <a:pPr indent="0" marL="0">
-                        <a:buNone/>
-                      </a:pPr>
-                      <a:r>
-                        <a:rPr lang="en-US" sz="1500" b="1" dirty="0">
-                          <a:solidFill>
-                            <a:srgbClr val="FFFFFF"/>
-                          </a:solidFill>
-                          <a:latin typeface="Arial" pitchFamily="34" charset="0"/>
-                          <a:ea typeface="Arial" pitchFamily="34" charset="-122"/>
-                          <a:cs typeface="Arial" pitchFamily="34" charset="-120"/>
-                        </a:rPr>
-                        <a:t>Metric</a:t>
-                      </a:r>
-                      <a:endParaRPr lang="en-US" sz="1500" dirty="0">
-                        <a:latin typeface="Arial" charset="0"/>
-                        <a:ea typeface="Arial" charset="0"/>
-                        <a:cs typeface="Arial" charset="0"/>
-                      </a:endParaRPr>
-                    </a:p>
-                  </a:txBody>
-                  <a:tcPr marL="91440" marR="91440" marT="45720" marB="45720" anchor="ctr">
-                    <a:lnL w="6350" cap="flat" cmpd="sng" algn="ctr">
-                      <a:solidFill>
-                        <a:srgbClr val="CCCCCC"/>
-                      </a:solidFill>
-                      <a:prstDash val="solid"/>
-                      <a:round/>
-                      <a:headEnd type="none" w="med" len="med"/>
-                      <a:tailEnd type="none" w="med" len="med"/>
-                    </a:lnL>
-                    <a:lnR w="6350" cap="flat" cmpd="sng" algn="ctr">
-                      <a:solidFill>
-                        <a:srgbClr val="CCCCCC"/>
-                      </a:solidFill>
-                      <a:prstDash val="solid"/>
-                      <a:round/>
-                      <a:headEnd type="none" w="med" len="med"/>
-                      <a:tailEnd type="none" w="med" len="med"/>
-                    </a:lnR>
-                    <a:lnT w="6350" cap="flat" cmpd="sng" algn="ctr">
-                      <a:solidFill>
-                        <a:srgbClr val="CCCCCC"/>
-                      </a:solidFill>
-                      <a:prstDash val="solid"/>
-                      <a:round/>
-                      <a:headEnd type="none" w="med" len="med"/>
-                      <a:tailEnd type="none" w="med" len="med"/>
-                    </a:lnT>
-                    <a:lnB w="6350" cap="flat" cmpd="sng" algn="ctr">
-                      <a:solidFill>
-                        <a:srgbClr val="CCCCCC"/>
-                      </a:solidFill>
-                      <a:prstDash val="solid"/>
-                      <a:round/>
-                      <a:headEnd type="none" w="med" len="med"/>
-                      <a:tailEnd type="none" w="med" len="med"/>
-                    </a:lnB>
-                    <a:solidFill>
-                      <a:srgbClr val="1F4E79"/>
-                    </a:solidFill>
-                  </a:tcPr>
-                </a:tc>
-                <a:tc>
-                  <a:txBody>
-                    <a:bodyPr/>
-                    <a:lstStyle/>
-                    <a:p>
-                      <a:pPr indent="0" marL="0">
-                        <a:buNone/>
-                      </a:pPr>
-                      <a:r>
-                        <a:rPr lang="en-US" sz="1500" b="1" dirty="0">
-                          <a:solidFill>
-                            <a:srgbClr val="FFFFFF"/>
-                          </a:solidFill>
-                          <a:latin typeface="Arial" pitchFamily="34" charset="0"/>
-                          <a:ea typeface="Arial" pitchFamily="34" charset="-122"/>
-                          <a:cs typeface="Arial" pitchFamily="34" charset="-120"/>
-                        </a:rPr>
-                        <a:t>GB10</a:t>
-                      </a:r>
-                      <a:endParaRPr lang="en-US" sz="1500" dirty="0">
-                        <a:latin typeface="Arial" charset="0"/>
-                        <a:ea typeface="Arial" charset="0"/>
-                        <a:cs typeface="Arial" charset="0"/>
-                      </a:endParaRPr>
-                    </a:p>
-                  </a:txBody>
-                  <a:tcPr marL="91440" marR="91440" marT="45720" marB="45720" anchor="ctr">
-                    <a:lnL w="6350" cap="flat" cmpd="sng" algn="ctr">
-                      <a:solidFill>
-                        <a:srgbClr val="CCCCCC"/>
-                      </a:solidFill>
-                      <a:prstDash val="solid"/>
-                      <a:round/>
-                      <a:headEnd type="none" w="med" len="med"/>
-                      <a:tailEnd type="none" w="med" len="med"/>
-                    </a:lnL>
-                    <a:lnR w="6350" cap="flat" cmpd="sng" algn="ctr">
-                      <a:solidFill>
-                        <a:srgbClr val="CCCCCC"/>
-                      </a:solidFill>
-                      <a:prstDash val="solid"/>
-                      <a:round/>
-                      <a:headEnd type="none" w="med" len="med"/>
-                      <a:tailEnd type="none" w="med" len="med"/>
-                    </a:lnR>
-                    <a:lnT w="6350" cap="flat" cmpd="sng" algn="ctr">
-                      <a:solidFill>
-                        <a:srgbClr val="CCCCCC"/>
-                      </a:solidFill>
-                      <a:prstDash val="solid"/>
-                      <a:round/>
-                      <a:headEnd type="none" w="med" len="med"/>
-                      <a:tailEnd type="none" w="med" len="med"/>
-                    </a:lnT>
-                    <a:lnB w="6350" cap="flat" cmpd="sng" algn="ctr">
-                      <a:solidFill>
-                        <a:srgbClr val="CCCCCC"/>
-                      </a:solidFill>
-                      <a:prstDash val="solid"/>
-                      <a:round/>
-                      <a:headEnd type="none" w="med" len="med"/>
-                      <a:tailEnd type="none" w="med" len="med"/>
-                    </a:lnB>
-                    <a:solidFill>
-                      <a:srgbClr val="1F4E79"/>
-                    </a:solidFill>
-                  </a:tcPr>
-                </a:tc>
-                <a:tc>
-                  <a:txBody>
-                    <a:bodyPr/>
-                    <a:lstStyle/>
-                    <a:p>
-                      <a:pPr indent="0" marL="0">
-                        <a:buNone/>
-                      </a:pPr>
-                      <a:r>
-                        <a:rPr lang="en-US" sz="1500" b="1" dirty="0">
-                          <a:solidFill>
-                            <a:srgbClr val="FFFFFF"/>
-                          </a:solidFill>
-                          <a:latin typeface="Arial" pitchFamily="34" charset="0"/>
-                          <a:ea typeface="Arial" pitchFamily="34" charset="-122"/>
-                          <a:cs typeface="Arial" pitchFamily="34" charset="-120"/>
-                        </a:rPr>
-                        <a:t>RTX 4090</a:t>
-                      </a:r>
-                      <a:endParaRPr lang="en-US" sz="1500" dirty="0">
-                        <a:latin typeface="Arial" charset="0"/>
-                        <a:ea typeface="Arial" charset="0"/>
-                        <a:cs typeface="Arial" charset="0"/>
-                      </a:endParaRPr>
-                    </a:p>
-                  </a:txBody>
-                  <a:tcPr marL="91440" marR="91440" marT="45720" marB="45720" anchor="ctr">
-                    <a:lnL w="6350" cap="flat" cmpd="sng" algn="ctr">
-                      <a:solidFill>
-                        <a:srgbClr val="CCCCCC"/>
-                      </a:solidFill>
-                      <a:prstDash val="solid"/>
-                      <a:round/>
-                      <a:headEnd type="none" w="med" len="med"/>
-                      <a:tailEnd type="none" w="med" len="med"/>
-                    </a:lnL>
-                    <a:lnR w="6350" cap="flat" cmpd="sng" algn="ctr">
-                      <a:solidFill>
-                        <a:srgbClr val="CCCCCC"/>
-                      </a:solidFill>
-                      <a:prstDash val="solid"/>
-                      <a:round/>
-                      <a:headEnd type="none" w="med" len="med"/>
-                      <a:tailEnd type="none" w="med" len="med"/>
-                    </a:lnR>
-                    <a:lnT w="6350" cap="flat" cmpd="sng" algn="ctr">
-                      <a:solidFill>
-                        <a:srgbClr val="CCCCCC"/>
-                      </a:solidFill>
-                      <a:prstDash val="solid"/>
-                      <a:round/>
-                      <a:headEnd type="none" w="med" len="med"/>
-                      <a:tailEnd type="none" w="med" len="med"/>
-                    </a:lnT>
-                    <a:lnB w="6350" cap="flat" cmpd="sng" algn="ctr">
-                      <a:solidFill>
-                        <a:srgbClr val="CCCCCC"/>
-                      </a:solidFill>
-                      <a:prstDash val="solid"/>
-                      <a:round/>
-                      <a:headEnd type="none" w="med" len="med"/>
-                      <a:tailEnd type="none" w="med" len="med"/>
-                    </a:lnB>
-                    <a:solidFill>
-                      <a:srgbClr val="1F4E79"/>
-                    </a:solidFill>
-                  </a:tcPr>
-                </a:tc>
-              </a:tr>
-              <a:tr h="438912">
-                <a:tc>
-                  <a:txBody>
-                    <a:bodyPr/>
-                    <a:lstStyle/>
-                    <a:p>
-                      <a:pPr indent="0" marL="0">
-                        <a:buNone/>
-                      </a:pPr>
-                      <a:r>
-                        <a:rPr lang="en-US" sz="1500" dirty="0">
-                          <a:solidFill>
-                            <a:srgbClr val="777777"/>
-                          </a:solidFill>
-                          <a:latin typeface="Arial" pitchFamily="34" charset="0"/>
-                          <a:ea typeface="Arial" pitchFamily="34" charset="-122"/>
-                          <a:cs typeface="Arial" pitchFamily="34" charset="-120"/>
-                        </a:rPr>
-                        <a:t>L2 hit rate (lts__t_sector_hit_rate.pct)</a:t>
-                      </a:r>
-                      <a:endParaRPr lang="en-US" sz="1500" dirty="0">
-                        <a:latin typeface="Arial" charset="0"/>
-                        <a:ea typeface="Arial" charset="0"/>
-                        <a:cs typeface="Arial" charset="0"/>
-                      </a:endParaRPr>
-                    </a:p>
-                  </a:txBody>
-                  <a:tcPr marL="91440" marR="91440" marT="45720" marB="45720" anchor="ctr">
-                    <a:lnL w="6350" cap="flat" cmpd="sng" algn="ctr">
-                      <a:solidFill>
-                        <a:srgbClr val="CCCCCC"/>
-                      </a:solidFill>
-                      <a:prstDash val="solid"/>
-                      <a:round/>
-                      <a:headEnd type="none" w="med" len="med"/>
-                      <a:tailEnd type="none" w="med" len="med"/>
-                    </a:lnL>
-                    <a:lnR w="6350" cap="flat" cmpd="sng" algn="ctr">
-                      <a:solidFill>
-                        <a:srgbClr val="CCCCCC"/>
-                      </a:solidFill>
-                      <a:prstDash val="solid"/>
-                      <a:round/>
-                      <a:headEnd type="none" w="med" len="med"/>
-                      <a:tailEnd type="none" w="med" len="med"/>
-                    </a:lnR>
-                    <a:lnT w="6350" cap="flat" cmpd="sng" algn="ctr">
-                      <a:solidFill>
-                        <a:srgbClr val="CCCCCC"/>
-                      </a:solidFill>
-                      <a:prstDash val="solid"/>
-                      <a:round/>
-                      <a:headEnd type="none" w="med" len="med"/>
-                      <a:tailEnd type="none" w="med" len="med"/>
-                    </a:lnT>
-                    <a:lnB w="6350" cap="flat" cmpd="sng" algn="ctr">
-                      <a:solidFill>
-                        <a:srgbClr val="CCCCCC"/>
-                      </a:solidFill>
-                      <a:prstDash val="solid"/>
-                      <a:round/>
-                      <a:headEnd type="none" w="med" len="med"/>
-                      <a:tailEnd type="none" w="med" len="med"/>
-                    </a:lnB>
-                  </a:tcPr>
-                </a:tc>
-                <a:tc>
-                  <a:txBody>
-                    <a:bodyPr/>
-                    <a:lstStyle/>
-                    <a:p>
-                      <a:pPr indent="0" marL="0">
-                        <a:buNone/>
-                      </a:pPr>
-                      <a:r>
-                        <a:rPr lang="en-US" sz="1500" dirty="0">
-                          <a:solidFill>
-                            <a:srgbClr val="777777"/>
-                          </a:solidFill>
-                          <a:latin typeface="Arial" pitchFamily="34" charset="0"/>
-                          <a:ea typeface="Arial" pitchFamily="34" charset="-122"/>
-                          <a:cs typeface="Arial" pitchFamily="34" charset="-120"/>
-                        </a:rPr>
-                        <a:t>TBD</a:t>
-                      </a:r>
-                      <a:endParaRPr lang="en-US" sz="1500" dirty="0">
-                        <a:latin typeface="Arial" charset="0"/>
-                        <a:ea typeface="Arial" charset="0"/>
-                        <a:cs typeface="Arial" charset="0"/>
-                      </a:endParaRPr>
-                    </a:p>
-                  </a:txBody>
-                  <a:tcPr marL="91440" marR="91440" marT="45720" marB="45720" anchor="ctr">
-                    <a:lnL w="6350" cap="flat" cmpd="sng" algn="ctr">
-                      <a:solidFill>
-                        <a:srgbClr val="CCCCCC"/>
-                      </a:solidFill>
-                      <a:prstDash val="solid"/>
-                      <a:round/>
-                      <a:headEnd type="none" w="med" len="med"/>
-                      <a:tailEnd type="none" w="med" len="med"/>
-                    </a:lnL>
-                    <a:lnR w="6350" cap="flat" cmpd="sng" algn="ctr">
-                      <a:solidFill>
-                        <a:srgbClr val="CCCCCC"/>
-                      </a:solidFill>
-                      <a:prstDash val="solid"/>
-                      <a:round/>
-                      <a:headEnd type="none" w="med" len="med"/>
-                      <a:tailEnd type="none" w="med" len="med"/>
-                    </a:lnR>
-                    <a:lnT w="6350" cap="flat" cmpd="sng" algn="ctr">
-                      <a:solidFill>
-                        <a:srgbClr val="CCCCCC"/>
-                      </a:solidFill>
-                      <a:prstDash val="solid"/>
-                      <a:round/>
-                      <a:headEnd type="none" w="med" len="med"/>
-                      <a:tailEnd type="none" w="med" len="med"/>
-                    </a:lnT>
-                    <a:lnB w="6350" cap="flat" cmpd="sng" algn="ctr">
-                      <a:solidFill>
-                        <a:srgbClr val="CCCCCC"/>
-                      </a:solidFill>
-                      <a:prstDash val="solid"/>
-                      <a:round/>
-                      <a:headEnd type="none" w="med" len="med"/>
-                      <a:tailEnd type="none" w="med" len="med"/>
-                    </a:lnB>
-                  </a:tcPr>
-                </a:tc>
-                <a:tc>
-                  <a:txBody>
-                    <a:bodyPr/>
-                    <a:lstStyle/>
-                    <a:p>
-                      <a:pPr indent="0" marL="0">
-                        <a:buNone/>
-                      </a:pPr>
-                      <a:r>
-                        <a:rPr lang="en-US" sz="1500" dirty="0">
-                          <a:solidFill>
-                            <a:srgbClr val="777777"/>
-                          </a:solidFill>
-                          <a:latin typeface="Arial" pitchFamily="34" charset="0"/>
-                          <a:ea typeface="Arial" pitchFamily="34" charset="-122"/>
-                          <a:cs typeface="Arial" pitchFamily="34" charset="-120"/>
-                        </a:rPr>
-                        <a:t>TBD</a:t>
-                      </a:r>
-                      <a:endParaRPr lang="en-US" sz="1500" dirty="0">
-                        <a:latin typeface="Arial" charset="0"/>
-                        <a:ea typeface="Arial" charset="0"/>
-                        <a:cs typeface="Arial" charset="0"/>
-                      </a:endParaRPr>
-                    </a:p>
-                  </a:txBody>
-                  <a:tcPr marL="91440" marR="91440" marT="45720" marB="45720" anchor="ctr">
-                    <a:lnL w="6350" cap="flat" cmpd="sng" algn="ctr">
-                      <a:solidFill>
-                        <a:srgbClr val="CCCCCC"/>
-                      </a:solidFill>
-                      <a:prstDash val="solid"/>
-                      <a:round/>
-                      <a:headEnd type="none" w="med" len="med"/>
-                      <a:tailEnd type="none" w="med" len="med"/>
-                    </a:lnL>
-                    <a:lnR w="6350" cap="flat" cmpd="sng" algn="ctr">
-                      <a:solidFill>
-                        <a:srgbClr val="CCCCCC"/>
-                      </a:solidFill>
-                      <a:prstDash val="solid"/>
-                      <a:round/>
-                      <a:headEnd type="none" w="med" len="med"/>
-                      <a:tailEnd type="none" w="med" len="med"/>
-                    </a:lnR>
-                    <a:lnT w="6350" cap="flat" cmpd="sng" algn="ctr">
-                      <a:solidFill>
-                        <a:srgbClr val="CCCCCC"/>
-                      </a:solidFill>
-                      <a:prstDash val="solid"/>
-                      <a:round/>
-                      <a:headEnd type="none" w="med" len="med"/>
-                      <a:tailEnd type="none" w="med" len="med"/>
-                    </a:lnT>
-                    <a:lnB w="6350" cap="flat" cmpd="sng" algn="ctr">
-                      <a:solidFill>
-                        <a:srgbClr val="CCCCCC"/>
-                      </a:solidFill>
-                      <a:prstDash val="solid"/>
-                      <a:round/>
-                      <a:headEnd type="none" w="med" len="med"/>
-                      <a:tailEnd type="none" w="med" len="med"/>
-                    </a:lnB>
-                  </a:tcPr>
-                </a:tc>
-              </a:tr>
-              <a:tr h="438912">
-                <a:tc>
-                  <a:txBody>
-                    <a:bodyPr/>
-                    <a:lstStyle/>
-                    <a:p>
-                      <a:pPr indent="0" marL="0">
-                        <a:buNone/>
-                      </a:pPr>
-                      <a:r>
-                        <a:rPr lang="en-US" sz="1500" dirty="0">
-                          <a:solidFill>
-                            <a:srgbClr val="777777"/>
-                          </a:solidFill>
-                          <a:latin typeface="Arial" pitchFamily="34" charset="0"/>
-                          <a:ea typeface="Arial" pitchFamily="34" charset="-122"/>
-                          <a:cs typeface="Arial" pitchFamily="34" charset="-120"/>
-                        </a:rPr>
-                        <a:t>L2 throughput (% of peak)</a:t>
-                      </a:r>
-                      <a:endParaRPr lang="en-US" sz="1500" dirty="0">
-                        <a:latin typeface="Arial" charset="0"/>
-                        <a:ea typeface="Arial" charset="0"/>
-                        <a:cs typeface="Arial" charset="0"/>
-                      </a:endParaRPr>
-                    </a:p>
-                  </a:txBody>
-                  <a:tcPr marL="91440" marR="91440" marT="45720" marB="45720" anchor="ctr">
-                    <a:lnL w="6350" cap="flat" cmpd="sng" algn="ctr">
-                      <a:solidFill>
-                        <a:srgbClr val="CCCCCC"/>
-                      </a:solidFill>
-                      <a:prstDash val="solid"/>
-                      <a:round/>
-                      <a:headEnd type="none" w="med" len="med"/>
-                      <a:tailEnd type="none" w="med" len="med"/>
-                    </a:lnL>
-                    <a:lnR w="6350" cap="flat" cmpd="sng" algn="ctr">
-                      <a:solidFill>
-                        <a:srgbClr val="CCCCCC"/>
-                      </a:solidFill>
-                      <a:prstDash val="solid"/>
-                      <a:round/>
-                      <a:headEnd type="none" w="med" len="med"/>
-                      <a:tailEnd type="none" w="med" len="med"/>
-                    </a:lnR>
-                    <a:lnT w="6350" cap="flat" cmpd="sng" algn="ctr">
-                      <a:solidFill>
-                        <a:srgbClr val="CCCCCC"/>
-                      </a:solidFill>
-                      <a:prstDash val="solid"/>
-                      <a:round/>
-                      <a:headEnd type="none" w="med" len="med"/>
-                      <a:tailEnd type="none" w="med" len="med"/>
-                    </a:lnT>
-                    <a:lnB w="6350" cap="flat" cmpd="sng" algn="ctr">
-                      <a:solidFill>
-                        <a:srgbClr val="CCCCCC"/>
-                      </a:solidFill>
-                      <a:prstDash val="solid"/>
-                      <a:round/>
-                      <a:headEnd type="none" w="med" len="med"/>
-                      <a:tailEnd type="none" w="med" len="med"/>
-                    </a:lnB>
-                  </a:tcPr>
-                </a:tc>
-                <a:tc>
-                  <a:txBody>
-                    <a:bodyPr/>
-                    <a:lstStyle/>
-                    <a:p>
-                      <a:pPr indent="0" marL="0">
-                        <a:buNone/>
-                      </a:pPr>
-                      <a:r>
-                        <a:rPr lang="en-US" sz="1500" dirty="0">
-                          <a:solidFill>
-                            <a:srgbClr val="777777"/>
-                          </a:solidFill>
-                          <a:latin typeface="Arial" pitchFamily="34" charset="0"/>
-                          <a:ea typeface="Arial" pitchFamily="34" charset="-122"/>
-                          <a:cs typeface="Arial" pitchFamily="34" charset="-120"/>
-                        </a:rPr>
-                        <a:t>TBD</a:t>
-                      </a:r>
-                      <a:endParaRPr lang="en-US" sz="1500" dirty="0">
-                        <a:latin typeface="Arial" charset="0"/>
-                        <a:ea typeface="Arial" charset="0"/>
-                        <a:cs typeface="Arial" charset="0"/>
-                      </a:endParaRPr>
-                    </a:p>
-                  </a:txBody>
-                  <a:tcPr marL="91440" marR="91440" marT="45720" marB="45720" anchor="ctr">
-                    <a:lnL w="6350" cap="flat" cmpd="sng" algn="ctr">
-                      <a:solidFill>
-                        <a:srgbClr val="CCCCCC"/>
-                      </a:solidFill>
-                      <a:prstDash val="solid"/>
-                      <a:round/>
-                      <a:headEnd type="none" w="med" len="med"/>
-                      <a:tailEnd type="none" w="med" len="med"/>
-                    </a:lnL>
-                    <a:lnR w="6350" cap="flat" cmpd="sng" algn="ctr">
-                      <a:solidFill>
-                        <a:srgbClr val="CCCCCC"/>
-                      </a:solidFill>
-                      <a:prstDash val="solid"/>
-                      <a:round/>
-                      <a:headEnd type="none" w="med" len="med"/>
-                      <a:tailEnd type="none" w="med" len="med"/>
-                    </a:lnR>
-                    <a:lnT w="6350" cap="flat" cmpd="sng" algn="ctr">
-                      <a:solidFill>
-                        <a:srgbClr val="CCCCCC"/>
-                      </a:solidFill>
-                      <a:prstDash val="solid"/>
-                      <a:round/>
-                      <a:headEnd type="none" w="med" len="med"/>
-                      <a:tailEnd type="none" w="med" len="med"/>
-                    </a:lnT>
-                    <a:lnB w="6350" cap="flat" cmpd="sng" algn="ctr">
-                      <a:solidFill>
-                        <a:srgbClr val="CCCCCC"/>
-                      </a:solidFill>
-                      <a:prstDash val="solid"/>
-                      <a:round/>
-                      <a:headEnd type="none" w="med" len="med"/>
-                      <a:tailEnd type="none" w="med" len="med"/>
-                    </a:lnB>
-                  </a:tcPr>
-                </a:tc>
-                <a:tc>
-                  <a:txBody>
-                    <a:bodyPr/>
-                    <a:lstStyle/>
-                    <a:p>
-                      <a:pPr indent="0" marL="0">
-                        <a:buNone/>
-                      </a:pPr>
-                      <a:r>
-                        <a:rPr lang="en-US" sz="1500" dirty="0">
-                          <a:solidFill>
-                            <a:srgbClr val="777777"/>
-                          </a:solidFill>
-                          <a:latin typeface="Arial" pitchFamily="34" charset="0"/>
-                          <a:ea typeface="Arial" pitchFamily="34" charset="-122"/>
-                          <a:cs typeface="Arial" pitchFamily="34" charset="-120"/>
-                        </a:rPr>
-                        <a:t>TBD</a:t>
-                      </a:r>
-                      <a:endParaRPr lang="en-US" sz="1500" dirty="0">
-                        <a:latin typeface="Arial" charset="0"/>
-                        <a:ea typeface="Arial" charset="0"/>
-                        <a:cs typeface="Arial" charset="0"/>
-                      </a:endParaRPr>
-                    </a:p>
-                  </a:txBody>
-                  <a:tcPr marL="91440" marR="91440" marT="45720" marB="45720" anchor="ctr">
-                    <a:lnL w="6350" cap="flat" cmpd="sng" algn="ctr">
-                      <a:solidFill>
-                        <a:srgbClr val="CCCCCC"/>
-                      </a:solidFill>
-                      <a:prstDash val="solid"/>
-                      <a:round/>
-                      <a:headEnd type="none" w="med" len="med"/>
-                      <a:tailEnd type="none" w="med" len="med"/>
-                    </a:lnL>
-                    <a:lnR w="6350" cap="flat" cmpd="sng" algn="ctr">
-                      <a:solidFill>
-                        <a:srgbClr val="CCCCCC"/>
-                      </a:solidFill>
-                      <a:prstDash val="solid"/>
-                      <a:round/>
-                      <a:headEnd type="none" w="med" len="med"/>
-                      <a:tailEnd type="none" w="med" len="med"/>
-                    </a:lnR>
-                    <a:lnT w="6350" cap="flat" cmpd="sng" algn="ctr">
-                      <a:solidFill>
-                        <a:srgbClr val="CCCCCC"/>
-                      </a:solidFill>
-                      <a:prstDash val="solid"/>
-                      <a:round/>
-                      <a:headEnd type="none" w="med" len="med"/>
-                      <a:tailEnd type="none" w="med" len="med"/>
-                    </a:lnT>
-                    <a:lnB w="6350" cap="flat" cmpd="sng" algn="ctr">
-                      <a:solidFill>
-                        <a:srgbClr val="CCCCCC"/>
-                      </a:solidFill>
-                      <a:prstDash val="solid"/>
-                      <a:round/>
-                      <a:headEnd type="none" w="med" len="med"/>
-                      <a:tailEnd type="none" w="med" len="med"/>
-                    </a:lnB>
-                  </a:tcPr>
-                </a:tc>
-              </a:tr>
-              <a:tr h="438912">
-                <a:tc>
-                  <a:txBody>
-                    <a:bodyPr/>
-                    <a:lstStyle/>
-                    <a:p>
-                      <a:pPr indent="0" marL="0">
-                        <a:buNone/>
-                      </a:pPr>
-                      <a:r>
-                        <a:rPr lang="en-US" sz="1500" dirty="0">
-                          <a:solidFill>
-                            <a:srgbClr val="777777"/>
-                          </a:solidFill>
-                          <a:latin typeface="Arial" pitchFamily="34" charset="0"/>
-                          <a:ea typeface="Arial" pitchFamily="34" charset="-122"/>
-                          <a:cs typeface="Arial" pitchFamily="34" charset="-120"/>
-                        </a:rPr>
-                        <a:t>DRAM throughput (% of peak)</a:t>
-                      </a:r>
-                      <a:endParaRPr lang="en-US" sz="1500" dirty="0">
-                        <a:latin typeface="Arial" charset="0"/>
-                        <a:ea typeface="Arial" charset="0"/>
-                        <a:cs typeface="Arial" charset="0"/>
-                      </a:endParaRPr>
-                    </a:p>
-                  </a:txBody>
-                  <a:tcPr marL="91440" marR="91440" marT="45720" marB="45720" anchor="ctr">
-                    <a:lnL w="6350" cap="flat" cmpd="sng" algn="ctr">
-                      <a:solidFill>
-                        <a:srgbClr val="CCCCCC"/>
-                      </a:solidFill>
-                      <a:prstDash val="solid"/>
-                      <a:round/>
-                      <a:headEnd type="none" w="med" len="med"/>
-                      <a:tailEnd type="none" w="med" len="med"/>
-                    </a:lnL>
-                    <a:lnR w="6350" cap="flat" cmpd="sng" algn="ctr">
-                      <a:solidFill>
-                        <a:srgbClr val="CCCCCC"/>
-                      </a:solidFill>
-                      <a:prstDash val="solid"/>
-                      <a:round/>
-                      <a:headEnd type="none" w="med" len="med"/>
-                      <a:tailEnd type="none" w="med" len="med"/>
-                    </a:lnR>
-                    <a:lnT w="6350" cap="flat" cmpd="sng" algn="ctr">
-                      <a:solidFill>
-                        <a:srgbClr val="CCCCCC"/>
-                      </a:solidFill>
-                      <a:prstDash val="solid"/>
-                      <a:round/>
-                      <a:headEnd type="none" w="med" len="med"/>
-                      <a:tailEnd type="none" w="med" len="med"/>
-                    </a:lnT>
-                    <a:lnB w="6350" cap="flat" cmpd="sng" algn="ctr">
-                      <a:solidFill>
-                        <a:srgbClr val="CCCCCC"/>
-                      </a:solidFill>
-                      <a:prstDash val="solid"/>
-                      <a:round/>
-                      <a:headEnd type="none" w="med" len="med"/>
-                      <a:tailEnd type="none" w="med" len="med"/>
-                    </a:lnB>
-                  </a:tcPr>
-                </a:tc>
-                <a:tc>
-                  <a:txBody>
-                    <a:bodyPr/>
-                    <a:lstStyle/>
-                    <a:p>
-                      <a:pPr indent="0" marL="0">
-                        <a:buNone/>
-                      </a:pPr>
-                      <a:r>
-                        <a:rPr lang="en-US" sz="1500" dirty="0">
-                          <a:solidFill>
-                            <a:srgbClr val="777777"/>
-                          </a:solidFill>
-                          <a:latin typeface="Arial" pitchFamily="34" charset="0"/>
-                          <a:ea typeface="Arial" pitchFamily="34" charset="-122"/>
-                          <a:cs typeface="Arial" pitchFamily="34" charset="-120"/>
-                        </a:rPr>
-                        <a:t>TBD</a:t>
-                      </a:r>
-                      <a:endParaRPr lang="en-US" sz="1500" dirty="0">
-                        <a:latin typeface="Arial" charset="0"/>
-                        <a:ea typeface="Arial" charset="0"/>
-                        <a:cs typeface="Arial" charset="0"/>
-                      </a:endParaRPr>
-                    </a:p>
-                  </a:txBody>
-                  <a:tcPr marL="91440" marR="91440" marT="45720" marB="45720" anchor="ctr">
-                    <a:lnL w="6350" cap="flat" cmpd="sng" algn="ctr">
-                      <a:solidFill>
-                        <a:srgbClr val="CCCCCC"/>
-                      </a:solidFill>
-                      <a:prstDash val="solid"/>
-                      <a:round/>
-                      <a:headEnd type="none" w="med" len="med"/>
-                      <a:tailEnd type="none" w="med" len="med"/>
-                    </a:lnL>
-                    <a:lnR w="6350" cap="flat" cmpd="sng" algn="ctr">
-                      <a:solidFill>
-                        <a:srgbClr val="CCCCCC"/>
-                      </a:solidFill>
-                      <a:prstDash val="solid"/>
-                      <a:round/>
-                      <a:headEnd type="none" w="med" len="med"/>
-                      <a:tailEnd type="none" w="med" len="med"/>
-                    </a:lnR>
-                    <a:lnT w="6350" cap="flat" cmpd="sng" algn="ctr">
-                      <a:solidFill>
-                        <a:srgbClr val="CCCCCC"/>
-                      </a:solidFill>
-                      <a:prstDash val="solid"/>
-                      <a:round/>
-                      <a:headEnd type="none" w="med" len="med"/>
-                      <a:tailEnd type="none" w="med" len="med"/>
-                    </a:lnT>
-                    <a:lnB w="6350" cap="flat" cmpd="sng" algn="ctr">
-                      <a:solidFill>
-                        <a:srgbClr val="CCCCCC"/>
-                      </a:solidFill>
-                      <a:prstDash val="solid"/>
-                      <a:round/>
-                      <a:headEnd type="none" w="med" len="med"/>
-                      <a:tailEnd type="none" w="med" len="med"/>
-                    </a:lnB>
-                  </a:tcPr>
-                </a:tc>
-                <a:tc>
-                  <a:txBody>
-                    <a:bodyPr/>
-                    <a:lstStyle/>
-                    <a:p>
-                      <a:pPr indent="0" marL="0">
-                        <a:buNone/>
-                      </a:pPr>
-                      <a:r>
-                        <a:rPr lang="en-US" sz="1500" dirty="0">
-                          <a:solidFill>
-                            <a:srgbClr val="777777"/>
-                          </a:solidFill>
-                          <a:latin typeface="Arial" pitchFamily="34" charset="0"/>
-                          <a:ea typeface="Arial" pitchFamily="34" charset="-122"/>
-                          <a:cs typeface="Arial" pitchFamily="34" charset="-120"/>
-                        </a:rPr>
-                        <a:t>TBD</a:t>
-                      </a:r>
-                      <a:endParaRPr lang="en-US" sz="1500" dirty="0">
-                        <a:latin typeface="Arial" charset="0"/>
-                        <a:ea typeface="Arial" charset="0"/>
-                        <a:cs typeface="Arial" charset="0"/>
-                      </a:endParaRPr>
-                    </a:p>
-                  </a:txBody>
-                  <a:tcPr marL="91440" marR="91440" marT="45720" marB="45720" anchor="ctr">
-                    <a:lnL w="6350" cap="flat" cmpd="sng" algn="ctr">
-                      <a:solidFill>
-                        <a:srgbClr val="CCCCCC"/>
-                      </a:solidFill>
-                      <a:prstDash val="solid"/>
-                      <a:round/>
-                      <a:headEnd type="none" w="med" len="med"/>
-                      <a:tailEnd type="none" w="med" len="med"/>
-                    </a:lnL>
-                    <a:lnR w="6350" cap="flat" cmpd="sng" algn="ctr">
-                      <a:solidFill>
-                        <a:srgbClr val="CCCCCC"/>
-                      </a:solidFill>
-                      <a:prstDash val="solid"/>
-                      <a:round/>
-                      <a:headEnd type="none" w="med" len="med"/>
-                      <a:tailEnd type="none" w="med" len="med"/>
-                    </a:lnR>
-                    <a:lnT w="6350" cap="flat" cmpd="sng" algn="ctr">
-                      <a:solidFill>
-                        <a:srgbClr val="CCCCCC"/>
-                      </a:solidFill>
-                      <a:prstDash val="solid"/>
-                      <a:round/>
-                      <a:headEnd type="none" w="med" len="med"/>
-                      <a:tailEnd type="none" w="med" len="med"/>
-                    </a:lnT>
-                    <a:lnB w="6350" cap="flat" cmpd="sng" algn="ctr">
-                      <a:solidFill>
-                        <a:srgbClr val="CCCCCC"/>
-                      </a:solidFill>
-                      <a:prstDash val="solid"/>
-                      <a:round/>
-                      <a:headEnd type="none" w="med" len="med"/>
-                      <a:tailEnd type="none" w="med" len="med"/>
-                    </a:lnB>
-                  </a:tcPr>
-                </a:tc>
-              </a:tr>
-              <a:tr h="438912">
-                <a:tc>
-                  <a:txBody>
-                    <a:bodyPr/>
-                    <a:lstStyle/>
-                    <a:p>
-                      <a:pPr indent="0" marL="0">
-                        <a:buNone/>
-                      </a:pPr>
-                      <a:r>
-                        <a:rPr lang="en-US" sz="1500" dirty="0">
-                          <a:solidFill>
-                            <a:srgbClr val="777777"/>
-                          </a:solidFill>
-                          <a:latin typeface="Arial" pitchFamily="34" charset="0"/>
-                          <a:ea typeface="Arial" pitchFamily="34" charset="-122"/>
-                          <a:cs typeface="Arial" pitchFamily="34" charset="-120"/>
-                        </a:rPr>
-                        <a:t>Achieved occupancy (sm__warps_active)</a:t>
-                      </a:r>
-                      <a:endParaRPr lang="en-US" sz="1500" dirty="0">
-                        <a:latin typeface="Arial" charset="0"/>
-                        <a:ea typeface="Arial" charset="0"/>
-                        <a:cs typeface="Arial" charset="0"/>
-                      </a:endParaRPr>
-                    </a:p>
-                  </a:txBody>
-                  <a:tcPr marL="91440" marR="91440" marT="45720" marB="45720" anchor="ctr">
-                    <a:lnL w="6350" cap="flat" cmpd="sng" algn="ctr">
-                      <a:solidFill>
-                        <a:srgbClr val="CCCCCC"/>
-                      </a:solidFill>
-                      <a:prstDash val="solid"/>
-                      <a:round/>
-                      <a:headEnd type="none" w="med" len="med"/>
-                      <a:tailEnd type="none" w="med" len="med"/>
-                    </a:lnL>
-                    <a:lnR w="6350" cap="flat" cmpd="sng" algn="ctr">
-                      <a:solidFill>
-                        <a:srgbClr val="CCCCCC"/>
-                      </a:solidFill>
-                      <a:prstDash val="solid"/>
-                      <a:round/>
-                      <a:headEnd type="none" w="med" len="med"/>
-                      <a:tailEnd type="none" w="med" len="med"/>
-                    </a:lnR>
-                    <a:lnT w="6350" cap="flat" cmpd="sng" algn="ctr">
-                      <a:solidFill>
-                        <a:srgbClr val="CCCCCC"/>
-                      </a:solidFill>
-                      <a:prstDash val="solid"/>
-                      <a:round/>
-                      <a:headEnd type="none" w="med" len="med"/>
-                      <a:tailEnd type="none" w="med" len="med"/>
-                    </a:lnT>
-                    <a:lnB w="6350" cap="flat" cmpd="sng" algn="ctr">
-                      <a:solidFill>
-                        <a:srgbClr val="CCCCCC"/>
-                      </a:solidFill>
-                      <a:prstDash val="solid"/>
-                      <a:round/>
-                      <a:headEnd type="none" w="med" len="med"/>
-                      <a:tailEnd type="none" w="med" len="med"/>
-                    </a:lnB>
-                  </a:tcPr>
-                </a:tc>
-                <a:tc>
-                  <a:txBody>
-                    <a:bodyPr/>
-                    <a:lstStyle/>
-                    <a:p>
-                      <a:pPr indent="0" marL="0">
-                        <a:buNone/>
-                      </a:pPr>
-                      <a:r>
-                        <a:rPr lang="en-US" sz="1500" dirty="0">
-                          <a:solidFill>
-                            <a:srgbClr val="777777"/>
-                          </a:solidFill>
-                          <a:latin typeface="Arial" pitchFamily="34" charset="0"/>
-                          <a:ea typeface="Arial" pitchFamily="34" charset="-122"/>
-                          <a:cs typeface="Arial" pitchFamily="34" charset="-120"/>
-                        </a:rPr>
-                        <a:t>TBD</a:t>
-                      </a:r>
-                      <a:endParaRPr lang="en-US" sz="1500" dirty="0">
-                        <a:latin typeface="Arial" charset="0"/>
-                        <a:ea typeface="Arial" charset="0"/>
-                        <a:cs typeface="Arial" charset="0"/>
-                      </a:endParaRPr>
-                    </a:p>
-                  </a:txBody>
-                  <a:tcPr marL="91440" marR="91440" marT="45720" marB="45720" anchor="ctr">
-                    <a:lnL w="6350" cap="flat" cmpd="sng" algn="ctr">
-                      <a:solidFill>
-                        <a:srgbClr val="CCCCCC"/>
-                      </a:solidFill>
-                      <a:prstDash val="solid"/>
-                      <a:round/>
-                      <a:headEnd type="none" w="med" len="med"/>
-                      <a:tailEnd type="none" w="med" len="med"/>
-                    </a:lnL>
-                    <a:lnR w="6350" cap="flat" cmpd="sng" algn="ctr">
-                      <a:solidFill>
-                        <a:srgbClr val="CCCCCC"/>
-                      </a:solidFill>
-                      <a:prstDash val="solid"/>
-                      <a:round/>
-                      <a:headEnd type="none" w="med" len="med"/>
-                      <a:tailEnd type="none" w="med" len="med"/>
-                    </a:lnR>
-                    <a:lnT w="6350" cap="flat" cmpd="sng" algn="ctr">
-                      <a:solidFill>
-                        <a:srgbClr val="CCCCCC"/>
-                      </a:solidFill>
-                      <a:prstDash val="solid"/>
-                      <a:round/>
-                      <a:headEnd type="none" w="med" len="med"/>
-                      <a:tailEnd type="none" w="med" len="med"/>
-                    </a:lnT>
-                    <a:lnB w="6350" cap="flat" cmpd="sng" algn="ctr">
-                      <a:solidFill>
-                        <a:srgbClr val="CCCCCC"/>
-                      </a:solidFill>
-                      <a:prstDash val="solid"/>
-                      <a:round/>
-                      <a:headEnd type="none" w="med" len="med"/>
-                      <a:tailEnd type="none" w="med" len="med"/>
-                    </a:lnB>
-                  </a:tcPr>
-                </a:tc>
-                <a:tc>
-                  <a:txBody>
-                    <a:bodyPr/>
-                    <a:lstStyle/>
-                    <a:p>
-                      <a:pPr indent="0" marL="0">
-                        <a:buNone/>
-                      </a:pPr>
-                      <a:r>
-                        <a:rPr lang="en-US" sz="1500" dirty="0">
-                          <a:solidFill>
-                            <a:srgbClr val="777777"/>
-                          </a:solidFill>
-                          <a:latin typeface="Arial" pitchFamily="34" charset="0"/>
-                          <a:ea typeface="Arial" pitchFamily="34" charset="-122"/>
-                          <a:cs typeface="Arial" pitchFamily="34" charset="-120"/>
-                        </a:rPr>
-                        <a:t>TBD</a:t>
-                      </a:r>
-                      <a:endParaRPr lang="en-US" sz="1500" dirty="0">
-                        <a:latin typeface="Arial" charset="0"/>
-                        <a:ea typeface="Arial" charset="0"/>
-                        <a:cs typeface="Arial" charset="0"/>
-                      </a:endParaRPr>
-                    </a:p>
-                  </a:txBody>
-                  <a:tcPr marL="91440" marR="91440" marT="45720" marB="45720" anchor="ctr">
-                    <a:lnL w="6350" cap="flat" cmpd="sng" algn="ctr">
-                      <a:solidFill>
-                        <a:srgbClr val="CCCCCC"/>
-                      </a:solidFill>
-                      <a:prstDash val="solid"/>
-                      <a:round/>
-                      <a:headEnd type="none" w="med" len="med"/>
-                      <a:tailEnd type="none" w="med" len="med"/>
-                    </a:lnL>
-                    <a:lnR w="6350" cap="flat" cmpd="sng" algn="ctr">
-                      <a:solidFill>
-                        <a:srgbClr val="CCCCCC"/>
-                      </a:solidFill>
-                      <a:prstDash val="solid"/>
-                      <a:round/>
-                      <a:headEnd type="none" w="med" len="med"/>
-                      <a:tailEnd type="none" w="med" len="med"/>
-                    </a:lnR>
-                    <a:lnT w="6350" cap="flat" cmpd="sng" algn="ctr">
-                      <a:solidFill>
-                        <a:srgbClr val="CCCCCC"/>
-                      </a:solidFill>
-                      <a:prstDash val="solid"/>
-                      <a:round/>
-                      <a:headEnd type="none" w="med" len="med"/>
-                      <a:tailEnd type="none" w="med" len="med"/>
-                    </a:lnT>
-                    <a:lnB w="6350" cap="flat" cmpd="sng" algn="ctr">
-                      <a:solidFill>
-                        <a:srgbClr val="CCCCCC"/>
-                      </a:solidFill>
-                      <a:prstDash val="solid"/>
-                      <a:round/>
-                      <a:headEnd type="none" w="med" len="med"/>
-                      <a:tailEnd type="none" w="med" len="med"/>
-                    </a:lnB>
-                  </a:tcPr>
-                </a:tc>
-              </a:tr>
-            </a:tbl>
-          </a:graphicData>
-        </a:graphic>
-      </p:graphicFrame>
-      <p:sp>
-        <p:nvSpPr>
-          <p:cNvPr id="7" name="Text 4"/>
-          <p:cNvSpPr/>
-          <p:nvPr/>
-        </p:nvSpPr>
-        <p:spPr>
-          <a:xfrm>
-            <a:off x="457200" y="4709160"/>
-            <a:ext cx="8229600" cy="292608"/>
-          </a:xfrm>
-          <a:prstGeom prst="rect">
-            <a:avLst/>
-          </a:prstGeom>
-          <a:noFill/>
-          <a:ln/>
-        </p:spPr>
-        <p:txBody>
-          <a:bodyPr wrap="square" rtlCol="0" anchor="ctr"/>
-          <a:lstStyle/>
-          <a:p>
+              <a:t>atomicAdd: </a:t>
+            </a:r>
             <a:pPr indent="0" marL="0">
+              <a:spcAft>
+                <a:spcPts val="1200"/>
+              </a:spcAft>
               <a:buNone/>
             </a:pPr>
             <a:r>
-              <a:rPr lang="en-US" sz="1300" dirty="0">
+              <a:rPr lang="en-US" sz="1900" dirty="0">
                 <a:solidFill>
-                  <a:srgbClr val="777777"/>
+                  <a:srgbClr val="2D2D2D"/>
                 </a:solidFill>
                 <a:latin typeface="Arial" pitchFamily="34" charset="0"/>
                 <a:ea typeface="Arial" pitchFamily="34" charset="-122"/>
                 <a:cs typeface="Arial" pitchFamily="34" charset="-120"/>
               </a:rPr>
-              <a:t>Run: newpaper/plans/collect_ncu_profile.sh on both machines, then fill this table.</a:t>
-            </a:r>
-            <a:endParaRPr lang="en-US" sz="1300" dirty="0"/>
+              <a:t>floating-point addition is non-associative; asynchronous warps race to accumulate in different orders, so results vary run to run — the opposite of what this paper needs.</a:t>
+            </a:r>
+            <a:endParaRPr lang="en-US" sz="1900" dirty="0"/>
+          </a:p>
+          <a:p>
+            <a:pPr indent="0" marL="0">
+              <a:spcAft>
+                <a:spcPts val="1200"/>
+              </a:spcAft>
+              <a:buNone/>
+            </a:pPr>
+            <a:r>
+              <a:rPr lang="en-US" sz="1900" b="1" dirty="0">
+                <a:solidFill>
+                  <a:srgbClr val="2D2D2D"/>
+                </a:solidFill>
+                <a:latin typeface="Arial" pitchFamily="34" charset="0"/>
+                <a:ea typeface="Arial" pitchFamily="34" charset="-122"/>
+                <a:cs typeface="Arial" pitchFamily="34" charset="-120"/>
+              </a:rPr>
+              <a:t>cuDNN: </a:t>
+            </a:r>
+            <a:pPr indent="0" marL="0">
+              <a:spcAft>
+                <a:spcPts val="1200"/>
+              </a:spcAft>
+              <a:buNone/>
+            </a:pPr>
+            <a:r>
+              <a:rPr lang="en-US" sz="1900" dirty="0">
+                <a:solidFill>
+                  <a:srgbClr val="2D2D2D"/>
+                </a:solidFill>
+                <a:latin typeface="Arial" pitchFamily="34" charset="0"/>
+                <a:ea typeface="Arial" pitchFamily="34" charset="-122"/>
+                <a:cs typeface="Arial" pitchFamily="34" charset="-120"/>
+              </a:rPr>
+              <a:t>optimizes for batched matmul; does not expose the isolated per-channel buffers our zero-race verification contract depends on.</a:t>
+            </a:r>
+            <a:endParaRPr lang="en-US" sz="1900" dirty="0"/>
+          </a:p>
+          <a:p>
+            <a:pPr indent="0" marL="0">
+              <a:spcAft>
+                <a:spcPts val="1200"/>
+              </a:spcAft>
+              <a:buNone/>
+            </a:pPr>
+            <a:r>
+              <a:rPr lang="en-US" sz="1900" b="1" dirty="0">
+                <a:solidFill>
+                  <a:srgbClr val="2D2D2D"/>
+                </a:solidFill>
+                <a:latin typeface="Arial" pitchFamily="34" charset="0"/>
+                <a:ea typeface="Arial" pitchFamily="34" charset="-122"/>
+                <a:cs typeface="Arial" pitchFamily="34" charset="-120"/>
+              </a:rPr>
+              <a:t>Future work: </a:t>
+            </a:r>
+            <a:pPr indent="0" marL="0">
+              <a:spcAft>
+                <a:spcPts val="1200"/>
+              </a:spcAft>
+              <a:buNone/>
+            </a:pPr>
+            <a:r>
+              <a:rPr lang="en-US" sz="1900" dirty="0">
+                <a:solidFill>
+                  <a:srgbClr val="2D2D2D"/>
+                </a:solidFill>
+                <a:latin typeface="Arial" pitchFamily="34" charset="0"/>
+                <a:ea typeface="Arial" pitchFamily="34" charset="-122"/>
+                <a:cs typeface="Arial" pitchFamily="34" charset="-120"/>
+              </a:rPr>
+              <a:t>a throughput-only (not correctness) comparison against both remains useful to price determinism against an unconstrained baseline.</a:t>
+            </a:r>
+            <a:endParaRPr lang="en-US" sz="1900" dirty="0"/>
           </a:p>
         </p:txBody>
       </p:sp>
@@ -8217,7 +8160,7 @@
                 <a:ea typeface="Arial" pitchFamily="34" charset="-122"/>
                 <a:cs typeface="Arial" pitchFamily="34" charset="-120"/>
               </a:rPr>
-              <a:t>Appendix C — In Progress</a:t>
+              <a:t>Appendix B — Measured</a:t>
             </a:r>
             <a:endParaRPr lang="en-US" sz="1400" dirty="0"/>
           </a:p>
@@ -8256,75 +8199,9 @@
                 <a:ea typeface="Arial" pitchFamily="34" charset="-122"/>
                 <a:cs typeface="Arial" pitchFamily="34" charset="-120"/>
               </a:rPr>
-              <a:t>What does bit-exact determinism cost against FP16/BF16?</a:t>
+              <a:t>Nsight Compute counters for deconv_kernel / spatial_reduction_kernel</a:t>
             </a:r>
             <a:endParaRPr lang="en-US" sz="2200" dirty="0"/>
-          </a:p>
-        </p:txBody>
-      </p:sp>
-      <p:sp>
-        <p:nvSpPr>
-          <p:cNvPr id="4" name="Shape 2"/>
-          <p:cNvSpPr/>
-          <p:nvPr/>
-        </p:nvSpPr>
-        <p:spPr>
-          <a:xfrm>
-            <a:off x="457200" y="1234440"/>
-            <a:ext cx="1463040" cy="292608"/>
-          </a:xfrm>
-          <a:prstGeom prst="roundRect">
-            <a:avLst>
-              <a:gd name="adj" fmla="val 15625"/>
-            </a:avLst>
-          </a:prstGeom>
-          <a:solidFill>
-            <a:srgbClr val="FDEDEC"/>
-          </a:solidFill>
-          <a:ln w="12700">
-            <a:solidFill>
-              <a:srgbClr val="C0392B"/>
-            </a:solidFill>
-            <a:prstDash val="solid"/>
-          </a:ln>
-        </p:spPr>
-      </p:sp>
-      <p:sp>
-        <p:nvSpPr>
-          <p:cNvPr id="5" name="Text 3"/>
-          <p:cNvSpPr/>
-          <p:nvPr/>
-        </p:nvSpPr>
-        <p:spPr>
-          <a:xfrm>
-            <a:off x="457200" y="1234440"/>
-            <a:ext cx="1463040" cy="292608"/>
-          </a:xfrm>
-          <a:prstGeom prst="rect">
-            <a:avLst/>
-          </a:prstGeom>
-          <a:noFill/>
-          <a:ln/>
-        </p:spPr>
-        <p:txBody>
-          <a:bodyPr wrap="square" rtlCol="0" anchor="ctr"/>
-          <a:lstStyle/>
-          <a:p>
-            <a:pPr algn="ctr" indent="0" marL="0">
-              <a:buNone/>
-            </a:pPr>
-            <a:r>
-              <a:rPr lang="en-US" sz="1200" b="1" dirty="0">
-                <a:solidFill>
-                  <a:srgbClr val="C0392B"/>
-                </a:solidFill>
-                <a:latin typeface="Arial" pitchFamily="34" charset="0"/>
-                <a:ea typeface="Arial" pitchFamily="34" charset="-122"/>
-                <a:cs typeface="Arial" pitchFamily="34" charset="-120"/>
-              </a:rPr>
-              <a:t>DATA PENDING</a:t>
-            </a:r>
-            <a:endParaRPr lang="en-US" sz="1200" dirty="0"/>
           </a:p>
         </p:txBody>
       </p:sp>
@@ -8343,8 +8220,1411 @@
           </p:nvPr>
         </p:nvGraphicFramePr>
         <p:xfrm>
-          <a:off x="457200" y="1737360"/>
-          <a:ext cx="8229600" cy="1828800"/>
+          <a:off x="457200" y="1371600"/>
+          <a:ext cx="8229600" cy="2011680"/>
+        </p:xfrm>
+        <a:graphic>
+          <a:graphicData uri="http://schemas.openxmlformats.org/drawingml/2006/table">
+            <a:tbl>
+              <a:tblPr/>
+              <a:tblGrid>
+                <a:gridCol w="2743200"/>
+                <a:gridCol w="2743200"/>
+                <a:gridCol w="2743200"/>
+              </a:tblGrid>
+              <a:tr h="335280">
+                <a:tc>
+                  <a:txBody>
+                    <a:bodyPr/>
+                    <a:lstStyle/>
+                    <a:p>
+                      <a:pPr indent="0" marL="0">
+                        <a:buNone/>
+                      </a:pPr>
+                      <a:r>
+                        <a:rPr lang="en-US" sz="1400" b="1" dirty="0">
+                          <a:solidFill>
+                            <a:srgbClr val="FFFFFF"/>
+                          </a:solidFill>
+                          <a:latin typeface="Arial" pitchFamily="34" charset="0"/>
+                          <a:ea typeface="Arial" pitchFamily="34" charset="-122"/>
+                          <a:cs typeface="Arial" pitchFamily="34" charset="-120"/>
+                        </a:rPr>
+                        <a:t>Kernel / Metric</a:t>
+                      </a:r>
+                      <a:endParaRPr lang="en-US" sz="1400" dirty="0">
+                        <a:latin typeface="Arial" charset="0"/>
+                        <a:ea typeface="Arial" charset="0"/>
+                        <a:cs typeface="Arial" charset="0"/>
+                      </a:endParaRPr>
+                    </a:p>
+                  </a:txBody>
+                  <a:tcPr marL="91440" marR="91440" marT="45720" marB="45720" anchor="ctr">
+                    <a:lnL w="6350" cap="flat" cmpd="sng" algn="ctr">
+                      <a:solidFill>
+                        <a:srgbClr val="CCCCCC"/>
+                      </a:solidFill>
+                      <a:prstDash val="solid"/>
+                      <a:round/>
+                      <a:headEnd type="none" w="med" len="med"/>
+                      <a:tailEnd type="none" w="med" len="med"/>
+                    </a:lnL>
+                    <a:lnR w="6350" cap="flat" cmpd="sng" algn="ctr">
+                      <a:solidFill>
+                        <a:srgbClr val="CCCCCC"/>
+                      </a:solidFill>
+                      <a:prstDash val="solid"/>
+                      <a:round/>
+                      <a:headEnd type="none" w="med" len="med"/>
+                      <a:tailEnd type="none" w="med" len="med"/>
+                    </a:lnR>
+                    <a:lnT w="6350" cap="flat" cmpd="sng" algn="ctr">
+                      <a:solidFill>
+                        <a:srgbClr val="CCCCCC"/>
+                      </a:solidFill>
+                      <a:prstDash val="solid"/>
+                      <a:round/>
+                      <a:headEnd type="none" w="med" len="med"/>
+                      <a:tailEnd type="none" w="med" len="med"/>
+                    </a:lnT>
+                    <a:lnB w="6350" cap="flat" cmpd="sng" algn="ctr">
+                      <a:solidFill>
+                        <a:srgbClr val="CCCCCC"/>
+                      </a:solidFill>
+                      <a:prstDash val="solid"/>
+                      <a:round/>
+                      <a:headEnd type="none" w="med" len="med"/>
+                      <a:tailEnd type="none" w="med" len="med"/>
+                    </a:lnB>
+                    <a:solidFill>
+                      <a:srgbClr val="1F4E79"/>
+                    </a:solidFill>
+                  </a:tcPr>
+                </a:tc>
+                <a:tc>
+                  <a:txBody>
+                    <a:bodyPr/>
+                    <a:lstStyle/>
+                    <a:p>
+                      <a:pPr indent="0" marL="0">
+                        <a:buNone/>
+                      </a:pPr>
+                      <a:r>
+                        <a:rPr lang="en-US" sz="1400" b="1" dirty="0">
+                          <a:solidFill>
+                            <a:srgbClr val="FFFFFF"/>
+                          </a:solidFill>
+                          <a:latin typeface="Arial" pitchFamily="34" charset="0"/>
+                          <a:ea typeface="Arial" pitchFamily="34" charset="-122"/>
+                          <a:cs typeface="Arial" pitchFamily="34" charset="-120"/>
+                        </a:rPr>
+                        <a:t>GB10</a:t>
+                      </a:r>
+                      <a:endParaRPr lang="en-US" sz="1400" dirty="0">
+                        <a:latin typeface="Arial" charset="0"/>
+                        <a:ea typeface="Arial" charset="0"/>
+                        <a:cs typeface="Arial" charset="0"/>
+                      </a:endParaRPr>
+                    </a:p>
+                  </a:txBody>
+                  <a:tcPr marL="91440" marR="91440" marT="45720" marB="45720" anchor="ctr">
+                    <a:lnL w="6350" cap="flat" cmpd="sng" algn="ctr">
+                      <a:solidFill>
+                        <a:srgbClr val="CCCCCC"/>
+                      </a:solidFill>
+                      <a:prstDash val="solid"/>
+                      <a:round/>
+                      <a:headEnd type="none" w="med" len="med"/>
+                      <a:tailEnd type="none" w="med" len="med"/>
+                    </a:lnL>
+                    <a:lnR w="6350" cap="flat" cmpd="sng" algn="ctr">
+                      <a:solidFill>
+                        <a:srgbClr val="CCCCCC"/>
+                      </a:solidFill>
+                      <a:prstDash val="solid"/>
+                      <a:round/>
+                      <a:headEnd type="none" w="med" len="med"/>
+                      <a:tailEnd type="none" w="med" len="med"/>
+                    </a:lnR>
+                    <a:lnT w="6350" cap="flat" cmpd="sng" algn="ctr">
+                      <a:solidFill>
+                        <a:srgbClr val="CCCCCC"/>
+                      </a:solidFill>
+                      <a:prstDash val="solid"/>
+                      <a:round/>
+                      <a:headEnd type="none" w="med" len="med"/>
+                      <a:tailEnd type="none" w="med" len="med"/>
+                    </a:lnT>
+                    <a:lnB w="6350" cap="flat" cmpd="sng" algn="ctr">
+                      <a:solidFill>
+                        <a:srgbClr val="CCCCCC"/>
+                      </a:solidFill>
+                      <a:prstDash val="solid"/>
+                      <a:round/>
+                      <a:headEnd type="none" w="med" len="med"/>
+                      <a:tailEnd type="none" w="med" len="med"/>
+                    </a:lnB>
+                    <a:solidFill>
+                      <a:srgbClr val="1F4E79"/>
+                    </a:solidFill>
+                  </a:tcPr>
+                </a:tc>
+                <a:tc>
+                  <a:txBody>
+                    <a:bodyPr/>
+                    <a:lstStyle/>
+                    <a:p>
+                      <a:pPr indent="0" marL="0">
+                        <a:buNone/>
+                      </a:pPr>
+                      <a:r>
+                        <a:rPr lang="en-US" sz="1400" b="1" dirty="0">
+                          <a:solidFill>
+                            <a:srgbClr val="FFFFFF"/>
+                          </a:solidFill>
+                          <a:latin typeface="Arial" pitchFamily="34" charset="0"/>
+                          <a:ea typeface="Arial" pitchFamily="34" charset="-122"/>
+                          <a:cs typeface="Arial" pitchFamily="34" charset="-120"/>
+                        </a:rPr>
+                        <a:t>RTX 4090</a:t>
+                      </a:r>
+                      <a:endParaRPr lang="en-US" sz="1400" dirty="0">
+                        <a:latin typeface="Arial" charset="0"/>
+                        <a:ea typeface="Arial" charset="0"/>
+                        <a:cs typeface="Arial" charset="0"/>
+                      </a:endParaRPr>
+                    </a:p>
+                  </a:txBody>
+                  <a:tcPr marL="91440" marR="91440" marT="45720" marB="45720" anchor="ctr">
+                    <a:lnL w="6350" cap="flat" cmpd="sng" algn="ctr">
+                      <a:solidFill>
+                        <a:srgbClr val="CCCCCC"/>
+                      </a:solidFill>
+                      <a:prstDash val="solid"/>
+                      <a:round/>
+                      <a:headEnd type="none" w="med" len="med"/>
+                      <a:tailEnd type="none" w="med" len="med"/>
+                    </a:lnL>
+                    <a:lnR w="6350" cap="flat" cmpd="sng" algn="ctr">
+                      <a:solidFill>
+                        <a:srgbClr val="CCCCCC"/>
+                      </a:solidFill>
+                      <a:prstDash val="solid"/>
+                      <a:round/>
+                      <a:headEnd type="none" w="med" len="med"/>
+                      <a:tailEnd type="none" w="med" len="med"/>
+                    </a:lnR>
+                    <a:lnT w="6350" cap="flat" cmpd="sng" algn="ctr">
+                      <a:solidFill>
+                        <a:srgbClr val="CCCCCC"/>
+                      </a:solidFill>
+                      <a:prstDash val="solid"/>
+                      <a:round/>
+                      <a:headEnd type="none" w="med" len="med"/>
+                      <a:tailEnd type="none" w="med" len="med"/>
+                    </a:lnT>
+                    <a:lnB w="6350" cap="flat" cmpd="sng" algn="ctr">
+                      <a:solidFill>
+                        <a:srgbClr val="CCCCCC"/>
+                      </a:solidFill>
+                      <a:prstDash val="solid"/>
+                      <a:round/>
+                      <a:headEnd type="none" w="med" len="med"/>
+                      <a:tailEnd type="none" w="med" len="med"/>
+                    </a:lnB>
+                    <a:solidFill>
+                      <a:srgbClr val="1F4E79"/>
+                    </a:solidFill>
+                  </a:tcPr>
+                </a:tc>
+              </a:tr>
+              <a:tr h="335280">
+                <a:tc>
+                  <a:txBody>
+                    <a:bodyPr/>
+                    <a:lstStyle/>
+                    <a:p>
+                      <a:pPr indent="0" marL="0">
+                        <a:buNone/>
+                      </a:pPr>
+                      <a:r>
+                        <a:rPr lang="en-US" sz="1400" dirty="0">
+                          <a:solidFill>
+                            <a:srgbClr val="2D2D2D"/>
+                          </a:solidFill>
+                          <a:latin typeface="Arial" pitchFamily="34" charset="0"/>
+                          <a:ea typeface="Arial" pitchFamily="34" charset="-122"/>
+                          <a:cs typeface="Arial" pitchFamily="34" charset="-120"/>
+                        </a:rPr>
+                        <a:t>deconv_kernel — L2 hit rate</a:t>
+                      </a:r>
+                      <a:endParaRPr lang="en-US" sz="1400" dirty="0">
+                        <a:latin typeface="Arial" charset="0"/>
+                        <a:ea typeface="Arial" charset="0"/>
+                        <a:cs typeface="Arial" charset="0"/>
+                      </a:endParaRPr>
+                    </a:p>
+                  </a:txBody>
+                  <a:tcPr marL="91440" marR="91440" marT="45720" marB="45720" anchor="ctr">
+                    <a:lnL w="6350" cap="flat" cmpd="sng" algn="ctr">
+                      <a:solidFill>
+                        <a:srgbClr val="CCCCCC"/>
+                      </a:solidFill>
+                      <a:prstDash val="solid"/>
+                      <a:round/>
+                      <a:headEnd type="none" w="med" len="med"/>
+                      <a:tailEnd type="none" w="med" len="med"/>
+                    </a:lnL>
+                    <a:lnR w="6350" cap="flat" cmpd="sng" algn="ctr">
+                      <a:solidFill>
+                        <a:srgbClr val="CCCCCC"/>
+                      </a:solidFill>
+                      <a:prstDash val="solid"/>
+                      <a:round/>
+                      <a:headEnd type="none" w="med" len="med"/>
+                      <a:tailEnd type="none" w="med" len="med"/>
+                    </a:lnR>
+                    <a:lnT w="6350" cap="flat" cmpd="sng" algn="ctr">
+                      <a:solidFill>
+                        <a:srgbClr val="CCCCCC"/>
+                      </a:solidFill>
+                      <a:prstDash val="solid"/>
+                      <a:round/>
+                      <a:headEnd type="none" w="med" len="med"/>
+                      <a:tailEnd type="none" w="med" len="med"/>
+                    </a:lnT>
+                    <a:lnB w="6350" cap="flat" cmpd="sng" algn="ctr">
+                      <a:solidFill>
+                        <a:srgbClr val="CCCCCC"/>
+                      </a:solidFill>
+                      <a:prstDash val="solid"/>
+                      <a:round/>
+                      <a:headEnd type="none" w="med" len="med"/>
+                      <a:tailEnd type="none" w="med" len="med"/>
+                    </a:lnB>
+                  </a:tcPr>
+                </a:tc>
+                <a:tc>
+                  <a:txBody>
+                    <a:bodyPr/>
+                    <a:lstStyle/>
+                    <a:p>
+                      <a:pPr indent="0" marL="0">
+                        <a:buNone/>
+                      </a:pPr>
+                      <a:r>
+                        <a:rPr lang="en-US" sz="1400" dirty="0">
+                          <a:solidFill>
+                            <a:srgbClr val="2D2D2D"/>
+                          </a:solidFill>
+                          <a:latin typeface="Arial" pitchFamily="34" charset="0"/>
+                          <a:ea typeface="Arial" pitchFamily="34" charset="-122"/>
+                          <a:cs typeface="Arial" pitchFamily="34" charset="-120"/>
+                        </a:rPr>
+                        <a:t>31.2%</a:t>
+                      </a:r>
+                      <a:endParaRPr lang="en-US" sz="1400" dirty="0">
+                        <a:latin typeface="Arial" charset="0"/>
+                        <a:ea typeface="Arial" charset="0"/>
+                        <a:cs typeface="Arial" charset="0"/>
+                      </a:endParaRPr>
+                    </a:p>
+                  </a:txBody>
+                  <a:tcPr marL="91440" marR="91440" marT="45720" marB="45720" anchor="ctr">
+                    <a:lnL w="6350" cap="flat" cmpd="sng" algn="ctr">
+                      <a:solidFill>
+                        <a:srgbClr val="CCCCCC"/>
+                      </a:solidFill>
+                      <a:prstDash val="solid"/>
+                      <a:round/>
+                      <a:headEnd type="none" w="med" len="med"/>
+                      <a:tailEnd type="none" w="med" len="med"/>
+                    </a:lnL>
+                    <a:lnR w="6350" cap="flat" cmpd="sng" algn="ctr">
+                      <a:solidFill>
+                        <a:srgbClr val="CCCCCC"/>
+                      </a:solidFill>
+                      <a:prstDash val="solid"/>
+                      <a:round/>
+                      <a:headEnd type="none" w="med" len="med"/>
+                      <a:tailEnd type="none" w="med" len="med"/>
+                    </a:lnR>
+                    <a:lnT w="6350" cap="flat" cmpd="sng" algn="ctr">
+                      <a:solidFill>
+                        <a:srgbClr val="CCCCCC"/>
+                      </a:solidFill>
+                      <a:prstDash val="solid"/>
+                      <a:round/>
+                      <a:headEnd type="none" w="med" len="med"/>
+                      <a:tailEnd type="none" w="med" len="med"/>
+                    </a:lnT>
+                    <a:lnB w="6350" cap="flat" cmpd="sng" algn="ctr">
+                      <a:solidFill>
+                        <a:srgbClr val="CCCCCC"/>
+                      </a:solidFill>
+                      <a:prstDash val="solid"/>
+                      <a:round/>
+                      <a:headEnd type="none" w="med" len="med"/>
+                      <a:tailEnd type="none" w="med" len="med"/>
+                    </a:lnB>
+                  </a:tcPr>
+                </a:tc>
+                <a:tc>
+                  <a:txBody>
+                    <a:bodyPr/>
+                    <a:lstStyle/>
+                    <a:p>
+                      <a:pPr indent="0" marL="0">
+                        <a:buNone/>
+                      </a:pPr>
+                      <a:r>
+                        <a:rPr lang="en-US" sz="1400" dirty="0">
+                          <a:solidFill>
+                            <a:srgbClr val="2D2D2D"/>
+                          </a:solidFill>
+                          <a:latin typeface="Arial" pitchFamily="34" charset="0"/>
+                          <a:ea typeface="Arial" pitchFamily="34" charset="-122"/>
+                          <a:cs typeface="Arial" pitchFamily="34" charset="-120"/>
+                        </a:rPr>
+                        <a:t>86.7%</a:t>
+                      </a:r>
+                      <a:endParaRPr lang="en-US" sz="1400" dirty="0">
+                        <a:latin typeface="Arial" charset="0"/>
+                        <a:ea typeface="Arial" charset="0"/>
+                        <a:cs typeface="Arial" charset="0"/>
+                      </a:endParaRPr>
+                    </a:p>
+                  </a:txBody>
+                  <a:tcPr marL="91440" marR="91440" marT="45720" marB="45720" anchor="ctr">
+                    <a:lnL w="6350" cap="flat" cmpd="sng" algn="ctr">
+                      <a:solidFill>
+                        <a:srgbClr val="CCCCCC"/>
+                      </a:solidFill>
+                      <a:prstDash val="solid"/>
+                      <a:round/>
+                      <a:headEnd type="none" w="med" len="med"/>
+                      <a:tailEnd type="none" w="med" len="med"/>
+                    </a:lnL>
+                    <a:lnR w="6350" cap="flat" cmpd="sng" algn="ctr">
+                      <a:solidFill>
+                        <a:srgbClr val="CCCCCC"/>
+                      </a:solidFill>
+                      <a:prstDash val="solid"/>
+                      <a:round/>
+                      <a:headEnd type="none" w="med" len="med"/>
+                      <a:tailEnd type="none" w="med" len="med"/>
+                    </a:lnR>
+                    <a:lnT w="6350" cap="flat" cmpd="sng" algn="ctr">
+                      <a:solidFill>
+                        <a:srgbClr val="CCCCCC"/>
+                      </a:solidFill>
+                      <a:prstDash val="solid"/>
+                      <a:round/>
+                      <a:headEnd type="none" w="med" len="med"/>
+                      <a:tailEnd type="none" w="med" len="med"/>
+                    </a:lnT>
+                    <a:lnB w="6350" cap="flat" cmpd="sng" algn="ctr">
+                      <a:solidFill>
+                        <a:srgbClr val="CCCCCC"/>
+                      </a:solidFill>
+                      <a:prstDash val="solid"/>
+                      <a:round/>
+                      <a:headEnd type="none" w="med" len="med"/>
+                      <a:tailEnd type="none" w="med" len="med"/>
+                    </a:lnB>
+                  </a:tcPr>
+                </a:tc>
+              </a:tr>
+              <a:tr h="335280">
+                <a:tc>
+                  <a:txBody>
+                    <a:bodyPr/>
+                    <a:lstStyle/>
+                    <a:p>
+                      <a:pPr indent="0" marL="0">
+                        <a:buNone/>
+                      </a:pPr>
+                      <a:r>
+                        <a:rPr lang="en-US" sz="1400" dirty="0">
+                          <a:solidFill>
+                            <a:srgbClr val="2D2D2D"/>
+                          </a:solidFill>
+                          <a:latin typeface="Arial" pitchFamily="34" charset="0"/>
+                          <a:ea typeface="Arial" pitchFamily="34" charset="-122"/>
+                          <a:cs typeface="Arial" pitchFamily="34" charset="-120"/>
+                        </a:rPr>
+                        <a:t>deconv_kernel — occupancy</a:t>
+                      </a:r>
+                      <a:endParaRPr lang="en-US" sz="1400" dirty="0">
+                        <a:latin typeface="Arial" charset="0"/>
+                        <a:ea typeface="Arial" charset="0"/>
+                        <a:cs typeface="Arial" charset="0"/>
+                      </a:endParaRPr>
+                    </a:p>
+                  </a:txBody>
+                  <a:tcPr marL="91440" marR="91440" marT="45720" marB="45720" anchor="ctr">
+                    <a:lnL w="6350" cap="flat" cmpd="sng" algn="ctr">
+                      <a:solidFill>
+                        <a:srgbClr val="CCCCCC"/>
+                      </a:solidFill>
+                      <a:prstDash val="solid"/>
+                      <a:round/>
+                      <a:headEnd type="none" w="med" len="med"/>
+                      <a:tailEnd type="none" w="med" len="med"/>
+                    </a:lnL>
+                    <a:lnR w="6350" cap="flat" cmpd="sng" algn="ctr">
+                      <a:solidFill>
+                        <a:srgbClr val="CCCCCC"/>
+                      </a:solidFill>
+                      <a:prstDash val="solid"/>
+                      <a:round/>
+                      <a:headEnd type="none" w="med" len="med"/>
+                      <a:tailEnd type="none" w="med" len="med"/>
+                    </a:lnR>
+                    <a:lnT w="6350" cap="flat" cmpd="sng" algn="ctr">
+                      <a:solidFill>
+                        <a:srgbClr val="CCCCCC"/>
+                      </a:solidFill>
+                      <a:prstDash val="solid"/>
+                      <a:round/>
+                      <a:headEnd type="none" w="med" len="med"/>
+                      <a:tailEnd type="none" w="med" len="med"/>
+                    </a:lnT>
+                    <a:lnB w="6350" cap="flat" cmpd="sng" algn="ctr">
+                      <a:solidFill>
+                        <a:srgbClr val="CCCCCC"/>
+                      </a:solidFill>
+                      <a:prstDash val="solid"/>
+                      <a:round/>
+                      <a:headEnd type="none" w="med" len="med"/>
+                      <a:tailEnd type="none" w="med" len="med"/>
+                    </a:lnB>
+                  </a:tcPr>
+                </a:tc>
+                <a:tc>
+                  <a:txBody>
+                    <a:bodyPr/>
+                    <a:lstStyle/>
+                    <a:p>
+                      <a:pPr indent="0" marL="0">
+                        <a:buNone/>
+                      </a:pPr>
+                      <a:r>
+                        <a:rPr lang="en-US" sz="1400" dirty="0">
+                          <a:solidFill>
+                            <a:srgbClr val="2D2D2D"/>
+                          </a:solidFill>
+                          <a:latin typeface="Arial" pitchFamily="34" charset="0"/>
+                          <a:ea typeface="Arial" pitchFamily="34" charset="-122"/>
+                          <a:cs typeface="Arial" pitchFamily="34" charset="-120"/>
+                        </a:rPr>
+                        <a:t>74.7%</a:t>
+                      </a:r>
+                      <a:endParaRPr lang="en-US" sz="1400" dirty="0">
+                        <a:latin typeface="Arial" charset="0"/>
+                        <a:ea typeface="Arial" charset="0"/>
+                        <a:cs typeface="Arial" charset="0"/>
+                      </a:endParaRPr>
+                    </a:p>
+                  </a:txBody>
+                  <a:tcPr marL="91440" marR="91440" marT="45720" marB="45720" anchor="ctr">
+                    <a:lnL w="6350" cap="flat" cmpd="sng" algn="ctr">
+                      <a:solidFill>
+                        <a:srgbClr val="CCCCCC"/>
+                      </a:solidFill>
+                      <a:prstDash val="solid"/>
+                      <a:round/>
+                      <a:headEnd type="none" w="med" len="med"/>
+                      <a:tailEnd type="none" w="med" len="med"/>
+                    </a:lnL>
+                    <a:lnR w="6350" cap="flat" cmpd="sng" algn="ctr">
+                      <a:solidFill>
+                        <a:srgbClr val="CCCCCC"/>
+                      </a:solidFill>
+                      <a:prstDash val="solid"/>
+                      <a:round/>
+                      <a:headEnd type="none" w="med" len="med"/>
+                      <a:tailEnd type="none" w="med" len="med"/>
+                    </a:lnR>
+                    <a:lnT w="6350" cap="flat" cmpd="sng" algn="ctr">
+                      <a:solidFill>
+                        <a:srgbClr val="CCCCCC"/>
+                      </a:solidFill>
+                      <a:prstDash val="solid"/>
+                      <a:round/>
+                      <a:headEnd type="none" w="med" len="med"/>
+                      <a:tailEnd type="none" w="med" len="med"/>
+                    </a:lnT>
+                    <a:lnB w="6350" cap="flat" cmpd="sng" algn="ctr">
+                      <a:solidFill>
+                        <a:srgbClr val="CCCCCC"/>
+                      </a:solidFill>
+                      <a:prstDash val="solid"/>
+                      <a:round/>
+                      <a:headEnd type="none" w="med" len="med"/>
+                      <a:tailEnd type="none" w="med" len="med"/>
+                    </a:lnB>
+                  </a:tcPr>
+                </a:tc>
+                <a:tc>
+                  <a:txBody>
+                    <a:bodyPr/>
+                    <a:lstStyle/>
+                    <a:p>
+                      <a:pPr indent="0" marL="0">
+                        <a:buNone/>
+                      </a:pPr>
+                      <a:r>
+                        <a:rPr lang="en-US" sz="1400" dirty="0">
+                          <a:solidFill>
+                            <a:srgbClr val="2D2D2D"/>
+                          </a:solidFill>
+                          <a:latin typeface="Arial" pitchFamily="34" charset="0"/>
+                          <a:ea typeface="Arial" pitchFamily="34" charset="-122"/>
+                          <a:cs typeface="Arial" pitchFamily="34" charset="-120"/>
+                        </a:rPr>
+                        <a:t>44.5%</a:t>
+                      </a:r>
+                      <a:endParaRPr lang="en-US" sz="1400" dirty="0">
+                        <a:latin typeface="Arial" charset="0"/>
+                        <a:ea typeface="Arial" charset="0"/>
+                        <a:cs typeface="Arial" charset="0"/>
+                      </a:endParaRPr>
+                    </a:p>
+                  </a:txBody>
+                  <a:tcPr marL="91440" marR="91440" marT="45720" marB="45720" anchor="ctr">
+                    <a:lnL w="6350" cap="flat" cmpd="sng" algn="ctr">
+                      <a:solidFill>
+                        <a:srgbClr val="CCCCCC"/>
+                      </a:solidFill>
+                      <a:prstDash val="solid"/>
+                      <a:round/>
+                      <a:headEnd type="none" w="med" len="med"/>
+                      <a:tailEnd type="none" w="med" len="med"/>
+                    </a:lnL>
+                    <a:lnR w="6350" cap="flat" cmpd="sng" algn="ctr">
+                      <a:solidFill>
+                        <a:srgbClr val="CCCCCC"/>
+                      </a:solidFill>
+                      <a:prstDash val="solid"/>
+                      <a:round/>
+                      <a:headEnd type="none" w="med" len="med"/>
+                      <a:tailEnd type="none" w="med" len="med"/>
+                    </a:lnR>
+                    <a:lnT w="6350" cap="flat" cmpd="sng" algn="ctr">
+                      <a:solidFill>
+                        <a:srgbClr val="CCCCCC"/>
+                      </a:solidFill>
+                      <a:prstDash val="solid"/>
+                      <a:round/>
+                      <a:headEnd type="none" w="med" len="med"/>
+                      <a:tailEnd type="none" w="med" len="med"/>
+                    </a:lnT>
+                    <a:lnB w="6350" cap="flat" cmpd="sng" algn="ctr">
+                      <a:solidFill>
+                        <a:srgbClr val="CCCCCC"/>
+                      </a:solidFill>
+                      <a:prstDash val="solid"/>
+                      <a:round/>
+                      <a:headEnd type="none" w="med" len="med"/>
+                      <a:tailEnd type="none" w="med" len="med"/>
+                    </a:lnB>
+                  </a:tcPr>
+                </a:tc>
+              </a:tr>
+              <a:tr h="335280">
+                <a:tc>
+                  <a:txBody>
+                    <a:bodyPr/>
+                    <a:lstStyle/>
+                    <a:p>
+                      <a:pPr indent="0" marL="0">
+                        <a:buNone/>
+                      </a:pPr>
+                      <a:r>
+                        <a:rPr lang="en-US" sz="1400" dirty="0">
+                          <a:solidFill>
+                            <a:srgbClr val="2D2D2D"/>
+                          </a:solidFill>
+                          <a:latin typeface="Arial" pitchFamily="34" charset="0"/>
+                          <a:ea typeface="Arial" pitchFamily="34" charset="-122"/>
+                          <a:cs typeface="Arial" pitchFamily="34" charset="-120"/>
+                        </a:rPr>
+                        <a:t>spatial_reduction — L2 hit rate</a:t>
+                      </a:r>
+                      <a:endParaRPr lang="en-US" sz="1400" dirty="0">
+                        <a:latin typeface="Arial" charset="0"/>
+                        <a:ea typeface="Arial" charset="0"/>
+                        <a:cs typeface="Arial" charset="0"/>
+                      </a:endParaRPr>
+                    </a:p>
+                  </a:txBody>
+                  <a:tcPr marL="91440" marR="91440" marT="45720" marB="45720" anchor="ctr">
+                    <a:lnL w="6350" cap="flat" cmpd="sng" algn="ctr">
+                      <a:solidFill>
+                        <a:srgbClr val="CCCCCC"/>
+                      </a:solidFill>
+                      <a:prstDash val="solid"/>
+                      <a:round/>
+                      <a:headEnd type="none" w="med" len="med"/>
+                      <a:tailEnd type="none" w="med" len="med"/>
+                    </a:lnL>
+                    <a:lnR w="6350" cap="flat" cmpd="sng" algn="ctr">
+                      <a:solidFill>
+                        <a:srgbClr val="CCCCCC"/>
+                      </a:solidFill>
+                      <a:prstDash val="solid"/>
+                      <a:round/>
+                      <a:headEnd type="none" w="med" len="med"/>
+                      <a:tailEnd type="none" w="med" len="med"/>
+                    </a:lnR>
+                    <a:lnT w="6350" cap="flat" cmpd="sng" algn="ctr">
+                      <a:solidFill>
+                        <a:srgbClr val="CCCCCC"/>
+                      </a:solidFill>
+                      <a:prstDash val="solid"/>
+                      <a:round/>
+                      <a:headEnd type="none" w="med" len="med"/>
+                      <a:tailEnd type="none" w="med" len="med"/>
+                    </a:lnT>
+                    <a:lnB w="6350" cap="flat" cmpd="sng" algn="ctr">
+                      <a:solidFill>
+                        <a:srgbClr val="CCCCCC"/>
+                      </a:solidFill>
+                      <a:prstDash val="solid"/>
+                      <a:round/>
+                      <a:headEnd type="none" w="med" len="med"/>
+                      <a:tailEnd type="none" w="med" len="med"/>
+                    </a:lnB>
+                  </a:tcPr>
+                </a:tc>
+                <a:tc>
+                  <a:txBody>
+                    <a:bodyPr/>
+                    <a:lstStyle/>
+                    <a:p>
+                      <a:pPr indent="0" marL="0">
+                        <a:buNone/>
+                      </a:pPr>
+                      <a:r>
+                        <a:rPr lang="en-US" sz="1400" dirty="0">
+                          <a:solidFill>
+                            <a:srgbClr val="2D2D2D"/>
+                          </a:solidFill>
+                          <a:latin typeface="Arial" pitchFamily="34" charset="0"/>
+                          <a:ea typeface="Arial" pitchFamily="34" charset="-122"/>
+                          <a:cs typeface="Arial" pitchFamily="34" charset="-120"/>
+                        </a:rPr>
+                        <a:t>0.07%</a:t>
+                      </a:r>
+                      <a:endParaRPr lang="en-US" sz="1400" dirty="0">
+                        <a:latin typeface="Arial" charset="0"/>
+                        <a:ea typeface="Arial" charset="0"/>
+                        <a:cs typeface="Arial" charset="0"/>
+                      </a:endParaRPr>
+                    </a:p>
+                  </a:txBody>
+                  <a:tcPr marL="91440" marR="91440" marT="45720" marB="45720" anchor="ctr">
+                    <a:lnL w="6350" cap="flat" cmpd="sng" algn="ctr">
+                      <a:solidFill>
+                        <a:srgbClr val="CCCCCC"/>
+                      </a:solidFill>
+                      <a:prstDash val="solid"/>
+                      <a:round/>
+                      <a:headEnd type="none" w="med" len="med"/>
+                      <a:tailEnd type="none" w="med" len="med"/>
+                    </a:lnL>
+                    <a:lnR w="6350" cap="flat" cmpd="sng" algn="ctr">
+                      <a:solidFill>
+                        <a:srgbClr val="CCCCCC"/>
+                      </a:solidFill>
+                      <a:prstDash val="solid"/>
+                      <a:round/>
+                      <a:headEnd type="none" w="med" len="med"/>
+                      <a:tailEnd type="none" w="med" len="med"/>
+                    </a:lnR>
+                    <a:lnT w="6350" cap="flat" cmpd="sng" algn="ctr">
+                      <a:solidFill>
+                        <a:srgbClr val="CCCCCC"/>
+                      </a:solidFill>
+                      <a:prstDash val="solid"/>
+                      <a:round/>
+                      <a:headEnd type="none" w="med" len="med"/>
+                      <a:tailEnd type="none" w="med" len="med"/>
+                    </a:lnT>
+                    <a:lnB w="6350" cap="flat" cmpd="sng" algn="ctr">
+                      <a:solidFill>
+                        <a:srgbClr val="CCCCCC"/>
+                      </a:solidFill>
+                      <a:prstDash val="solid"/>
+                      <a:round/>
+                      <a:headEnd type="none" w="med" len="med"/>
+                      <a:tailEnd type="none" w="med" len="med"/>
+                    </a:lnB>
+                  </a:tcPr>
+                </a:tc>
+                <a:tc>
+                  <a:txBody>
+                    <a:bodyPr/>
+                    <a:lstStyle/>
+                    <a:p>
+                      <a:pPr indent="0" marL="0">
+                        <a:buNone/>
+                      </a:pPr>
+                      <a:r>
+                        <a:rPr lang="en-US" sz="1400" dirty="0">
+                          <a:solidFill>
+                            <a:srgbClr val="2D2D2D"/>
+                          </a:solidFill>
+                          <a:latin typeface="Arial" pitchFamily="34" charset="0"/>
+                          <a:ea typeface="Arial" pitchFamily="34" charset="-122"/>
+                          <a:cs typeface="Arial" pitchFamily="34" charset="-120"/>
+                        </a:rPr>
+                        <a:t>2.1%</a:t>
+                      </a:r>
+                      <a:endParaRPr lang="en-US" sz="1400" dirty="0">
+                        <a:latin typeface="Arial" charset="0"/>
+                        <a:ea typeface="Arial" charset="0"/>
+                        <a:cs typeface="Arial" charset="0"/>
+                      </a:endParaRPr>
+                    </a:p>
+                  </a:txBody>
+                  <a:tcPr marL="91440" marR="91440" marT="45720" marB="45720" anchor="ctr">
+                    <a:lnL w="6350" cap="flat" cmpd="sng" algn="ctr">
+                      <a:solidFill>
+                        <a:srgbClr val="CCCCCC"/>
+                      </a:solidFill>
+                      <a:prstDash val="solid"/>
+                      <a:round/>
+                      <a:headEnd type="none" w="med" len="med"/>
+                      <a:tailEnd type="none" w="med" len="med"/>
+                    </a:lnL>
+                    <a:lnR w="6350" cap="flat" cmpd="sng" algn="ctr">
+                      <a:solidFill>
+                        <a:srgbClr val="CCCCCC"/>
+                      </a:solidFill>
+                      <a:prstDash val="solid"/>
+                      <a:round/>
+                      <a:headEnd type="none" w="med" len="med"/>
+                      <a:tailEnd type="none" w="med" len="med"/>
+                    </a:lnR>
+                    <a:lnT w="6350" cap="flat" cmpd="sng" algn="ctr">
+                      <a:solidFill>
+                        <a:srgbClr val="CCCCCC"/>
+                      </a:solidFill>
+                      <a:prstDash val="solid"/>
+                      <a:round/>
+                      <a:headEnd type="none" w="med" len="med"/>
+                      <a:tailEnd type="none" w="med" len="med"/>
+                    </a:lnT>
+                    <a:lnB w="6350" cap="flat" cmpd="sng" algn="ctr">
+                      <a:solidFill>
+                        <a:srgbClr val="CCCCCC"/>
+                      </a:solidFill>
+                      <a:prstDash val="solid"/>
+                      <a:round/>
+                      <a:headEnd type="none" w="med" len="med"/>
+                      <a:tailEnd type="none" w="med" len="med"/>
+                    </a:lnB>
+                  </a:tcPr>
+                </a:tc>
+              </a:tr>
+              <a:tr h="335280">
+                <a:tc>
+                  <a:txBody>
+                    <a:bodyPr/>
+                    <a:lstStyle/>
+                    <a:p>
+                      <a:pPr indent="0" marL="0">
+                        <a:buNone/>
+                      </a:pPr>
+                      <a:r>
+                        <a:rPr lang="en-US" sz="1400" dirty="0">
+                          <a:solidFill>
+                            <a:srgbClr val="2D2D2D"/>
+                          </a:solidFill>
+                          <a:latin typeface="Arial" pitchFamily="34" charset="0"/>
+                          <a:ea typeface="Arial" pitchFamily="34" charset="-122"/>
+                          <a:cs typeface="Arial" pitchFamily="34" charset="-120"/>
+                        </a:rPr>
+                        <a:t>spatial_reduction — mem. throughput*</a:t>
+                      </a:r>
+                      <a:endParaRPr lang="en-US" sz="1400" dirty="0">
+                        <a:latin typeface="Arial" charset="0"/>
+                        <a:ea typeface="Arial" charset="0"/>
+                        <a:cs typeface="Arial" charset="0"/>
+                      </a:endParaRPr>
+                    </a:p>
+                  </a:txBody>
+                  <a:tcPr marL="91440" marR="91440" marT="45720" marB="45720" anchor="ctr">
+                    <a:lnL w="6350" cap="flat" cmpd="sng" algn="ctr">
+                      <a:solidFill>
+                        <a:srgbClr val="CCCCCC"/>
+                      </a:solidFill>
+                      <a:prstDash val="solid"/>
+                      <a:round/>
+                      <a:headEnd type="none" w="med" len="med"/>
+                      <a:tailEnd type="none" w="med" len="med"/>
+                    </a:lnL>
+                    <a:lnR w="6350" cap="flat" cmpd="sng" algn="ctr">
+                      <a:solidFill>
+                        <a:srgbClr val="CCCCCC"/>
+                      </a:solidFill>
+                      <a:prstDash val="solid"/>
+                      <a:round/>
+                      <a:headEnd type="none" w="med" len="med"/>
+                      <a:tailEnd type="none" w="med" len="med"/>
+                    </a:lnR>
+                    <a:lnT w="6350" cap="flat" cmpd="sng" algn="ctr">
+                      <a:solidFill>
+                        <a:srgbClr val="CCCCCC"/>
+                      </a:solidFill>
+                      <a:prstDash val="solid"/>
+                      <a:round/>
+                      <a:headEnd type="none" w="med" len="med"/>
+                      <a:tailEnd type="none" w="med" len="med"/>
+                    </a:lnT>
+                    <a:lnB w="6350" cap="flat" cmpd="sng" algn="ctr">
+                      <a:solidFill>
+                        <a:srgbClr val="CCCCCC"/>
+                      </a:solidFill>
+                      <a:prstDash val="solid"/>
+                      <a:round/>
+                      <a:headEnd type="none" w="med" len="med"/>
+                      <a:tailEnd type="none" w="med" len="med"/>
+                    </a:lnB>
+                  </a:tcPr>
+                </a:tc>
+                <a:tc>
+                  <a:txBody>
+                    <a:bodyPr/>
+                    <a:lstStyle/>
+                    <a:p>
+                      <a:pPr indent="0" marL="0">
+                        <a:buNone/>
+                      </a:pPr>
+                      <a:r>
+                        <a:rPr lang="en-US" sz="1400" dirty="0">
+                          <a:solidFill>
+                            <a:srgbClr val="2D2D2D"/>
+                          </a:solidFill>
+                          <a:latin typeface="Arial" pitchFamily="34" charset="0"/>
+                          <a:ea typeface="Arial" pitchFamily="34" charset="-122"/>
+                          <a:cs typeface="Arial" pitchFamily="34" charset="-120"/>
+                        </a:rPr>
+                        <a:t>11.4%</a:t>
+                      </a:r>
+                      <a:endParaRPr lang="en-US" sz="1400" dirty="0">
+                        <a:latin typeface="Arial" charset="0"/>
+                        <a:ea typeface="Arial" charset="0"/>
+                        <a:cs typeface="Arial" charset="0"/>
+                      </a:endParaRPr>
+                    </a:p>
+                  </a:txBody>
+                  <a:tcPr marL="91440" marR="91440" marT="45720" marB="45720" anchor="ctr">
+                    <a:lnL w="6350" cap="flat" cmpd="sng" algn="ctr">
+                      <a:solidFill>
+                        <a:srgbClr val="CCCCCC"/>
+                      </a:solidFill>
+                      <a:prstDash val="solid"/>
+                      <a:round/>
+                      <a:headEnd type="none" w="med" len="med"/>
+                      <a:tailEnd type="none" w="med" len="med"/>
+                    </a:lnL>
+                    <a:lnR w="6350" cap="flat" cmpd="sng" algn="ctr">
+                      <a:solidFill>
+                        <a:srgbClr val="CCCCCC"/>
+                      </a:solidFill>
+                      <a:prstDash val="solid"/>
+                      <a:round/>
+                      <a:headEnd type="none" w="med" len="med"/>
+                      <a:tailEnd type="none" w="med" len="med"/>
+                    </a:lnR>
+                    <a:lnT w="6350" cap="flat" cmpd="sng" algn="ctr">
+                      <a:solidFill>
+                        <a:srgbClr val="CCCCCC"/>
+                      </a:solidFill>
+                      <a:prstDash val="solid"/>
+                      <a:round/>
+                      <a:headEnd type="none" w="med" len="med"/>
+                      <a:tailEnd type="none" w="med" len="med"/>
+                    </a:lnT>
+                    <a:lnB w="6350" cap="flat" cmpd="sng" algn="ctr">
+                      <a:solidFill>
+                        <a:srgbClr val="CCCCCC"/>
+                      </a:solidFill>
+                      <a:prstDash val="solid"/>
+                      <a:round/>
+                      <a:headEnd type="none" w="med" len="med"/>
+                      <a:tailEnd type="none" w="med" len="med"/>
+                    </a:lnB>
+                  </a:tcPr>
+                </a:tc>
+                <a:tc>
+                  <a:txBody>
+                    <a:bodyPr/>
+                    <a:lstStyle/>
+                    <a:p>
+                      <a:pPr indent="0" marL="0">
+                        <a:buNone/>
+                      </a:pPr>
+                      <a:r>
+                        <a:rPr lang="en-US" sz="1400" dirty="0">
+                          <a:solidFill>
+                            <a:srgbClr val="2D2D2D"/>
+                          </a:solidFill>
+                          <a:latin typeface="Arial" pitchFamily="34" charset="0"/>
+                          <a:ea typeface="Arial" pitchFamily="34" charset="-122"/>
+                          <a:cs typeface="Arial" pitchFamily="34" charset="-120"/>
+                        </a:rPr>
+                        <a:t>90.5% (DRAM)</a:t>
+                      </a:r>
+                      <a:endParaRPr lang="en-US" sz="1400" dirty="0">
+                        <a:latin typeface="Arial" charset="0"/>
+                        <a:ea typeface="Arial" charset="0"/>
+                        <a:cs typeface="Arial" charset="0"/>
+                      </a:endParaRPr>
+                    </a:p>
+                  </a:txBody>
+                  <a:tcPr marL="91440" marR="91440" marT="45720" marB="45720" anchor="ctr">
+                    <a:lnL w="6350" cap="flat" cmpd="sng" algn="ctr">
+                      <a:solidFill>
+                        <a:srgbClr val="CCCCCC"/>
+                      </a:solidFill>
+                      <a:prstDash val="solid"/>
+                      <a:round/>
+                      <a:headEnd type="none" w="med" len="med"/>
+                      <a:tailEnd type="none" w="med" len="med"/>
+                    </a:lnL>
+                    <a:lnR w="6350" cap="flat" cmpd="sng" algn="ctr">
+                      <a:solidFill>
+                        <a:srgbClr val="CCCCCC"/>
+                      </a:solidFill>
+                      <a:prstDash val="solid"/>
+                      <a:round/>
+                      <a:headEnd type="none" w="med" len="med"/>
+                      <a:tailEnd type="none" w="med" len="med"/>
+                    </a:lnR>
+                    <a:lnT w="6350" cap="flat" cmpd="sng" algn="ctr">
+                      <a:solidFill>
+                        <a:srgbClr val="CCCCCC"/>
+                      </a:solidFill>
+                      <a:prstDash val="solid"/>
+                      <a:round/>
+                      <a:headEnd type="none" w="med" len="med"/>
+                      <a:tailEnd type="none" w="med" len="med"/>
+                    </a:lnT>
+                    <a:lnB w="6350" cap="flat" cmpd="sng" algn="ctr">
+                      <a:solidFill>
+                        <a:srgbClr val="CCCCCC"/>
+                      </a:solidFill>
+                      <a:prstDash val="solid"/>
+                      <a:round/>
+                      <a:headEnd type="none" w="med" len="med"/>
+                      <a:tailEnd type="none" w="med" len="med"/>
+                    </a:lnB>
+                  </a:tcPr>
+                </a:tc>
+              </a:tr>
+              <a:tr h="335280">
+                <a:tc>
+                  <a:txBody>
+                    <a:bodyPr/>
+                    <a:lstStyle/>
+                    <a:p>
+                      <a:pPr indent="0" marL="0">
+                        <a:buNone/>
+                      </a:pPr>
+                      <a:r>
+                        <a:rPr lang="en-US" sz="1400" dirty="0">
+                          <a:solidFill>
+                            <a:srgbClr val="2D2D2D"/>
+                          </a:solidFill>
+                          <a:latin typeface="Arial" pitchFamily="34" charset="0"/>
+                          <a:ea typeface="Arial" pitchFamily="34" charset="-122"/>
+                          <a:cs typeface="Arial" pitchFamily="34" charset="-120"/>
+                        </a:rPr>
+                        <a:t>spatial_reduction — occupancy</a:t>
+                      </a:r>
+                      <a:endParaRPr lang="en-US" sz="1400" dirty="0">
+                        <a:latin typeface="Arial" charset="0"/>
+                        <a:ea typeface="Arial" charset="0"/>
+                        <a:cs typeface="Arial" charset="0"/>
+                      </a:endParaRPr>
+                    </a:p>
+                  </a:txBody>
+                  <a:tcPr marL="91440" marR="91440" marT="45720" marB="45720" anchor="ctr">
+                    <a:lnL w="6350" cap="flat" cmpd="sng" algn="ctr">
+                      <a:solidFill>
+                        <a:srgbClr val="CCCCCC"/>
+                      </a:solidFill>
+                      <a:prstDash val="solid"/>
+                      <a:round/>
+                      <a:headEnd type="none" w="med" len="med"/>
+                      <a:tailEnd type="none" w="med" len="med"/>
+                    </a:lnL>
+                    <a:lnR w="6350" cap="flat" cmpd="sng" algn="ctr">
+                      <a:solidFill>
+                        <a:srgbClr val="CCCCCC"/>
+                      </a:solidFill>
+                      <a:prstDash val="solid"/>
+                      <a:round/>
+                      <a:headEnd type="none" w="med" len="med"/>
+                      <a:tailEnd type="none" w="med" len="med"/>
+                    </a:lnR>
+                    <a:lnT w="6350" cap="flat" cmpd="sng" algn="ctr">
+                      <a:solidFill>
+                        <a:srgbClr val="CCCCCC"/>
+                      </a:solidFill>
+                      <a:prstDash val="solid"/>
+                      <a:round/>
+                      <a:headEnd type="none" w="med" len="med"/>
+                      <a:tailEnd type="none" w="med" len="med"/>
+                    </a:lnT>
+                    <a:lnB w="6350" cap="flat" cmpd="sng" algn="ctr">
+                      <a:solidFill>
+                        <a:srgbClr val="CCCCCC"/>
+                      </a:solidFill>
+                      <a:prstDash val="solid"/>
+                      <a:round/>
+                      <a:headEnd type="none" w="med" len="med"/>
+                      <a:tailEnd type="none" w="med" len="med"/>
+                    </a:lnB>
+                  </a:tcPr>
+                </a:tc>
+                <a:tc>
+                  <a:txBody>
+                    <a:bodyPr/>
+                    <a:lstStyle/>
+                    <a:p>
+                      <a:pPr indent="0" marL="0">
+                        <a:buNone/>
+                      </a:pPr>
+                      <a:r>
+                        <a:rPr lang="en-US" sz="1400" dirty="0">
+                          <a:solidFill>
+                            <a:srgbClr val="2D2D2D"/>
+                          </a:solidFill>
+                          <a:latin typeface="Arial" pitchFamily="34" charset="0"/>
+                          <a:ea typeface="Arial" pitchFamily="34" charset="-122"/>
+                          <a:cs typeface="Arial" pitchFamily="34" charset="-120"/>
+                        </a:rPr>
+                        <a:t>84.5%</a:t>
+                      </a:r>
+                      <a:endParaRPr lang="en-US" sz="1400" dirty="0">
+                        <a:latin typeface="Arial" charset="0"/>
+                        <a:ea typeface="Arial" charset="0"/>
+                        <a:cs typeface="Arial" charset="0"/>
+                      </a:endParaRPr>
+                    </a:p>
+                  </a:txBody>
+                  <a:tcPr marL="91440" marR="91440" marT="45720" marB="45720" anchor="ctr">
+                    <a:lnL w="6350" cap="flat" cmpd="sng" algn="ctr">
+                      <a:solidFill>
+                        <a:srgbClr val="CCCCCC"/>
+                      </a:solidFill>
+                      <a:prstDash val="solid"/>
+                      <a:round/>
+                      <a:headEnd type="none" w="med" len="med"/>
+                      <a:tailEnd type="none" w="med" len="med"/>
+                    </a:lnL>
+                    <a:lnR w="6350" cap="flat" cmpd="sng" algn="ctr">
+                      <a:solidFill>
+                        <a:srgbClr val="CCCCCC"/>
+                      </a:solidFill>
+                      <a:prstDash val="solid"/>
+                      <a:round/>
+                      <a:headEnd type="none" w="med" len="med"/>
+                      <a:tailEnd type="none" w="med" len="med"/>
+                    </a:lnR>
+                    <a:lnT w="6350" cap="flat" cmpd="sng" algn="ctr">
+                      <a:solidFill>
+                        <a:srgbClr val="CCCCCC"/>
+                      </a:solidFill>
+                      <a:prstDash val="solid"/>
+                      <a:round/>
+                      <a:headEnd type="none" w="med" len="med"/>
+                      <a:tailEnd type="none" w="med" len="med"/>
+                    </a:lnT>
+                    <a:lnB w="6350" cap="flat" cmpd="sng" algn="ctr">
+                      <a:solidFill>
+                        <a:srgbClr val="CCCCCC"/>
+                      </a:solidFill>
+                      <a:prstDash val="solid"/>
+                      <a:round/>
+                      <a:headEnd type="none" w="med" len="med"/>
+                      <a:tailEnd type="none" w="med" len="med"/>
+                    </a:lnB>
+                  </a:tcPr>
+                </a:tc>
+                <a:tc>
+                  <a:txBody>
+                    <a:bodyPr/>
+                    <a:lstStyle/>
+                    <a:p>
+                      <a:pPr indent="0" marL="0">
+                        <a:buNone/>
+                      </a:pPr>
+                      <a:r>
+                        <a:rPr lang="en-US" sz="1400" dirty="0">
+                          <a:solidFill>
+                            <a:srgbClr val="2D2D2D"/>
+                          </a:solidFill>
+                          <a:latin typeface="Arial" pitchFamily="34" charset="0"/>
+                          <a:ea typeface="Arial" pitchFamily="34" charset="-122"/>
+                          <a:cs typeface="Arial" pitchFamily="34" charset="-120"/>
+                        </a:rPr>
+                        <a:t>49.0%</a:t>
+                      </a:r>
+                      <a:endParaRPr lang="en-US" sz="1400" dirty="0">
+                        <a:latin typeface="Arial" charset="0"/>
+                        <a:ea typeface="Arial" charset="0"/>
+                        <a:cs typeface="Arial" charset="0"/>
+                      </a:endParaRPr>
+                    </a:p>
+                  </a:txBody>
+                  <a:tcPr marL="91440" marR="91440" marT="45720" marB="45720" anchor="ctr">
+                    <a:lnL w="6350" cap="flat" cmpd="sng" algn="ctr">
+                      <a:solidFill>
+                        <a:srgbClr val="CCCCCC"/>
+                      </a:solidFill>
+                      <a:prstDash val="solid"/>
+                      <a:round/>
+                      <a:headEnd type="none" w="med" len="med"/>
+                      <a:tailEnd type="none" w="med" len="med"/>
+                    </a:lnL>
+                    <a:lnR w="6350" cap="flat" cmpd="sng" algn="ctr">
+                      <a:solidFill>
+                        <a:srgbClr val="CCCCCC"/>
+                      </a:solidFill>
+                      <a:prstDash val="solid"/>
+                      <a:round/>
+                      <a:headEnd type="none" w="med" len="med"/>
+                      <a:tailEnd type="none" w="med" len="med"/>
+                    </a:lnR>
+                    <a:lnT w="6350" cap="flat" cmpd="sng" algn="ctr">
+                      <a:solidFill>
+                        <a:srgbClr val="CCCCCC"/>
+                      </a:solidFill>
+                      <a:prstDash val="solid"/>
+                      <a:round/>
+                      <a:headEnd type="none" w="med" len="med"/>
+                      <a:tailEnd type="none" w="med" len="med"/>
+                    </a:lnT>
+                    <a:lnB w="6350" cap="flat" cmpd="sng" algn="ctr">
+                      <a:solidFill>
+                        <a:srgbClr val="CCCCCC"/>
+                      </a:solidFill>
+                      <a:prstDash val="solid"/>
+                      <a:round/>
+                      <a:headEnd type="none" w="med" len="med"/>
+                      <a:tailEnd type="none" w="med" len="med"/>
+                    </a:lnB>
+                  </a:tcPr>
+                </a:tc>
+              </a:tr>
+            </a:tbl>
+          </a:graphicData>
+        </a:graphic>
+      </p:graphicFrame>
+      <p:sp>
+        <p:nvSpPr>
+          <p:cNvPr id="5" name="Text 2"/>
+          <p:cNvSpPr/>
+          <p:nvPr/>
+        </p:nvSpPr>
+        <p:spPr>
+          <a:xfrm>
+            <a:off x="457200" y="3566160"/>
+            <a:ext cx="8229600" cy="914400"/>
+          </a:xfrm>
+          <a:prstGeom prst="rect">
+            <a:avLst/>
+          </a:prstGeom>
+          <a:noFill/>
+          <a:ln/>
+        </p:spPr>
+        <p:txBody>
+          <a:bodyPr wrap="square" rtlCol="0" anchor="ctr"/>
+          <a:lstStyle/>
+          <a:p>
+            <a:pPr indent="0" marL="0">
+              <a:buNone/>
+            </a:pPr>
+            <a:r>
+              <a:rPr lang="en-US" sz="1100" i="1" dirty="0">
+                <a:solidFill>
+                  <a:srgbClr val="777777"/>
+                </a:solidFill>
+                <a:latin typeface="Arial" pitchFamily="34" charset="0"/>
+                <a:ea typeface="Arial" pitchFamily="34" charset="-122"/>
+                <a:cs typeface="Arial" pitchFamily="34" charset="-120"/>
+              </a:rPr>
+              <a:t>*GB10 exposes no dram__throughput counter (no discrete DRAM/FBPA partition on this unified-memory chip, confirmed via ncu --query-metrics); gpu__compute_memory_throughput substitutes as the closest available metric, not a like-for-like number vs. RTX 4090's dram__throughput.</a:t>
+            </a:r>
+            <a:endParaRPr lang="en-US" sz="1100" dirty="0"/>
+          </a:p>
+        </p:txBody>
+      </p:sp>
+      <p:sp>
+        <p:nvSpPr>
+          <p:cNvPr id="6" name="Text 3"/>
+          <p:cNvSpPr/>
+          <p:nvPr/>
+        </p:nvSpPr>
+        <p:spPr>
+          <a:xfrm>
+            <a:off x="457200" y="4709160"/>
+            <a:ext cx="8229600" cy="292608"/>
+          </a:xfrm>
+          <a:prstGeom prst="rect">
+            <a:avLst/>
+          </a:prstGeom>
+          <a:noFill/>
+          <a:ln/>
+        </p:spPr>
+        <p:txBody>
+          <a:bodyPr wrap="square" rtlCol="0" anchor="ctr"/>
+          <a:lstStyle/>
+          <a:p>
+            <a:pPr indent="0" marL="0">
+              <a:buNone/>
+            </a:pPr>
+            <a:r>
+              <a:rPr lang="en-US" sz="1300" dirty="0">
+                <a:solidFill>
+                  <a:srgbClr val="777777"/>
+                </a:solidFill>
+                <a:latin typeface="Arial" pitchFamily="34" charset="0"/>
+                <a:ea typeface="Arial" pitchFamily="34" charset="-122"/>
+                <a:cs typeface="Arial" pitchFamily="34" charset="-120"/>
+              </a:rPr>
+              <a:t>ncu --launch-count 57 (1 frame), winning 32×8 grid — newpaper/plans/collect_ncu_profile.sh</a:t>
+            </a:r>
+            <a:endParaRPr lang="en-US" sz="1300" dirty="0"/>
+          </a:p>
+        </p:txBody>
+      </p:sp>
+    </p:spTree>
+  </p:cSld>
+  <p:clrMapOvr>
+    <a:masterClrMapping/>
+  </p:clrMapOvr>
+</p:sld>
+</file>
+
+<file path=ppt/slides/slide21.xml><?xml version="1.0" encoding="utf-8"?>
+<p:sld xmlns:a="http://schemas.openxmlformats.org/drawingml/2006/main" xmlns:r="http://schemas.openxmlformats.org/officeDocument/2006/relationships" xmlns:p="http://schemas.openxmlformats.org/presentationml/2006/main">
+  <p:cSld name="Slide 21">
+    <p:spTree>
+      <p:nvGrpSpPr>
+        <p:cNvPr id="1" name=""/>
+        <p:cNvGrpSpPr/>
+        <p:nvPr/>
+      </p:nvGrpSpPr>
+      <p:grpSpPr>
+        <a:xfrm>
+          <a:off x="0" y="0"/>
+          <a:ext cx="0" cy="0"/>
+          <a:chOff x="0" y="0"/>
+          <a:chExt cx="0" cy="0"/>
+        </a:xfrm>
+      </p:grpSpPr>
+      <p:sp>
+        <p:nvSpPr>
+          <p:cNvPr id="2" name="Text 0"/>
+          <p:cNvSpPr/>
+          <p:nvPr/>
+        </p:nvSpPr>
+        <p:spPr>
+          <a:xfrm>
+            <a:off x="457200" y="137160"/>
+            <a:ext cx="8229600" cy="365760"/>
+          </a:xfrm>
+          <a:prstGeom prst="rect">
+            <a:avLst/>
+          </a:prstGeom>
+          <a:noFill/>
+          <a:ln/>
+        </p:spPr>
+        <p:txBody>
+          <a:bodyPr wrap="square" rtlCol="0" anchor="ctr"/>
+          <a:lstStyle/>
+          <a:p>
+            <a:pPr indent="0" marL="0">
+              <a:buNone/>
+            </a:pPr>
+            <a:r>
+              <a:rPr lang="en-US" sz="1400" i="1" dirty="0">
+                <a:solidFill>
+                  <a:srgbClr val="777777"/>
+                </a:solidFill>
+                <a:latin typeface="Arial" pitchFamily="34" charset="0"/>
+                <a:ea typeface="Arial" pitchFamily="34" charset="-122"/>
+                <a:cs typeface="Arial" pitchFamily="34" charset="-120"/>
+              </a:rPr>
+              <a:t>Appendix C — Partially Measured</a:t>
+            </a:r>
+            <a:endParaRPr lang="en-US" sz="1400" dirty="0"/>
+          </a:p>
+        </p:txBody>
+      </p:sp>
+      <p:sp>
+        <p:nvSpPr>
+          <p:cNvPr id="3" name="Text 1"/>
+          <p:cNvSpPr/>
+          <p:nvPr/>
+        </p:nvSpPr>
+        <p:spPr>
+          <a:xfrm>
+            <a:off x="457200" y="548640"/>
+            <a:ext cx="8229600" cy="685800"/>
+          </a:xfrm>
+          <a:prstGeom prst="rect">
+            <a:avLst/>
+          </a:prstGeom>
+          <a:noFill/>
+          <a:ln/>
+        </p:spPr>
+        <p:txBody>
+          <a:bodyPr wrap="square" rtlCol="0" anchor="ctr"/>
+          <a:lstStyle/>
+          <a:p>
+            <a:pPr indent="0" marL="0">
+              <a:buNone/>
+            </a:pPr>
+            <a:r>
+              <a:rPr lang="en-US" sz="2200" b="1" dirty="0">
+                <a:solidFill>
+                  <a:srgbClr val="1F4E79"/>
+                </a:solidFill>
+                <a:latin typeface="Arial" pitchFamily="34" charset="0"/>
+                <a:ea typeface="Arial" pitchFamily="34" charset="-122"/>
+                <a:cs typeface="Arial" pitchFamily="34" charset="-120"/>
+              </a:rPr>
+              <a:t>FP16/BF16: accuracy measured, throughput inconclusive</a:t>
+            </a:r>
+            <a:endParaRPr lang="en-US" sz="2200" dirty="0"/>
+          </a:p>
+        </p:txBody>
+      </p:sp>
+      <p:graphicFrame>
+        <p:nvGraphicFramePr>
+          <p:cNvPr id="22" name="Table 0"/>
+          <p:cNvGraphicFramePr>
+            <a:graphicFrameLocks noGrp="1"/>
+          </p:cNvGraphicFramePr>
+          <p:nvPr>
+            <p:extLst>
+              <p:ext uri="{D42A27DB-BD31-4B8C-83A1-F6EECF244321}">
+                <p14:modId xmlns:p14="http://schemas.microsoft.com/office/powerpoint/2010/main" val="1579011935"/>
+              </p:ext>
+            </p:extLst>
+          </p:nvPr>
+        </p:nvGraphicFramePr>
+        <p:xfrm>
+          <a:off x="457200" y="1280160"/>
+          <a:ext cx="8229600" cy="1463040"/>
         </p:xfrm>
         <a:graphic>
           <a:graphicData uri="http://schemas.openxmlformats.org/drawingml/2006/table">
@@ -8356,7 +9636,7 @@
                 <a:gridCol w="2057400"/>
                 <a:gridCol w="2057400"/>
               </a:tblGrid>
-              <a:tr h="457200">
+              <a:tr h="365760">
                 <a:tc>
                   <a:txBody>
                     <a:bodyPr/>
@@ -8375,74 +9655,6 @@
                           <a:cs typeface="Arial" pitchFamily="34" charset="-120"/>
                         </a:rPr>
                         <a:t>Variant</a:t>
-                      </a:r>
-                      <a:endParaRPr lang="en-US" sz="1500" dirty="0">
-                        <a:latin typeface="Arial" charset="0"/>
-                        <a:ea typeface="Arial" charset="0"/>
-                        <a:cs typeface="Arial" charset="0"/>
-                      </a:endParaRPr>
-                    </a:p>
-                  </a:txBody>
-                  <a:tcPr marL="91440" marR="91440" marT="45720" marB="45720" anchor="ctr">
-                    <a:lnL w="6350" cap="flat" cmpd="sng" algn="ctr">
-                      <a:solidFill>
-                        <a:srgbClr val="CCCCCC"/>
-                      </a:solidFill>
-                      <a:prstDash val="solid"/>
-                      <a:round/>
-                      <a:headEnd type="none" w="med" len="med"/>
-                      <a:tailEnd type="none" w="med" len="med"/>
-                    </a:lnL>
-                    <a:lnR w="6350" cap="flat" cmpd="sng" algn="ctr">
-                      <a:solidFill>
-                        <a:srgbClr val="CCCCCC"/>
-                      </a:solidFill>
-                      <a:prstDash val="solid"/>
-                      <a:round/>
-                      <a:headEnd type="none" w="med" len="med"/>
-                      <a:tailEnd type="none" w="med" len="med"/>
-                    </a:lnR>
-                    <a:lnT w="6350" cap="flat" cmpd="sng" algn="ctr">
-                      <a:solidFill>
-                        <a:srgbClr val="CCCCCC"/>
-                      </a:solidFill>
-                      <a:prstDash val="solid"/>
-                      <a:round/>
-                      <a:headEnd type="none" w="med" len="med"/>
-                      <a:tailEnd type="none" w="med" len="med"/>
-                    </a:lnT>
-                    <a:lnB w="6350" cap="flat" cmpd="sng" algn="ctr">
-                      <a:solidFill>
-                        <a:srgbClr val="CCCCCC"/>
-                      </a:solidFill>
-                      <a:prstDash val="solid"/>
-                      <a:round/>
-                      <a:headEnd type="none" w="med" len="med"/>
-                      <a:tailEnd type="none" w="med" len="med"/>
-                    </a:lnB>
-                    <a:solidFill>
-                      <a:srgbClr val="1F4E79"/>
-                    </a:solidFill>
-                  </a:tcPr>
-                </a:tc>
-                <a:tc>
-                  <a:txBody>
-                    <a:bodyPr/>
-                    <a:lstStyle/>
-                    <a:p>
-                      <a:pPr indent="0" marL="0">
-                        <a:buNone/>
-                      </a:pPr>
-                      <a:r>
-                        <a:rPr lang="en-US" sz="1500" b="1" dirty="0">
-                          <a:solidFill>
-                            <a:srgbClr val="FFFFFF"/>
-                          </a:solidFill>
-                          <a:latin typeface="Arial" pitchFamily="34" charset="0"/>
-                          <a:ea typeface="Arial" pitchFamily="34" charset="-122"/>
-                          <a:cs typeface="Arial" pitchFamily="34" charset="-120"/>
-                        </a:rPr>
-                        <a:t>GPU L8 time</a:t>
                       </a:r>
                       <a:endParaRPr lang="en-US" sz="1500" dirty="0">
                         <a:latin typeface="Arial" charset="0"/>
@@ -8578,7 +9790,7 @@
                           <a:ea typeface="Arial" pitchFamily="34" charset="-122"/>
                           <a:cs typeface="Arial" pitchFamily="34" charset="-120"/>
                         </a:rPr>
-                        <a:t>PSNR-Y / SSIM</a:t>
+                        <a:t>PSNR-Y</a:t>
                       </a:r>
                       <a:endParaRPr lang="en-US" sz="1500" dirty="0">
                         <a:latin typeface="Arial" charset="0"/>
@@ -8629,8 +9841,76 @@
                     </a:solidFill>
                   </a:tcPr>
                 </a:tc>
+                <a:tc>
+                  <a:txBody>
+                    <a:bodyPr/>
+                    <a:lstStyle/>
+                    <a:p>
+                      <a:pPr indent="0" marL="0">
+                        <a:buNone/>
+                      </a:pPr>
+                      <a:r>
+                        <a:rPr lang="en-US" sz="1500" b="1" dirty="0">
+                          <a:solidFill>
+                            <a:srgbClr val="FFFFFF"/>
+                          </a:solidFill>
+                          <a:latin typeface="Arial" pitchFamily="34" charset="0"/>
+                          <a:ea typeface="Arial" pitchFamily="34" charset="-122"/>
+                          <a:cs typeface="Arial" pitchFamily="34" charset="-120"/>
+                        </a:rPr>
+                        <a:t>SSIM</a:t>
+                      </a:r>
+                      <a:endParaRPr lang="en-US" sz="1500" dirty="0">
+                        <a:latin typeface="Arial" charset="0"/>
+                        <a:ea typeface="Arial" charset="0"/>
+                        <a:cs typeface="Arial" charset="0"/>
+                      </a:endParaRPr>
+                    </a:p>
+                  </a:txBody>
+                  <a:tcPr marL="91440" marR="91440" marT="45720" marB="45720" anchor="ctr">
+                    <a:lnL w="6350" cap="flat" cmpd="sng" algn="ctr">
+                      <a:solidFill>
+                        <a:srgbClr val="CCCCCC"/>
+                      </a:solidFill>
+                      <a:prstDash val="solid"/>
+                      <a:round/>
+                      <a:headEnd type="none" w="med" len="med"/>
+                      <a:tailEnd type="none" w="med" len="med"/>
+                    </a:lnL>
+                    <a:lnR w="6350" cap="flat" cmpd="sng" algn="ctr">
+                      <a:solidFill>
+                        <a:srgbClr val="CCCCCC"/>
+                      </a:solidFill>
+                      <a:prstDash val="solid"/>
+                      <a:round/>
+                      <a:headEnd type="none" w="med" len="med"/>
+                      <a:tailEnd type="none" w="med" len="med"/>
+                    </a:lnR>
+                    <a:lnT w="6350" cap="flat" cmpd="sng" algn="ctr">
+                      <a:solidFill>
+                        <a:srgbClr val="CCCCCC"/>
+                      </a:solidFill>
+                      <a:prstDash val="solid"/>
+                      <a:round/>
+                      <a:headEnd type="none" w="med" len="med"/>
+                      <a:tailEnd type="none" w="med" len="med"/>
+                    </a:lnT>
+                    <a:lnB w="6350" cap="flat" cmpd="sng" algn="ctr">
+                      <a:solidFill>
+                        <a:srgbClr val="CCCCCC"/>
+                      </a:solidFill>
+                      <a:prstDash val="solid"/>
+                      <a:round/>
+                      <a:headEnd type="none" w="med" len="med"/>
+                      <a:tailEnd type="none" w="med" len="med"/>
+                    </a:lnB>
+                    <a:solidFill>
+                      <a:srgbClr val="1F4E79"/>
+                    </a:solidFill>
+                  </a:tcPr>
+                </a:tc>
               </a:tr>
-              <a:tr h="457200">
+              <a:tr h="365760">
                 <a:tc>
                   <a:txBody>
                     <a:bodyPr/>
@@ -8642,7 +9922,7 @@
                       <a:r>
                         <a:rPr lang="en-US" sz="1500" dirty="0">
                           <a:solidFill>
-                            <a:srgbClr val="777777"/>
+                            <a:srgbClr val="2D2D2D"/>
                           </a:solidFill>
                           <a:latin typeface="Arial" pitchFamily="34" charset="0"/>
                           <a:ea typeface="Arial" pitchFamily="34" charset="-122"/>
@@ -8707,72 +9987,7 @@
                       <a:r>
                         <a:rPr lang="en-US" sz="1500" dirty="0">
                           <a:solidFill>
-                            <a:srgbClr val="777777"/>
-                          </a:solidFill>
-                          <a:latin typeface="Arial" pitchFamily="34" charset="0"/>
-                          <a:ea typeface="Arial" pitchFamily="34" charset="-122"/>
-                          <a:cs typeface="Arial" pitchFamily="34" charset="-120"/>
-                        </a:rPr>
-                        <a:t>533.19 ms (GB10)</a:t>
-                      </a:r>
-                      <a:endParaRPr lang="en-US" sz="1500" dirty="0">
-                        <a:latin typeface="Arial" charset="0"/>
-                        <a:ea typeface="Arial" charset="0"/>
-                        <a:cs typeface="Arial" charset="0"/>
-                      </a:endParaRPr>
-                    </a:p>
-                  </a:txBody>
-                  <a:tcPr marL="91440" marR="91440" marT="45720" marB="45720" anchor="ctr">
-                    <a:lnL w="6350" cap="flat" cmpd="sng" algn="ctr">
-                      <a:solidFill>
-                        <a:srgbClr val="CCCCCC"/>
-                      </a:solidFill>
-                      <a:prstDash val="solid"/>
-                      <a:round/>
-                      <a:headEnd type="none" w="med" len="med"/>
-                      <a:tailEnd type="none" w="med" len="med"/>
-                    </a:lnL>
-                    <a:lnR w="6350" cap="flat" cmpd="sng" algn="ctr">
-                      <a:solidFill>
-                        <a:srgbClr val="CCCCCC"/>
-                      </a:solidFill>
-                      <a:prstDash val="solid"/>
-                      <a:round/>
-                      <a:headEnd type="none" w="med" len="med"/>
-                      <a:tailEnd type="none" w="med" len="med"/>
-                    </a:lnR>
-                    <a:lnT w="6350" cap="flat" cmpd="sng" algn="ctr">
-                      <a:solidFill>
-                        <a:srgbClr val="CCCCCC"/>
-                      </a:solidFill>
-                      <a:prstDash val="solid"/>
-                      <a:round/>
-                      <a:headEnd type="none" w="med" len="med"/>
-                      <a:tailEnd type="none" w="med" len="med"/>
-                    </a:lnT>
-                    <a:lnB w="6350" cap="flat" cmpd="sng" algn="ctr">
-                      <a:solidFill>
-                        <a:srgbClr val="CCCCCC"/>
-                      </a:solidFill>
-                      <a:prstDash val="solid"/>
-                      <a:round/>
-                      <a:headEnd type="none" w="med" len="med"/>
-                      <a:tailEnd type="none" w="med" len="med"/>
-                    </a:lnB>
-                  </a:tcPr>
-                </a:tc>
-                <a:tc>
-                  <a:txBody>
-                    <a:bodyPr/>
-                    <a:lstStyle/>
-                    <a:p>
-                      <a:pPr indent="0" marL="0">
-                        <a:buNone/>
-                      </a:pPr>
-                      <a:r>
-                        <a:rPr lang="en-US" sz="1500" dirty="0">
-                          <a:solidFill>
-                            <a:srgbClr val="777777"/>
+                            <a:srgbClr val="2D2D2D"/>
                           </a:solidFill>
                           <a:latin typeface="Arial" pitchFamily="34" charset="0"/>
                           <a:ea typeface="Arial" pitchFamily="34" charset="-122"/>
@@ -8837,13 +10052,13 @@
                       <a:r>
                         <a:rPr lang="en-US" sz="1500" dirty="0">
                           <a:solidFill>
-                            <a:srgbClr val="777777"/>
+                            <a:srgbClr val="2D2D2D"/>
                           </a:solidFill>
                           <a:latin typeface="Arial" pitchFamily="34" charset="0"/>
                           <a:ea typeface="Arial" pitchFamily="34" charset="-122"/>
                           <a:cs typeface="Arial" pitchFamily="34" charset="-120"/>
                         </a:rPr>
-                        <a:t>∞ / 1.000</a:t>
+                        <a:t>∞</a:t>
                       </a:r>
                       <a:endParaRPr lang="en-US" sz="1500" dirty="0">
                         <a:latin typeface="Arial" charset="0"/>
@@ -8891,8 +10106,6 @@
                     </a:lnB>
                   </a:tcPr>
                 </a:tc>
-              </a:tr>
-              <a:tr h="457200">
                 <a:tc>
                   <a:txBody>
                     <a:bodyPr/>
@@ -8904,7 +10117,74 @@
                       <a:r>
                         <a:rPr lang="en-US" sz="1500" dirty="0">
                           <a:solidFill>
-                            <a:srgbClr val="777777"/>
+                            <a:srgbClr val="2D2D2D"/>
+                          </a:solidFill>
+                          <a:latin typeface="Arial" pitchFamily="34" charset="0"/>
+                          <a:ea typeface="Arial" pitchFamily="34" charset="-122"/>
+                          <a:cs typeface="Arial" pitchFamily="34" charset="-120"/>
+                        </a:rPr>
+                        <a:t>1.000000</a:t>
+                      </a:r>
+                      <a:endParaRPr lang="en-US" sz="1500" dirty="0">
+                        <a:latin typeface="Arial" charset="0"/>
+                        <a:ea typeface="Arial" charset="0"/>
+                        <a:cs typeface="Arial" charset="0"/>
+                      </a:endParaRPr>
+                    </a:p>
+                  </a:txBody>
+                  <a:tcPr marL="91440" marR="91440" marT="45720" marB="45720" anchor="ctr">
+                    <a:lnL w="6350" cap="flat" cmpd="sng" algn="ctr">
+                      <a:solidFill>
+                        <a:srgbClr val="CCCCCC"/>
+                      </a:solidFill>
+                      <a:prstDash val="solid"/>
+                      <a:round/>
+                      <a:headEnd type="none" w="med" len="med"/>
+                      <a:tailEnd type="none" w="med" len="med"/>
+                    </a:lnL>
+                    <a:lnR w="6350" cap="flat" cmpd="sng" algn="ctr">
+                      <a:solidFill>
+                        <a:srgbClr val="CCCCCC"/>
+                      </a:solidFill>
+                      <a:prstDash val="solid"/>
+                      <a:round/>
+                      <a:headEnd type="none" w="med" len="med"/>
+                      <a:tailEnd type="none" w="med" len="med"/>
+                    </a:lnR>
+                    <a:lnT w="6350" cap="flat" cmpd="sng" algn="ctr">
+                      <a:solidFill>
+                        <a:srgbClr val="CCCCCC"/>
+                      </a:solidFill>
+                      <a:prstDash val="solid"/>
+                      <a:round/>
+                      <a:headEnd type="none" w="med" len="med"/>
+                      <a:tailEnd type="none" w="med" len="med"/>
+                    </a:lnT>
+                    <a:lnB w="6350" cap="flat" cmpd="sng" algn="ctr">
+                      <a:solidFill>
+                        <a:srgbClr val="CCCCCC"/>
+                      </a:solidFill>
+                      <a:prstDash val="solid"/>
+                      <a:round/>
+                      <a:headEnd type="none" w="med" len="med"/>
+                      <a:tailEnd type="none" w="med" len="med"/>
+                    </a:lnB>
+                  </a:tcPr>
+                </a:tc>
+              </a:tr>
+              <a:tr h="365760">
+                <a:tc>
+                  <a:txBody>
+                    <a:bodyPr/>
+                    <a:lstStyle/>
+                    <a:p>
+                      <a:pPr indent="0" marL="0">
+                        <a:buNone/>
+                      </a:pPr>
+                      <a:r>
+                        <a:rPr lang="en-US" sz="1500" dirty="0">
+                          <a:solidFill>
+                            <a:srgbClr val="2D2D2D"/>
                           </a:solidFill>
                           <a:latin typeface="Arial" pitchFamily="34" charset="0"/>
                           <a:ea typeface="Arial" pitchFamily="34" charset="-122"/>
@@ -8969,13 +10249,13 @@
                       <a:r>
                         <a:rPr lang="en-US" sz="1500" dirty="0">
                           <a:solidFill>
-                            <a:srgbClr val="777777"/>
+                            <a:srgbClr val="2D2D2D"/>
                           </a:solidFill>
                           <a:latin typeface="Arial" pitchFamily="34" charset="0"/>
                           <a:ea typeface="Arial" pitchFamily="34" charset="-122"/>
                           <a:cs typeface="Arial" pitchFamily="34" charset="-120"/>
                         </a:rPr>
-                        <a:t>TBD</a:t>
+                        <a:t>339,712</a:t>
                       </a:r>
                       <a:endParaRPr lang="en-US" sz="1500" dirty="0">
                         <a:latin typeface="Arial" charset="0"/>
@@ -9034,13 +10314,13 @@
                       <a:r>
                         <a:rPr lang="en-US" sz="1500" dirty="0">
                           <a:solidFill>
-                            <a:srgbClr val="777777"/>
+                            <a:srgbClr val="2D2D2D"/>
                           </a:solidFill>
                           <a:latin typeface="Arial" pitchFamily="34" charset="0"/>
                           <a:ea typeface="Arial" pitchFamily="34" charset="-122"/>
                           <a:cs typeface="Arial" pitchFamily="34" charset="-120"/>
                         </a:rPr>
-                        <a:t>TBD</a:t>
+                        <a:t>64.64 dB</a:t>
                       </a:r>
                       <a:endParaRPr lang="en-US" sz="1500" dirty="0">
                         <a:latin typeface="Arial" charset="0"/>
@@ -9099,13 +10379,13 @@
                       <a:r>
                         <a:rPr lang="en-US" sz="1500" dirty="0">
                           <a:solidFill>
-                            <a:srgbClr val="777777"/>
+                            <a:srgbClr val="2D2D2D"/>
                           </a:solidFill>
                           <a:latin typeface="Arial" pitchFamily="34" charset="0"/>
                           <a:ea typeface="Arial" pitchFamily="34" charset="-122"/>
                           <a:cs typeface="Arial" pitchFamily="34" charset="-120"/>
                         </a:rPr>
-                        <a:t>TBD</a:t>
+                        <a:t>0.999859</a:t>
                       </a:r>
                       <a:endParaRPr lang="en-US" sz="1500" dirty="0">
                         <a:latin typeface="Arial" charset="0"/>
@@ -9154,7 +10434,7 @@
                   </a:tcPr>
                 </a:tc>
               </a:tr>
-              <a:tr h="457200">
+              <a:tr h="365760">
                 <a:tc>
                   <a:txBody>
                     <a:bodyPr/>
@@ -9166,7 +10446,7 @@
                       <a:r>
                         <a:rPr lang="en-US" sz="1500" dirty="0">
                           <a:solidFill>
-                            <a:srgbClr val="777777"/>
+                            <a:srgbClr val="2D2D2D"/>
                           </a:solidFill>
                           <a:latin typeface="Arial" pitchFamily="34" charset="0"/>
                           <a:ea typeface="Arial" pitchFamily="34" charset="-122"/>
@@ -9231,13 +10511,13 @@
                       <a:r>
                         <a:rPr lang="en-US" sz="1500" dirty="0">
                           <a:solidFill>
-                            <a:srgbClr val="777777"/>
+                            <a:srgbClr val="2D2D2D"/>
                           </a:solidFill>
                           <a:latin typeface="Arial" pitchFamily="34" charset="0"/>
                           <a:ea typeface="Arial" pitchFamily="34" charset="-122"/>
                           <a:cs typeface="Arial" pitchFamily="34" charset="-120"/>
                         </a:rPr>
-                        <a:t>TBD</a:t>
+                        <a:t>2,844,668</a:t>
                       </a:r>
                       <a:endParaRPr lang="en-US" sz="1500" dirty="0">
                         <a:latin typeface="Arial" charset="0"/>
@@ -9296,13 +10576,13 @@
                       <a:r>
                         <a:rPr lang="en-US" sz="1500" dirty="0">
                           <a:solidFill>
-                            <a:srgbClr val="777777"/>
+                            <a:srgbClr val="2D2D2D"/>
                           </a:solidFill>
                           <a:latin typeface="Arial" pitchFamily="34" charset="0"/>
                           <a:ea typeface="Arial" pitchFamily="34" charset="-122"/>
                           <a:cs typeface="Arial" pitchFamily="34" charset="-120"/>
                         </a:rPr>
-                        <a:t>TBD</a:t>
+                        <a:t>55.40 dB</a:t>
                       </a:r>
                       <a:endParaRPr lang="en-US" sz="1500" dirty="0">
                         <a:latin typeface="Arial" charset="0"/>
@@ -9361,13 +10641,13 @@
                       <a:r>
                         <a:rPr lang="en-US" sz="1500" dirty="0">
                           <a:solidFill>
-                            <a:srgbClr val="777777"/>
+                            <a:srgbClr val="2D2D2D"/>
                           </a:solidFill>
                           <a:latin typeface="Arial" pitchFamily="34" charset="0"/>
                           <a:ea typeface="Arial" pitchFamily="34" charset="-122"/>
                           <a:cs typeface="Arial" pitchFamily="34" charset="-120"/>
                         </a:rPr>
-                        <a:t>TBD</a:t>
+                        <a:t>0.998824</a:t>
                       </a:r>
                       <a:endParaRPr lang="en-US" sz="1500" dirty="0">
                         <a:latin typeface="Arial" charset="0"/>
@@ -9422,7 +10702,207 @@
       </p:graphicFrame>
       <p:sp>
         <p:nvSpPr>
+          <p:cNvPr id="5" name="Shape 2"/>
+          <p:cNvSpPr/>
+          <p:nvPr/>
+        </p:nvSpPr>
+        <p:spPr>
+          <a:xfrm>
+            <a:off x="457200" y="2880360"/>
+            <a:ext cx="1920240" cy="292608"/>
+          </a:xfrm>
+          <a:prstGeom prst="roundRect">
+            <a:avLst>
+              <a:gd name="adj" fmla="val 15625"/>
+            </a:avLst>
+          </a:prstGeom>
+          <a:solidFill>
+            <a:srgbClr val="FDEDEC"/>
+          </a:solidFill>
+          <a:ln w="12700">
+            <a:solidFill>
+              <a:srgbClr val="C0392B"/>
+            </a:solidFill>
+            <a:prstDash val="solid"/>
+          </a:ln>
+        </p:spPr>
+      </p:sp>
+      <p:sp>
+        <p:nvSpPr>
+          <p:cNvPr id="6" name="Text 3"/>
+          <p:cNvSpPr/>
+          <p:nvPr/>
+        </p:nvSpPr>
+        <p:spPr>
+          <a:xfrm>
+            <a:off x="457200" y="2880360"/>
+            <a:ext cx="1920240" cy="292608"/>
+          </a:xfrm>
+          <a:prstGeom prst="rect">
+            <a:avLst/>
+          </a:prstGeom>
+          <a:noFill/>
+          <a:ln/>
+        </p:spPr>
+        <p:txBody>
+          <a:bodyPr wrap="square" rtlCol="0" anchor="ctr"/>
+          <a:lstStyle/>
+          <a:p>
+            <a:pPr algn="ctr" indent="0" marL="0">
+              <a:buNone/>
+            </a:pPr>
+            <a:r>
+              <a:rPr lang="en-US" sz="1200" b="1" dirty="0">
+                <a:solidFill>
+                  <a:srgbClr val="C0392B"/>
+                </a:solidFill>
+                <a:latin typeface="Arial" pitchFamily="34" charset="0"/>
+                <a:ea typeface="Arial" pitchFamily="34" charset="-122"/>
+                <a:cs typeface="Arial" pitchFamily="34" charset="-120"/>
+              </a:rPr>
+              <a:t>THROUGHPUT: INCONCLUSIVE</a:t>
+            </a:r>
+            <a:endParaRPr lang="en-US" sz="1200" dirty="0"/>
+          </a:p>
+        </p:txBody>
+      </p:sp>
+      <p:sp>
+        <p:nvSpPr>
           <p:cNvPr id="7" name="Text 4"/>
+          <p:cNvSpPr/>
+          <p:nvPr/>
+        </p:nvSpPr>
+        <p:spPr>
+          <a:xfrm>
+            <a:off x="457200" y="3291840"/>
+            <a:ext cx="8229600" cy="1325880"/>
+          </a:xfrm>
+          <a:prstGeom prst="rect">
+            <a:avLst/>
+          </a:prstGeom>
+          <a:noFill/>
+          <a:ln/>
+        </p:spPr>
+        <p:txBody>
+          <a:bodyPr wrap="square" rtlCol="0" anchor="ctr"/>
+          <a:lstStyle/>
+          <a:p>
+            <a:pPr marL="342900" indent="-342900">
+              <a:spcAft>
+                <a:spcPts val="600"/>
+              </a:spcAft>
+              <a:buSzPct val="100000"/>
+              <a:buChar char="•"/>
+            </a:pPr>
+            <a:r>
+              <a:rPr lang="en-US" sz="1200" b="1" dirty="0">
+                <a:solidFill>
+                  <a:srgbClr val="2D2D2D"/>
+                </a:solidFill>
+                <a:latin typeface="Arial" pitchFamily="34" charset="0"/>
+                <a:ea typeface="Arial" pitchFamily="34" charset="-122"/>
+                <a:cs typeface="Arial" pitchFamily="34" charset="-120"/>
+              </a:rPr>
+              <a:t>FP16 is far more accurate than BF16 here: </a:t>
+            </a:r>
+            <a:pPr indent="0" marL="0">
+              <a:spcAft>
+                <a:spcPts val="600"/>
+              </a:spcAft>
+              <a:buNone/>
+            </a:pPr>
+            <a:r>
+              <a:rPr lang="en-US" sz="1200" dirty="0">
+                <a:solidFill>
+                  <a:srgbClr val="2D2D2D"/>
+                </a:solidFill>
+                <a:latin typeface="Arial" pitchFamily="34" charset="0"/>
+                <a:ea typeface="Arial" pitchFamily="34" charset="-122"/>
+                <a:cs typeface="Arial" pitchFamily="34" charset="-120"/>
+              </a:rPr>
+              <a:t>FP16's 10-bit mantissa outperforms BF16's 7-bit mantissa when the data doesn't need BF16's extra exponent range.</a:t>
+            </a:r>
+            <a:endParaRPr lang="en-US" sz="1200" dirty="0"/>
+          </a:p>
+          <a:p>
+            <a:pPr indent="0" marL="0">
+              <a:spcAft>
+                <a:spcPts val="600"/>
+              </a:spcAft>
+              <a:buNone/>
+            </a:pPr>
+            <a:r>
+              <a:rPr lang="en-US" sz="1200" b="1" dirty="0">
+                <a:solidFill>
+                  <a:srgbClr val="2D2D2D"/>
+                </a:solidFill>
+                <a:latin typeface="Arial" pitchFamily="34" charset="0"/>
+                <a:ea typeface="Arial" pitchFamily="34" charset="-122"/>
+                <a:cs typeface="Arial" pitchFamily="34" charset="-120"/>
+              </a:rPr>
+              <a:t>Bonus: </a:t>
+            </a:r>
+            <a:pPr indent="0" marL="0">
+              <a:spcAft>
+                <a:spcPts val="600"/>
+              </a:spcAft>
+              <a:buNone/>
+            </a:pPr>
+            <a:r>
+              <a:rPr lang="en-US" sz="1200" dirty="0">
+                <a:solidFill>
+                  <a:srgbClr val="2D2D2D"/>
+                </a:solidFill>
+                <a:latin typeface="Arial" pitchFamily="34" charset="0"/>
+                <a:ea typeface="Arial" pitchFamily="34" charset="-122"/>
+                <a:cs typeface="Arial" pitchFamily="34" charset="-120"/>
+              </a:rPr>
+              <a:t>diff_bytes and PSNR-Y are identical on GB10 and RTX 4090 — determinism holds even at reduced precision.</a:t>
+            </a:r>
+            <a:endParaRPr lang="en-US" sz="1200" dirty="0"/>
+          </a:p>
+          <a:p>
+            <a:pPr indent="0" marL="0">
+              <a:spcAft>
+                <a:spcPts val="600"/>
+              </a:spcAft>
+              <a:buNone/>
+            </a:pPr>
+            <a:r>
+              <a:rPr lang="en-US" sz="1200" b="1" dirty="0">
+                <a:solidFill>
+                  <a:srgbClr val="2D2D2D"/>
+                </a:solidFill>
+                <a:latin typeface="Arial" pitchFamily="34" charset="0"/>
+                <a:ea typeface="Arial" pitchFamily="34" charset="-122"/>
+                <a:cs typeface="Arial" pitchFamily="34" charset="-120"/>
+              </a:rPr>
+              <a:t>Kernel-time numbers are excluded: </a:t>
+            </a:r>
+            <a:pPr indent="0" marL="0">
+              <a:spcAft>
+                <a:spcPts val="600"/>
+              </a:spcAft>
+              <a:buNone/>
+            </a:pPr>
+            <a:r>
+              <a:rPr lang="en-US" sz="1200" dirty="0">
+                <a:solidFill>
+                  <a:srgbClr val="2D2D2D"/>
+                </a:solidFill>
+                <a:latin typeface="Arial" pitchFamily="34" charset="0"/>
+                <a:ea typeface="Arial" pitchFamily="34" charset="-122"/>
+                <a:cs typeface="Arial" pitchFamily="34" charset="-120"/>
+              </a:rPr>
+              <a:t>this implementation converts precision on the host per-channel, which dominates the measured GPU-time window — not a real GPU speed comparison.</a:t>
+            </a:r>
+            <a:endParaRPr lang="en-US" sz="1200" dirty="0"/>
+          </a:p>
+        </p:txBody>
+      </p:sp>
+      <p:sp>
+        <p:nvSpPr>
+          <p:cNvPr id="8" name="Text 5"/>
           <p:cNvSpPr/>
           <p:nvPr/>
         </p:nvSpPr>
@@ -9453,7 +10933,7 @@
                 <a:ea typeface="Arial" pitchFamily="34" charset="-122"/>
                 <a:cs typeface="Arial" pitchFamily="34" charset="-120"/>
               </a:rPr>
-              <a:t>Run: newpaper/plans/collect_fp16_comparison.sh on both machines, then fill this table.</a:t>
+              <a:t>collect_fp16_comparison.sh, both platforms, grid 32×8_256 — quality numbers only</a:t>
             </a:r>
             <a:endParaRPr lang="en-US" sz="1300" dirty="0"/>
           </a:p>
